--- a/Diagrama de fuerzas.pptx
+++ b/Diagrama de fuerzas.pptx
@@ -6,6 +6,7 @@
   </p:sldMasterIdLst>
   <p:sldIdLst>
     <p:sldId id="256" r:id="rId2"/>
+    <p:sldId id="257" r:id="rId3"/>
   </p:sldIdLst>
   <p:sldSz cx="12192000" cy="6858000"/>
   <p:notesSz cx="6858000" cy="9144000"/>
@@ -104,6 +105,11 @@
       </a:defRPr>
     </a:lvl9pPr>
   </p:defaultTextStyle>
+  <p:extLst>
+    <p:ext uri="{EFAFB233-063F-42B5-8137-9DF3F51BA10A}">
+      <p15:sldGuideLst xmlns:p15="http://schemas.microsoft.com/office/powerpoint/2012/main"/>
+    </p:ext>
+  </p:extLst>
 </p:presentation>
 </file>
 
@@ -254,7 +260,7 @@
           <a:p>
             <a:fld id="{0AEDF107-4892-4B0C-A9D7-BED2F2CF652A}" type="datetimeFigureOut">
               <a:rPr lang="es-ES" smtClean="0"/>
-              <a:t>14/11/2024</a:t>
+              <a:t>22/11/2024</a:t>
             </a:fld>
             <a:endParaRPr lang="es-ES"/>
           </a:p>
@@ -452,7 +458,7 @@
           <a:p>
             <a:fld id="{0AEDF107-4892-4B0C-A9D7-BED2F2CF652A}" type="datetimeFigureOut">
               <a:rPr lang="es-ES" smtClean="0"/>
-              <a:t>14/11/2024</a:t>
+              <a:t>22/11/2024</a:t>
             </a:fld>
             <a:endParaRPr lang="es-ES"/>
           </a:p>
@@ -660,7 +666,7 @@
           <a:p>
             <a:fld id="{0AEDF107-4892-4B0C-A9D7-BED2F2CF652A}" type="datetimeFigureOut">
               <a:rPr lang="es-ES" smtClean="0"/>
-              <a:t>14/11/2024</a:t>
+              <a:t>22/11/2024</a:t>
             </a:fld>
             <a:endParaRPr lang="es-ES"/>
           </a:p>
@@ -858,7 +864,7 @@
           <a:p>
             <a:fld id="{0AEDF107-4892-4B0C-A9D7-BED2F2CF652A}" type="datetimeFigureOut">
               <a:rPr lang="es-ES" smtClean="0"/>
-              <a:t>14/11/2024</a:t>
+              <a:t>22/11/2024</a:t>
             </a:fld>
             <a:endParaRPr lang="es-ES"/>
           </a:p>
@@ -1133,7 +1139,7 @@
           <a:p>
             <a:fld id="{0AEDF107-4892-4B0C-A9D7-BED2F2CF652A}" type="datetimeFigureOut">
               <a:rPr lang="es-ES" smtClean="0"/>
-              <a:t>14/11/2024</a:t>
+              <a:t>22/11/2024</a:t>
             </a:fld>
             <a:endParaRPr lang="es-ES"/>
           </a:p>
@@ -1398,7 +1404,7 @@
           <a:p>
             <a:fld id="{0AEDF107-4892-4B0C-A9D7-BED2F2CF652A}" type="datetimeFigureOut">
               <a:rPr lang="es-ES" smtClean="0"/>
-              <a:t>14/11/2024</a:t>
+              <a:t>22/11/2024</a:t>
             </a:fld>
             <a:endParaRPr lang="es-ES"/>
           </a:p>
@@ -1810,7 +1816,7 @@
           <a:p>
             <a:fld id="{0AEDF107-4892-4B0C-A9D7-BED2F2CF652A}" type="datetimeFigureOut">
               <a:rPr lang="es-ES" smtClean="0"/>
-              <a:t>14/11/2024</a:t>
+              <a:t>22/11/2024</a:t>
             </a:fld>
             <a:endParaRPr lang="es-ES"/>
           </a:p>
@@ -1951,7 +1957,7 @@
           <a:p>
             <a:fld id="{0AEDF107-4892-4B0C-A9D7-BED2F2CF652A}" type="datetimeFigureOut">
               <a:rPr lang="es-ES" smtClean="0"/>
-              <a:t>14/11/2024</a:t>
+              <a:t>22/11/2024</a:t>
             </a:fld>
             <a:endParaRPr lang="es-ES"/>
           </a:p>
@@ -2064,7 +2070,7 @@
           <a:p>
             <a:fld id="{0AEDF107-4892-4B0C-A9D7-BED2F2CF652A}" type="datetimeFigureOut">
               <a:rPr lang="es-ES" smtClean="0"/>
-              <a:t>14/11/2024</a:t>
+              <a:t>22/11/2024</a:t>
             </a:fld>
             <a:endParaRPr lang="es-ES"/>
           </a:p>
@@ -2375,7 +2381,7 @@
           <a:p>
             <a:fld id="{0AEDF107-4892-4B0C-A9D7-BED2F2CF652A}" type="datetimeFigureOut">
               <a:rPr lang="es-ES" smtClean="0"/>
-              <a:t>14/11/2024</a:t>
+              <a:t>22/11/2024</a:t>
             </a:fld>
             <a:endParaRPr lang="es-ES"/>
           </a:p>
@@ -2663,7 +2669,7 @@
           <a:p>
             <a:fld id="{0AEDF107-4892-4B0C-A9D7-BED2F2CF652A}" type="datetimeFigureOut">
               <a:rPr lang="es-ES" smtClean="0"/>
-              <a:t>14/11/2024</a:t>
+              <a:t>22/11/2024</a:t>
             </a:fld>
             <a:endParaRPr lang="es-ES"/>
           </a:p>
@@ -2904,7 +2910,7 @@
           <a:p>
             <a:fld id="{0AEDF107-4892-4B0C-A9D7-BED2F2CF652A}" type="datetimeFigureOut">
               <a:rPr lang="es-ES" smtClean="0"/>
-              <a:t>14/11/2024</a:t>
+              <a:t>22/11/2024</a:t>
             </a:fld>
             <a:endParaRPr lang="es-ES"/>
           </a:p>
@@ -3419,54 +3425,6 @@
       </p:sp>
       <p:sp>
         <p:nvSpPr>
-          <p:cNvPr id="29" name="Rectángulo: esquinas redondeadas 28">
-            <a:extLst>
-              <a:ext uri="{FF2B5EF4-FFF2-40B4-BE49-F238E27FC236}">
-                <a16:creationId xmlns:a16="http://schemas.microsoft.com/office/drawing/2014/main" id="{B835C66B-D8C3-4FB8-935C-FA1CF7445B55}"/>
-              </a:ext>
-            </a:extLst>
-          </p:cNvPr>
-          <p:cNvSpPr/>
-          <p:nvPr/>
-        </p:nvSpPr>
-        <p:spPr>
-          <a:xfrm rot="4403732">
-            <a:off x="6831657" y="4584390"/>
-            <a:ext cx="2650921" cy="293615"/>
-          </a:xfrm>
-          <a:prstGeom prst="roundRect">
-            <a:avLst>
-              <a:gd name="adj" fmla="val 50000"/>
-            </a:avLst>
-          </a:prstGeom>
-        </p:spPr>
-        <p:style>
-          <a:lnRef idx="2">
-            <a:schemeClr val="accent1">
-              <a:shade val="50000"/>
-            </a:schemeClr>
-          </a:lnRef>
-          <a:fillRef idx="1">
-            <a:schemeClr val="accent1"/>
-          </a:fillRef>
-          <a:effectRef idx="0">
-            <a:schemeClr val="accent1"/>
-          </a:effectRef>
-          <a:fontRef idx="minor">
-            <a:schemeClr val="lt1"/>
-          </a:fontRef>
-        </p:style>
-        <p:txBody>
-          <a:bodyPr rtlCol="0" anchor="ctr"/>
-          <a:lstStyle/>
-          <a:p>
-            <a:pPr algn="ctr"/>
-            <a:endParaRPr lang="es-ES"/>
-          </a:p>
-        </p:txBody>
-      </p:sp>
-      <p:sp>
-        <p:nvSpPr>
           <p:cNvPr id="4" name="Rectángulo: esquinas redondeadas 3">
             <a:extLst>
               <a:ext uri="{FF2B5EF4-FFF2-40B4-BE49-F238E27FC236}">
@@ -3513,234 +3471,6 @@
           </a:p>
         </p:txBody>
       </p:sp>
-      <p:grpSp>
-        <p:nvGrpSpPr>
-          <p:cNvPr id="28" name="Grupo 27">
-            <a:extLst>
-              <a:ext uri="{FF2B5EF4-FFF2-40B4-BE49-F238E27FC236}">
-                <a16:creationId xmlns:a16="http://schemas.microsoft.com/office/drawing/2014/main" id="{C8ABD43F-6FA5-4C3D-8BA3-F3846E562030}"/>
-              </a:ext>
-            </a:extLst>
-          </p:cNvPr>
-          <p:cNvGrpSpPr/>
-          <p:nvPr/>
-        </p:nvGrpSpPr>
-        <p:grpSpPr>
-          <a:xfrm>
-            <a:off x="8423340" y="5118343"/>
-            <a:ext cx="1113088" cy="1155724"/>
-            <a:chOff x="6915149" y="933450"/>
-            <a:chExt cx="1113088" cy="1155724"/>
-          </a:xfrm>
-        </p:grpSpPr>
-        <p:sp>
-          <p:nvSpPr>
-            <p:cNvPr id="6" name="Elipse 5">
-              <a:extLst>
-                <a:ext uri="{FF2B5EF4-FFF2-40B4-BE49-F238E27FC236}">
-                  <a16:creationId xmlns:a16="http://schemas.microsoft.com/office/drawing/2014/main" id="{38F99E0C-FF19-426A-B17D-87C106DB114B}"/>
-                </a:ext>
-              </a:extLst>
-            </p:cNvPr>
-            <p:cNvSpPr/>
-            <p:nvPr/>
-          </p:nvSpPr>
-          <p:spPr>
-            <a:xfrm>
-              <a:off x="6915149" y="1614352"/>
-              <a:ext cx="160867" cy="160867"/>
-            </a:xfrm>
-            <a:prstGeom prst="ellipse">
-              <a:avLst/>
-            </a:prstGeom>
-            <a:solidFill>
-              <a:schemeClr val="accent2"/>
-            </a:solidFill>
-          </p:spPr>
-          <p:style>
-            <a:lnRef idx="2">
-              <a:schemeClr val="dk1">
-                <a:shade val="50000"/>
-              </a:schemeClr>
-            </a:lnRef>
-            <a:fillRef idx="1">
-              <a:schemeClr val="dk1"/>
-            </a:fillRef>
-            <a:effectRef idx="0">
-              <a:schemeClr val="dk1"/>
-            </a:effectRef>
-            <a:fontRef idx="minor">
-              <a:schemeClr val="lt1"/>
-            </a:fontRef>
-          </p:style>
-          <p:txBody>
-            <a:bodyPr rtlCol="0" anchor="ctr"/>
-            <a:lstStyle/>
-            <a:p>
-              <a:pPr algn="ctr"/>
-              <a:endParaRPr lang="es-ES"/>
-            </a:p>
-          </p:txBody>
-        </p:sp>
-        <p:cxnSp>
-          <p:nvCxnSpPr>
-            <p:cNvPr id="8" name="Conector recto de flecha 7">
-              <a:extLst>
-                <a:ext uri="{FF2B5EF4-FFF2-40B4-BE49-F238E27FC236}">
-                  <a16:creationId xmlns:a16="http://schemas.microsoft.com/office/drawing/2014/main" id="{7AE0561D-A388-4CC6-85F1-46E2793D1D2E}"/>
-                </a:ext>
-              </a:extLst>
-            </p:cNvPr>
-            <p:cNvCxnSpPr>
-              <a:cxnSpLocks/>
-            </p:cNvCxnSpPr>
-            <p:nvPr/>
-          </p:nvCxnSpPr>
-          <p:spPr>
-            <a:xfrm flipV="1">
-              <a:off x="6968265" y="1681602"/>
-              <a:ext cx="833694" cy="13184"/>
-            </a:xfrm>
-            <a:prstGeom prst="straightConnector1">
-              <a:avLst/>
-            </a:prstGeom>
-            <a:ln w="76200">
-              <a:solidFill>
-                <a:schemeClr val="tx1"/>
-              </a:solidFill>
-              <a:tailEnd type="triangle"/>
-            </a:ln>
-          </p:spPr>
-          <p:style>
-            <a:lnRef idx="1">
-              <a:schemeClr val="dk1"/>
-            </a:lnRef>
-            <a:fillRef idx="0">
-              <a:schemeClr val="dk1"/>
-            </a:fillRef>
-            <a:effectRef idx="0">
-              <a:schemeClr val="dk1"/>
-            </a:effectRef>
-            <a:fontRef idx="minor">
-              <a:schemeClr val="tx1"/>
-            </a:fontRef>
-          </p:style>
-        </p:cxnSp>
-        <p:cxnSp>
-          <p:nvCxnSpPr>
-            <p:cNvPr id="10" name="Conector recto de flecha 9">
-              <a:extLst>
-                <a:ext uri="{FF2B5EF4-FFF2-40B4-BE49-F238E27FC236}">
-                  <a16:creationId xmlns:a16="http://schemas.microsoft.com/office/drawing/2014/main" id="{4FDD7AC0-D639-4274-9513-3A8A6738C272}"/>
-                </a:ext>
-              </a:extLst>
-            </p:cNvPr>
-            <p:cNvCxnSpPr>
-              <a:cxnSpLocks/>
-            </p:cNvCxnSpPr>
-            <p:nvPr/>
-          </p:nvCxnSpPr>
-          <p:spPr>
-            <a:xfrm flipH="1" flipV="1">
-              <a:off x="6995582" y="933450"/>
-              <a:ext cx="1" cy="801690"/>
-            </a:xfrm>
-            <a:prstGeom prst="straightConnector1">
-              <a:avLst/>
-            </a:prstGeom>
-            <a:ln w="76200">
-              <a:solidFill>
-                <a:schemeClr val="tx1"/>
-              </a:solidFill>
-              <a:tailEnd type="triangle"/>
-            </a:ln>
-          </p:spPr>
-          <p:style>
-            <a:lnRef idx="1">
-              <a:schemeClr val="dk1"/>
-            </a:lnRef>
-            <a:fillRef idx="0">
-              <a:schemeClr val="dk1"/>
-            </a:fillRef>
-            <a:effectRef idx="0">
-              <a:schemeClr val="dk1"/>
-            </a:effectRef>
-            <a:fontRef idx="minor">
-              <a:schemeClr val="tx1"/>
-            </a:fontRef>
-          </p:style>
-        </p:cxnSp>
-        <p:sp>
-          <p:nvSpPr>
-            <p:cNvPr id="16" name="CuadroTexto 15">
-              <a:extLst>
-                <a:ext uri="{FF2B5EF4-FFF2-40B4-BE49-F238E27FC236}">
-                  <a16:creationId xmlns:a16="http://schemas.microsoft.com/office/drawing/2014/main" id="{DFA80A53-229D-4B42-95C2-6B682783639E}"/>
-                </a:ext>
-              </a:extLst>
-            </p:cNvPr>
-            <p:cNvSpPr txBox="1"/>
-            <p:nvPr/>
-          </p:nvSpPr>
-          <p:spPr>
-            <a:xfrm>
-              <a:off x="7122253" y="1048263"/>
-              <a:ext cx="647934" cy="369332"/>
-            </a:xfrm>
-            <a:prstGeom prst="rect">
-              <a:avLst/>
-            </a:prstGeom>
-            <a:noFill/>
-          </p:spPr>
-          <p:txBody>
-            <a:bodyPr wrap="none" rtlCol="0">
-              <a:spAutoFit/>
-            </a:bodyPr>
-            <a:lstStyle/>
-            <a:p>
-              <a:r>
-                <a:rPr lang="es-ES" dirty="0"/>
-                <a:t>R10y</a:t>
-              </a:r>
-            </a:p>
-          </p:txBody>
-        </p:sp>
-        <p:sp>
-          <p:nvSpPr>
-            <p:cNvPr id="17" name="CuadroTexto 16">
-              <a:extLst>
-                <a:ext uri="{FF2B5EF4-FFF2-40B4-BE49-F238E27FC236}">
-                  <a16:creationId xmlns:a16="http://schemas.microsoft.com/office/drawing/2014/main" id="{ECD41FE2-8B7B-468B-AFC8-F1F1F940E2C0}"/>
-                </a:ext>
-              </a:extLst>
-            </p:cNvPr>
-            <p:cNvSpPr txBox="1"/>
-            <p:nvPr/>
-          </p:nvSpPr>
-          <p:spPr>
-            <a:xfrm>
-              <a:off x="7385112" y="1719842"/>
-              <a:ext cx="643125" cy="369332"/>
-            </a:xfrm>
-            <a:prstGeom prst="rect">
-              <a:avLst/>
-            </a:prstGeom>
-            <a:noFill/>
-          </p:spPr>
-          <p:txBody>
-            <a:bodyPr wrap="none" rtlCol="0">
-              <a:spAutoFit/>
-            </a:bodyPr>
-            <a:lstStyle/>
-            <a:p>
-              <a:r>
-                <a:rPr lang="es-ES" dirty="0"/>
-                <a:t>R10x</a:t>
-              </a:r>
-            </a:p>
-          </p:txBody>
-        </p:sp>
-      </p:grpSp>
       <p:sp>
         <p:nvSpPr>
           <p:cNvPr id="30" name="Rectángulo: esquinas redondeadas 29">
@@ -3791,10 +3521,10 @@
       </p:sp>
       <p:sp>
         <p:nvSpPr>
-          <p:cNvPr id="31" name="CuadroTexto 30">
+          <p:cNvPr id="32" name="CuadroTexto 31">
             <a:extLst>
               <a:ext uri="{FF2B5EF4-FFF2-40B4-BE49-F238E27FC236}">
-                <a16:creationId xmlns:a16="http://schemas.microsoft.com/office/drawing/2014/main" id="{88F74479-2386-4475-BAA1-B1155D8970C3}"/>
+                <a16:creationId xmlns:a16="http://schemas.microsoft.com/office/drawing/2014/main" id="{5EF945BB-43FE-40C7-B04E-AD4E7B373532}"/>
               </a:ext>
             </a:extLst>
           </p:cNvPr>
@@ -3803,8 +3533,8 @@
         </p:nvSpPr>
         <p:spPr>
           <a:xfrm>
-            <a:off x="8551690" y="4590695"/>
-            <a:ext cx="856388" cy="369332"/>
+            <a:off x="3485471" y="4406029"/>
+            <a:ext cx="1098058" cy="461665"/>
           </a:xfrm>
           <a:prstGeom prst="rect">
             <a:avLst/>
@@ -3818,42 +3548,7 @@
           <a:lstStyle/>
           <a:p>
             <a:r>
-              <a:rPr lang="es-ES" dirty="0"/>
-              <a:t>Barra 1</a:t>
-            </a:r>
-          </a:p>
-        </p:txBody>
-      </p:sp>
-      <p:sp>
-        <p:nvSpPr>
-          <p:cNvPr id="32" name="CuadroTexto 31">
-            <a:extLst>
-              <a:ext uri="{FF2B5EF4-FFF2-40B4-BE49-F238E27FC236}">
-                <a16:creationId xmlns:a16="http://schemas.microsoft.com/office/drawing/2014/main" id="{5EF945BB-43FE-40C7-B04E-AD4E7B373532}"/>
-              </a:ext>
-            </a:extLst>
-          </p:cNvPr>
-          <p:cNvSpPr txBox="1"/>
-          <p:nvPr/>
-        </p:nvSpPr>
-        <p:spPr>
-          <a:xfrm>
-            <a:off x="3485471" y="4406029"/>
-            <a:ext cx="856388" cy="369332"/>
-          </a:xfrm>
-          <a:prstGeom prst="rect">
-            <a:avLst/>
-          </a:prstGeom>
-          <a:noFill/>
-        </p:spPr>
-        <p:txBody>
-          <a:bodyPr wrap="none" rtlCol="0">
-            <a:spAutoFit/>
-          </a:bodyPr>
-          <a:lstStyle/>
-          <a:p>
-            <a:r>
-              <a:rPr lang="es-ES" dirty="0"/>
+              <a:rPr lang="es-ES" sz="2400" b="1" u="sng" dirty="0"/>
               <a:t>Barra 2</a:t>
             </a:r>
           </a:p>
@@ -3873,8 +3568,8 @@
         </p:nvSpPr>
         <p:spPr>
           <a:xfrm>
-            <a:off x="5911132" y="368472"/>
-            <a:ext cx="856388" cy="369332"/>
+            <a:off x="5491694" y="144352"/>
+            <a:ext cx="1098058" cy="461665"/>
           </a:xfrm>
           <a:prstGeom prst="rect">
             <a:avLst/>
@@ -3888,240 +3583,12 @@
           <a:lstStyle/>
           <a:p>
             <a:r>
-              <a:rPr lang="es-ES" dirty="0"/>
+              <a:rPr lang="es-ES" sz="2400" b="1" u="sng" dirty="0"/>
               <a:t>Barra 3</a:t>
             </a:r>
           </a:p>
         </p:txBody>
       </p:sp>
-      <p:grpSp>
-        <p:nvGrpSpPr>
-          <p:cNvPr id="34" name="Grupo 33">
-            <a:extLst>
-              <a:ext uri="{FF2B5EF4-FFF2-40B4-BE49-F238E27FC236}">
-                <a16:creationId xmlns:a16="http://schemas.microsoft.com/office/drawing/2014/main" id="{01117360-2A1E-4001-B75D-4892F343DA39}"/>
-              </a:ext>
-            </a:extLst>
-          </p:cNvPr>
-          <p:cNvGrpSpPr/>
-          <p:nvPr/>
-        </p:nvGrpSpPr>
-        <p:grpSpPr>
-          <a:xfrm>
-            <a:off x="7753705" y="2841194"/>
-            <a:ext cx="1113088" cy="1155724"/>
-            <a:chOff x="6915149" y="933450"/>
-            <a:chExt cx="1113088" cy="1155724"/>
-          </a:xfrm>
-        </p:grpSpPr>
-        <p:sp>
-          <p:nvSpPr>
-            <p:cNvPr id="35" name="Elipse 34">
-              <a:extLst>
-                <a:ext uri="{FF2B5EF4-FFF2-40B4-BE49-F238E27FC236}">
-                  <a16:creationId xmlns:a16="http://schemas.microsoft.com/office/drawing/2014/main" id="{2A91AC6B-BE7A-4188-B10D-B312651571EB}"/>
-                </a:ext>
-              </a:extLst>
-            </p:cNvPr>
-            <p:cNvSpPr/>
-            <p:nvPr/>
-          </p:nvSpPr>
-          <p:spPr>
-            <a:xfrm>
-              <a:off x="6915149" y="1614352"/>
-              <a:ext cx="160867" cy="160867"/>
-            </a:xfrm>
-            <a:prstGeom prst="ellipse">
-              <a:avLst/>
-            </a:prstGeom>
-            <a:solidFill>
-              <a:schemeClr val="accent2"/>
-            </a:solidFill>
-          </p:spPr>
-          <p:style>
-            <a:lnRef idx="2">
-              <a:schemeClr val="dk1">
-                <a:shade val="50000"/>
-              </a:schemeClr>
-            </a:lnRef>
-            <a:fillRef idx="1">
-              <a:schemeClr val="dk1"/>
-            </a:fillRef>
-            <a:effectRef idx="0">
-              <a:schemeClr val="dk1"/>
-            </a:effectRef>
-            <a:fontRef idx="minor">
-              <a:schemeClr val="lt1"/>
-            </a:fontRef>
-          </p:style>
-          <p:txBody>
-            <a:bodyPr rtlCol="0" anchor="ctr"/>
-            <a:lstStyle/>
-            <a:p>
-              <a:pPr algn="ctr"/>
-              <a:endParaRPr lang="es-ES"/>
-            </a:p>
-          </p:txBody>
-        </p:sp>
-        <p:cxnSp>
-          <p:nvCxnSpPr>
-            <p:cNvPr id="36" name="Conector recto de flecha 35">
-              <a:extLst>
-                <a:ext uri="{FF2B5EF4-FFF2-40B4-BE49-F238E27FC236}">
-                  <a16:creationId xmlns:a16="http://schemas.microsoft.com/office/drawing/2014/main" id="{D8F42074-8E83-45AC-83E6-3463AC3C3973}"/>
-                </a:ext>
-              </a:extLst>
-            </p:cNvPr>
-            <p:cNvCxnSpPr>
-              <a:cxnSpLocks/>
-            </p:cNvCxnSpPr>
-            <p:nvPr/>
-          </p:nvCxnSpPr>
-          <p:spPr>
-            <a:xfrm flipV="1">
-              <a:off x="6968265" y="1681602"/>
-              <a:ext cx="833694" cy="13184"/>
-            </a:xfrm>
-            <a:prstGeom prst="straightConnector1">
-              <a:avLst/>
-            </a:prstGeom>
-            <a:ln w="76200">
-              <a:solidFill>
-                <a:schemeClr val="tx1"/>
-              </a:solidFill>
-              <a:tailEnd type="triangle"/>
-            </a:ln>
-          </p:spPr>
-          <p:style>
-            <a:lnRef idx="1">
-              <a:schemeClr val="dk1"/>
-            </a:lnRef>
-            <a:fillRef idx="0">
-              <a:schemeClr val="dk1"/>
-            </a:fillRef>
-            <a:effectRef idx="0">
-              <a:schemeClr val="dk1"/>
-            </a:effectRef>
-            <a:fontRef idx="minor">
-              <a:schemeClr val="tx1"/>
-            </a:fontRef>
-          </p:style>
-        </p:cxnSp>
-        <p:cxnSp>
-          <p:nvCxnSpPr>
-            <p:cNvPr id="37" name="Conector recto de flecha 36">
-              <a:extLst>
-                <a:ext uri="{FF2B5EF4-FFF2-40B4-BE49-F238E27FC236}">
-                  <a16:creationId xmlns:a16="http://schemas.microsoft.com/office/drawing/2014/main" id="{DF67A3E6-A977-4A73-8F18-EA0735210336}"/>
-                </a:ext>
-              </a:extLst>
-            </p:cNvPr>
-            <p:cNvCxnSpPr>
-              <a:cxnSpLocks/>
-            </p:cNvCxnSpPr>
-            <p:nvPr/>
-          </p:nvCxnSpPr>
-          <p:spPr>
-            <a:xfrm flipH="1" flipV="1">
-              <a:off x="6995582" y="933450"/>
-              <a:ext cx="1" cy="801690"/>
-            </a:xfrm>
-            <a:prstGeom prst="straightConnector1">
-              <a:avLst/>
-            </a:prstGeom>
-            <a:ln w="76200">
-              <a:solidFill>
-                <a:schemeClr val="tx1"/>
-              </a:solidFill>
-              <a:tailEnd type="triangle"/>
-            </a:ln>
-          </p:spPr>
-          <p:style>
-            <a:lnRef idx="1">
-              <a:schemeClr val="dk1"/>
-            </a:lnRef>
-            <a:fillRef idx="0">
-              <a:schemeClr val="dk1"/>
-            </a:fillRef>
-            <a:effectRef idx="0">
-              <a:schemeClr val="dk1"/>
-            </a:effectRef>
-            <a:fontRef idx="minor">
-              <a:schemeClr val="tx1"/>
-            </a:fontRef>
-          </p:style>
-        </p:cxnSp>
-        <p:sp>
-          <p:nvSpPr>
-            <p:cNvPr id="38" name="CuadroTexto 37">
-              <a:extLst>
-                <a:ext uri="{FF2B5EF4-FFF2-40B4-BE49-F238E27FC236}">
-                  <a16:creationId xmlns:a16="http://schemas.microsoft.com/office/drawing/2014/main" id="{09961308-F5E6-460E-9425-70CB37B3E20A}"/>
-                </a:ext>
-              </a:extLst>
-            </p:cNvPr>
-            <p:cNvSpPr txBox="1"/>
-            <p:nvPr/>
-          </p:nvSpPr>
-          <p:spPr>
-            <a:xfrm>
-              <a:off x="7122253" y="1048263"/>
-              <a:ext cx="647934" cy="369332"/>
-            </a:xfrm>
-            <a:prstGeom prst="rect">
-              <a:avLst/>
-            </a:prstGeom>
-            <a:noFill/>
-          </p:spPr>
-          <p:txBody>
-            <a:bodyPr wrap="none" rtlCol="0">
-              <a:spAutoFit/>
-            </a:bodyPr>
-            <a:lstStyle/>
-            <a:p>
-              <a:r>
-                <a:rPr lang="es-ES" dirty="0"/>
-                <a:t>R11y</a:t>
-              </a:r>
-            </a:p>
-          </p:txBody>
-        </p:sp>
-        <p:sp>
-          <p:nvSpPr>
-            <p:cNvPr id="39" name="CuadroTexto 38">
-              <a:extLst>
-                <a:ext uri="{FF2B5EF4-FFF2-40B4-BE49-F238E27FC236}">
-                  <a16:creationId xmlns:a16="http://schemas.microsoft.com/office/drawing/2014/main" id="{82925A17-F71D-43FB-B916-BCA57E9AF72F}"/>
-                </a:ext>
-              </a:extLst>
-            </p:cNvPr>
-            <p:cNvSpPr txBox="1"/>
-            <p:nvPr/>
-          </p:nvSpPr>
-          <p:spPr>
-            <a:xfrm>
-              <a:off x="7385112" y="1719842"/>
-              <a:ext cx="643125" cy="369332"/>
-            </a:xfrm>
-            <a:prstGeom prst="rect">
-              <a:avLst/>
-            </a:prstGeom>
-            <a:noFill/>
-          </p:spPr>
-          <p:txBody>
-            <a:bodyPr wrap="none" rtlCol="0">
-              <a:spAutoFit/>
-            </a:bodyPr>
-            <a:lstStyle/>
-            <a:p>
-              <a:r>
-                <a:rPr lang="es-ES" dirty="0"/>
-                <a:t>R11x</a:t>
-              </a:r>
-            </a:p>
-          </p:txBody>
-        </p:sp>
-      </p:grpSp>
       <p:grpSp>
         <p:nvGrpSpPr>
           <p:cNvPr id="40" name="Grupo 39">
@@ -5492,282 +4959,6 @@
           </p:txBody>
         </p:sp>
       </p:grpSp>
-      <p:sp>
-        <p:nvSpPr>
-          <p:cNvPr id="84" name="Rectángulo: esquinas redondeadas 83">
-            <a:extLst>
-              <a:ext uri="{FF2B5EF4-FFF2-40B4-BE49-F238E27FC236}">
-                <a16:creationId xmlns:a16="http://schemas.microsoft.com/office/drawing/2014/main" id="{3391A4CC-DFE7-4C9F-BD1E-6C3108FEDD10}"/>
-              </a:ext>
-            </a:extLst>
-          </p:cNvPr>
-          <p:cNvSpPr/>
-          <p:nvPr/>
-        </p:nvSpPr>
-        <p:spPr>
-          <a:xfrm rot="20707675">
-            <a:off x="7239334" y="4300042"/>
-            <a:ext cx="994333" cy="388450"/>
-          </a:xfrm>
-          <a:prstGeom prst="roundRect">
-            <a:avLst>
-              <a:gd name="adj" fmla="val 50000"/>
-            </a:avLst>
-          </a:prstGeom>
-        </p:spPr>
-        <p:style>
-          <a:lnRef idx="2">
-            <a:schemeClr val="accent1">
-              <a:shade val="50000"/>
-            </a:schemeClr>
-          </a:lnRef>
-          <a:fillRef idx="1">
-            <a:schemeClr val="accent1"/>
-          </a:fillRef>
-          <a:effectRef idx="0">
-            <a:schemeClr val="accent1"/>
-          </a:effectRef>
-          <a:fontRef idx="minor">
-            <a:schemeClr val="lt1"/>
-          </a:fontRef>
-        </p:style>
-        <p:txBody>
-          <a:bodyPr rtlCol="0" anchor="ctr"/>
-          <a:lstStyle/>
-          <a:p>
-            <a:pPr algn="ctr"/>
-            <a:endParaRPr lang="es-ES"/>
-          </a:p>
-        </p:txBody>
-      </p:sp>
-      <p:grpSp>
-        <p:nvGrpSpPr>
-          <p:cNvPr id="86" name="Grupo 85">
-            <a:extLst>
-              <a:ext uri="{FF2B5EF4-FFF2-40B4-BE49-F238E27FC236}">
-                <a16:creationId xmlns:a16="http://schemas.microsoft.com/office/drawing/2014/main" id="{587526C4-5CA0-425E-A291-67CEA08B11AC}"/>
-              </a:ext>
-            </a:extLst>
-          </p:cNvPr>
-          <p:cNvGrpSpPr/>
-          <p:nvPr/>
-        </p:nvGrpSpPr>
-        <p:grpSpPr>
-          <a:xfrm>
-            <a:off x="7345721" y="3820328"/>
-            <a:ext cx="976833" cy="1155724"/>
-            <a:chOff x="6915149" y="933450"/>
-            <a:chExt cx="976833" cy="1155724"/>
-          </a:xfrm>
-        </p:grpSpPr>
-        <p:sp>
-          <p:nvSpPr>
-            <p:cNvPr id="87" name="Elipse 86">
-              <a:extLst>
-                <a:ext uri="{FF2B5EF4-FFF2-40B4-BE49-F238E27FC236}">
-                  <a16:creationId xmlns:a16="http://schemas.microsoft.com/office/drawing/2014/main" id="{AD77299E-A95D-41C5-9558-BBAB007070F2}"/>
-                </a:ext>
-              </a:extLst>
-            </p:cNvPr>
-            <p:cNvSpPr/>
-            <p:nvPr/>
-          </p:nvSpPr>
-          <p:spPr>
-            <a:xfrm>
-              <a:off x="6915149" y="1614352"/>
-              <a:ext cx="160867" cy="160867"/>
-            </a:xfrm>
-            <a:prstGeom prst="ellipse">
-              <a:avLst/>
-            </a:prstGeom>
-            <a:solidFill>
-              <a:schemeClr val="accent2"/>
-            </a:solidFill>
-          </p:spPr>
-          <p:style>
-            <a:lnRef idx="2">
-              <a:schemeClr val="dk1">
-                <a:shade val="50000"/>
-              </a:schemeClr>
-            </a:lnRef>
-            <a:fillRef idx="1">
-              <a:schemeClr val="dk1"/>
-            </a:fillRef>
-            <a:effectRef idx="0">
-              <a:schemeClr val="dk1"/>
-            </a:effectRef>
-            <a:fontRef idx="minor">
-              <a:schemeClr val="lt1"/>
-            </a:fontRef>
-          </p:style>
-          <p:txBody>
-            <a:bodyPr rtlCol="0" anchor="ctr"/>
-            <a:lstStyle/>
-            <a:p>
-              <a:pPr algn="ctr"/>
-              <a:endParaRPr lang="es-ES"/>
-            </a:p>
-          </p:txBody>
-        </p:sp>
-        <p:cxnSp>
-          <p:nvCxnSpPr>
-            <p:cNvPr id="88" name="Conector recto de flecha 87">
-              <a:extLst>
-                <a:ext uri="{FF2B5EF4-FFF2-40B4-BE49-F238E27FC236}">
-                  <a16:creationId xmlns:a16="http://schemas.microsoft.com/office/drawing/2014/main" id="{36C18132-BFE6-441D-B6EC-924BAD1BB7E1}"/>
-                </a:ext>
-              </a:extLst>
-            </p:cNvPr>
-            <p:cNvCxnSpPr>
-              <a:cxnSpLocks/>
-            </p:cNvCxnSpPr>
-            <p:nvPr/>
-          </p:nvCxnSpPr>
-          <p:spPr>
-            <a:xfrm flipV="1">
-              <a:off x="6968265" y="1681602"/>
-              <a:ext cx="833694" cy="13184"/>
-            </a:xfrm>
-            <a:prstGeom prst="straightConnector1">
-              <a:avLst/>
-            </a:prstGeom>
-            <a:ln w="76200">
-              <a:solidFill>
-                <a:schemeClr val="tx1"/>
-              </a:solidFill>
-              <a:tailEnd type="triangle"/>
-            </a:ln>
-          </p:spPr>
-          <p:style>
-            <a:lnRef idx="1">
-              <a:schemeClr val="dk1"/>
-            </a:lnRef>
-            <a:fillRef idx="0">
-              <a:schemeClr val="dk1"/>
-            </a:fillRef>
-            <a:effectRef idx="0">
-              <a:schemeClr val="dk1"/>
-            </a:effectRef>
-            <a:fontRef idx="minor">
-              <a:schemeClr val="tx1"/>
-            </a:fontRef>
-          </p:style>
-        </p:cxnSp>
-        <p:cxnSp>
-          <p:nvCxnSpPr>
-            <p:cNvPr id="89" name="Conector recto de flecha 88">
-              <a:extLst>
-                <a:ext uri="{FF2B5EF4-FFF2-40B4-BE49-F238E27FC236}">
-                  <a16:creationId xmlns:a16="http://schemas.microsoft.com/office/drawing/2014/main" id="{1691C53F-DD7B-4EF5-8E86-C3FAB852D851}"/>
-                </a:ext>
-              </a:extLst>
-            </p:cNvPr>
-            <p:cNvCxnSpPr>
-              <a:cxnSpLocks/>
-            </p:cNvCxnSpPr>
-            <p:nvPr/>
-          </p:nvCxnSpPr>
-          <p:spPr>
-            <a:xfrm flipH="1" flipV="1">
-              <a:off x="6995582" y="933450"/>
-              <a:ext cx="1" cy="801690"/>
-            </a:xfrm>
-            <a:prstGeom prst="straightConnector1">
-              <a:avLst/>
-            </a:prstGeom>
-            <a:ln w="76200">
-              <a:solidFill>
-                <a:schemeClr val="tx1"/>
-              </a:solidFill>
-              <a:tailEnd type="triangle"/>
-            </a:ln>
-          </p:spPr>
-          <p:style>
-            <a:lnRef idx="1">
-              <a:schemeClr val="dk1"/>
-            </a:lnRef>
-            <a:fillRef idx="0">
-              <a:schemeClr val="dk1"/>
-            </a:fillRef>
-            <a:effectRef idx="0">
-              <a:schemeClr val="dk1"/>
-            </a:effectRef>
-            <a:fontRef idx="minor">
-              <a:schemeClr val="tx1"/>
-            </a:fontRef>
-          </p:style>
-        </p:cxnSp>
-        <p:sp>
-          <p:nvSpPr>
-            <p:cNvPr id="90" name="CuadroTexto 89">
-              <a:extLst>
-                <a:ext uri="{FF2B5EF4-FFF2-40B4-BE49-F238E27FC236}">
-                  <a16:creationId xmlns:a16="http://schemas.microsoft.com/office/drawing/2014/main" id="{4F2F1B5C-21B1-4B52-A64C-611890BB4A27}"/>
-                </a:ext>
-              </a:extLst>
-            </p:cNvPr>
-            <p:cNvSpPr txBox="1"/>
-            <p:nvPr/>
-          </p:nvSpPr>
-          <p:spPr>
-            <a:xfrm>
-              <a:off x="7122253" y="1048263"/>
-              <a:ext cx="511679" cy="369332"/>
-            </a:xfrm>
-            <a:prstGeom prst="rect">
-              <a:avLst/>
-            </a:prstGeom>
-            <a:noFill/>
-          </p:spPr>
-          <p:txBody>
-            <a:bodyPr wrap="none" rtlCol="0">
-              <a:spAutoFit/>
-            </a:bodyPr>
-            <a:lstStyle/>
-            <a:p>
-              <a:r>
-                <a:rPr lang="es-ES" dirty="0"/>
-                <a:t>F1y</a:t>
-              </a:r>
-            </a:p>
-          </p:txBody>
-        </p:sp>
-        <p:sp>
-          <p:nvSpPr>
-            <p:cNvPr id="91" name="CuadroTexto 90">
-              <a:extLst>
-                <a:ext uri="{FF2B5EF4-FFF2-40B4-BE49-F238E27FC236}">
-                  <a16:creationId xmlns:a16="http://schemas.microsoft.com/office/drawing/2014/main" id="{B04DC775-DF3B-4756-9D8F-2468423BFE80}"/>
-                </a:ext>
-              </a:extLst>
-            </p:cNvPr>
-            <p:cNvSpPr txBox="1"/>
-            <p:nvPr/>
-          </p:nvSpPr>
-          <p:spPr>
-            <a:xfrm>
-              <a:off x="7385112" y="1719842"/>
-              <a:ext cx="506870" cy="369332"/>
-            </a:xfrm>
-            <a:prstGeom prst="rect">
-              <a:avLst/>
-            </a:prstGeom>
-            <a:noFill/>
-          </p:spPr>
-          <p:txBody>
-            <a:bodyPr wrap="none" rtlCol="0">
-              <a:spAutoFit/>
-            </a:bodyPr>
-            <a:lstStyle/>
-            <a:p>
-              <a:r>
-                <a:rPr lang="es-ES" dirty="0"/>
-                <a:t>F1x</a:t>
-              </a:r>
-            </a:p>
-          </p:txBody>
-        </p:sp>
-      </p:grpSp>
       <p:grpSp>
         <p:nvGrpSpPr>
           <p:cNvPr id="92" name="Grupo 91">
@@ -6296,10 +5487,10 @@
       </p:grpSp>
       <p:grpSp>
         <p:nvGrpSpPr>
-          <p:cNvPr id="107" name="Grupo 106">
+          <p:cNvPr id="2" name="Grupo 1">
             <a:extLst>
               <a:ext uri="{FF2B5EF4-FFF2-40B4-BE49-F238E27FC236}">
-                <a16:creationId xmlns:a16="http://schemas.microsoft.com/office/drawing/2014/main" id="{9D38088C-370B-452B-8C67-95E2E2D99AC6}"/>
+                <a16:creationId xmlns:a16="http://schemas.microsoft.com/office/drawing/2014/main" id="{11D2F57B-42A5-4479-A79F-17699961FBB1}"/>
               </a:ext>
             </a:extLst>
           </p:cNvPr>
@@ -6308,18 +5499,18 @@
         </p:nvGrpSpPr>
         <p:grpSpPr>
           <a:xfrm>
-            <a:off x="7720448" y="4903307"/>
-            <a:ext cx="613454" cy="841410"/>
-            <a:chOff x="6163555" y="2052479"/>
-            <a:chExt cx="613454" cy="841410"/>
+            <a:off x="7239334" y="2841194"/>
+            <a:ext cx="2410414" cy="3432873"/>
+            <a:chOff x="7239334" y="2841194"/>
+            <a:chExt cx="2410414" cy="3432873"/>
           </a:xfrm>
         </p:grpSpPr>
         <p:sp>
           <p:nvSpPr>
-            <p:cNvPr id="108" name="Elipse 107">
+            <p:cNvPr id="29" name="Rectángulo: esquinas redondeadas 28">
               <a:extLst>
                 <a:ext uri="{FF2B5EF4-FFF2-40B4-BE49-F238E27FC236}">
-                  <a16:creationId xmlns:a16="http://schemas.microsoft.com/office/drawing/2014/main" id="{43AEFE30-15C5-4C1B-AC84-C934B1270BD3}"/>
+                  <a16:creationId xmlns:a16="http://schemas.microsoft.com/office/drawing/2014/main" id="{B835C66B-D8C3-4FB8-935C-FA1CF7445B55}"/>
                 </a:ext>
               </a:extLst>
             </p:cNvPr>
@@ -6327,28 +5518,27 @@
             <p:nvPr/>
           </p:nvSpPr>
           <p:spPr>
-            <a:xfrm>
-              <a:off x="6163555" y="2052479"/>
-              <a:ext cx="160867" cy="160867"/>
+            <a:xfrm rot="4403732">
+              <a:off x="6831657" y="4584390"/>
+              <a:ext cx="2650921" cy="293615"/>
             </a:xfrm>
-            <a:prstGeom prst="ellipse">
-              <a:avLst/>
+            <a:prstGeom prst="roundRect">
+              <a:avLst>
+                <a:gd name="adj" fmla="val 50000"/>
+              </a:avLst>
             </a:prstGeom>
-            <a:solidFill>
-              <a:schemeClr val="accent2"/>
-            </a:solidFill>
           </p:spPr>
           <p:style>
             <a:lnRef idx="2">
-              <a:schemeClr val="dk1">
+              <a:schemeClr val="accent1">
                 <a:shade val="50000"/>
               </a:schemeClr>
             </a:lnRef>
             <a:fillRef idx="1">
-              <a:schemeClr val="dk1"/>
+              <a:schemeClr val="accent1"/>
             </a:fillRef>
             <a:effectRef idx="0">
-              <a:schemeClr val="dk1"/>
+              <a:schemeClr val="accent1"/>
             </a:effectRef>
             <a:fontRef idx="minor">
               <a:schemeClr val="lt1"/>
@@ -6363,56 +5553,240 @@
             </a:p>
           </p:txBody>
         </p:sp>
-        <p:cxnSp>
-          <p:nvCxnSpPr>
-            <p:cNvPr id="109" name="Conector recto de flecha 108">
+        <p:grpSp>
+          <p:nvGrpSpPr>
+            <p:cNvPr id="28" name="Grupo 27">
               <a:extLst>
                 <a:ext uri="{FF2B5EF4-FFF2-40B4-BE49-F238E27FC236}">
-                  <a16:creationId xmlns:a16="http://schemas.microsoft.com/office/drawing/2014/main" id="{EB202573-0C1B-4B87-BE5D-6FC0C1CDADC1}"/>
+                  <a16:creationId xmlns:a16="http://schemas.microsoft.com/office/drawing/2014/main" id="{C8ABD43F-6FA5-4C3D-8BA3-F3846E562030}"/>
                 </a:ext>
               </a:extLst>
             </p:cNvPr>
-            <p:cNvCxnSpPr>
-              <a:cxnSpLocks/>
-            </p:cNvCxnSpPr>
+            <p:cNvGrpSpPr/>
             <p:nvPr/>
-          </p:nvCxnSpPr>
-          <p:spPr>
+          </p:nvGrpSpPr>
+          <p:grpSpPr>
             <a:xfrm>
-              <a:off x="6233227" y="2111937"/>
-              <a:ext cx="11290" cy="781952"/>
+              <a:off x="8423340" y="5118343"/>
+              <a:ext cx="1113088" cy="1155724"/>
+              <a:chOff x="6915149" y="933450"/>
+              <a:chExt cx="1113088" cy="1155724"/>
             </a:xfrm>
-            <a:prstGeom prst="straightConnector1">
-              <a:avLst/>
-            </a:prstGeom>
-            <a:ln w="76200">
+          </p:grpSpPr>
+          <p:sp>
+            <p:nvSpPr>
+              <p:cNvPr id="6" name="Elipse 5">
+                <a:extLst>
+                  <a:ext uri="{FF2B5EF4-FFF2-40B4-BE49-F238E27FC236}">
+                    <a16:creationId xmlns:a16="http://schemas.microsoft.com/office/drawing/2014/main" id="{38F99E0C-FF19-426A-B17D-87C106DB114B}"/>
+                  </a:ext>
+                </a:extLst>
+              </p:cNvPr>
+              <p:cNvSpPr/>
+              <p:nvPr/>
+            </p:nvSpPr>
+            <p:spPr>
+              <a:xfrm>
+                <a:off x="6915149" y="1614352"/>
+                <a:ext cx="160867" cy="160867"/>
+              </a:xfrm>
+              <a:prstGeom prst="ellipse">
+                <a:avLst/>
+              </a:prstGeom>
               <a:solidFill>
+                <a:schemeClr val="accent2"/>
+              </a:solidFill>
+            </p:spPr>
+            <p:style>
+              <a:lnRef idx="2">
+                <a:schemeClr val="dk1">
+                  <a:shade val="50000"/>
+                </a:schemeClr>
+              </a:lnRef>
+              <a:fillRef idx="1">
+                <a:schemeClr val="dk1"/>
+              </a:fillRef>
+              <a:effectRef idx="0">
+                <a:schemeClr val="dk1"/>
+              </a:effectRef>
+              <a:fontRef idx="minor">
+                <a:schemeClr val="lt1"/>
+              </a:fontRef>
+            </p:style>
+            <p:txBody>
+              <a:bodyPr rtlCol="0" anchor="ctr"/>
+              <a:lstStyle/>
+              <a:p>
+                <a:pPr algn="ctr"/>
+                <a:endParaRPr lang="es-ES"/>
+              </a:p>
+            </p:txBody>
+          </p:sp>
+          <p:cxnSp>
+            <p:nvCxnSpPr>
+              <p:cNvPr id="8" name="Conector recto de flecha 7">
+                <a:extLst>
+                  <a:ext uri="{FF2B5EF4-FFF2-40B4-BE49-F238E27FC236}">
+                    <a16:creationId xmlns:a16="http://schemas.microsoft.com/office/drawing/2014/main" id="{7AE0561D-A388-4CC6-85F1-46E2793D1D2E}"/>
+                  </a:ext>
+                </a:extLst>
+              </p:cNvPr>
+              <p:cNvCxnSpPr>
+                <a:cxnSpLocks/>
+              </p:cNvCxnSpPr>
+              <p:nvPr/>
+            </p:nvCxnSpPr>
+            <p:spPr>
+              <a:xfrm flipV="1">
+                <a:off x="6968265" y="1681602"/>
+                <a:ext cx="833694" cy="13184"/>
+              </a:xfrm>
+              <a:prstGeom prst="straightConnector1">
+                <a:avLst/>
+              </a:prstGeom>
+              <a:ln w="76200">
+                <a:solidFill>
+                  <a:schemeClr val="tx1"/>
+                </a:solidFill>
+                <a:tailEnd type="triangle"/>
+              </a:ln>
+            </p:spPr>
+            <p:style>
+              <a:lnRef idx="1">
+                <a:schemeClr val="dk1"/>
+              </a:lnRef>
+              <a:fillRef idx="0">
+                <a:schemeClr val="dk1"/>
+              </a:fillRef>
+              <a:effectRef idx="0">
+                <a:schemeClr val="dk1"/>
+              </a:effectRef>
+              <a:fontRef idx="minor">
                 <a:schemeClr val="tx1"/>
-              </a:solidFill>
-              <a:tailEnd type="triangle"/>
-            </a:ln>
-          </p:spPr>
-          <p:style>
-            <a:lnRef idx="1">
-              <a:schemeClr val="dk1"/>
-            </a:lnRef>
-            <a:fillRef idx="0">
-              <a:schemeClr val="dk1"/>
-            </a:fillRef>
-            <a:effectRef idx="0">
-              <a:schemeClr val="dk1"/>
-            </a:effectRef>
-            <a:fontRef idx="minor">
-              <a:schemeClr val="tx1"/>
-            </a:fontRef>
-          </p:style>
-        </p:cxnSp>
+              </a:fontRef>
+            </p:style>
+          </p:cxnSp>
+          <p:cxnSp>
+            <p:nvCxnSpPr>
+              <p:cNvPr id="10" name="Conector recto de flecha 9">
+                <a:extLst>
+                  <a:ext uri="{FF2B5EF4-FFF2-40B4-BE49-F238E27FC236}">
+                    <a16:creationId xmlns:a16="http://schemas.microsoft.com/office/drawing/2014/main" id="{4FDD7AC0-D639-4274-9513-3A8A6738C272}"/>
+                  </a:ext>
+                </a:extLst>
+              </p:cNvPr>
+              <p:cNvCxnSpPr>
+                <a:cxnSpLocks/>
+              </p:cNvCxnSpPr>
+              <p:nvPr/>
+            </p:nvCxnSpPr>
+            <p:spPr>
+              <a:xfrm flipH="1" flipV="1">
+                <a:off x="6995582" y="933450"/>
+                <a:ext cx="1" cy="801690"/>
+              </a:xfrm>
+              <a:prstGeom prst="straightConnector1">
+                <a:avLst/>
+              </a:prstGeom>
+              <a:ln w="76200">
+                <a:solidFill>
+                  <a:schemeClr val="tx1"/>
+                </a:solidFill>
+                <a:tailEnd type="triangle"/>
+              </a:ln>
+            </p:spPr>
+            <p:style>
+              <a:lnRef idx="1">
+                <a:schemeClr val="dk1"/>
+              </a:lnRef>
+              <a:fillRef idx="0">
+                <a:schemeClr val="dk1"/>
+              </a:fillRef>
+              <a:effectRef idx="0">
+                <a:schemeClr val="dk1"/>
+              </a:effectRef>
+              <a:fontRef idx="minor">
+                <a:schemeClr val="tx1"/>
+              </a:fontRef>
+            </p:style>
+          </p:cxnSp>
+          <p:sp>
+            <p:nvSpPr>
+              <p:cNvPr id="16" name="CuadroTexto 15">
+                <a:extLst>
+                  <a:ext uri="{FF2B5EF4-FFF2-40B4-BE49-F238E27FC236}">
+                    <a16:creationId xmlns:a16="http://schemas.microsoft.com/office/drawing/2014/main" id="{DFA80A53-229D-4B42-95C2-6B682783639E}"/>
+                  </a:ext>
+                </a:extLst>
+              </p:cNvPr>
+              <p:cNvSpPr txBox="1"/>
+              <p:nvPr/>
+            </p:nvSpPr>
+            <p:spPr>
+              <a:xfrm>
+                <a:off x="7122253" y="1048263"/>
+                <a:ext cx="647934" cy="369332"/>
+              </a:xfrm>
+              <a:prstGeom prst="rect">
+                <a:avLst/>
+              </a:prstGeom>
+              <a:noFill/>
+            </p:spPr>
+            <p:txBody>
+              <a:bodyPr wrap="none" rtlCol="0">
+                <a:spAutoFit/>
+              </a:bodyPr>
+              <a:lstStyle/>
+              <a:p>
+                <a:r>
+                  <a:rPr lang="es-ES" dirty="0"/>
+                  <a:t>R10y</a:t>
+                </a:r>
+              </a:p>
+            </p:txBody>
+          </p:sp>
+          <p:sp>
+            <p:nvSpPr>
+              <p:cNvPr id="17" name="CuadroTexto 16">
+                <a:extLst>
+                  <a:ext uri="{FF2B5EF4-FFF2-40B4-BE49-F238E27FC236}">
+                    <a16:creationId xmlns:a16="http://schemas.microsoft.com/office/drawing/2014/main" id="{ECD41FE2-8B7B-468B-AFC8-F1F1F940E2C0}"/>
+                  </a:ext>
+                </a:extLst>
+              </p:cNvPr>
+              <p:cNvSpPr txBox="1"/>
+              <p:nvPr/>
+            </p:nvSpPr>
+            <p:spPr>
+              <a:xfrm>
+                <a:off x="7385112" y="1719842"/>
+                <a:ext cx="643125" cy="369332"/>
+              </a:xfrm>
+              <a:prstGeom prst="rect">
+                <a:avLst/>
+              </a:prstGeom>
+              <a:noFill/>
+            </p:spPr>
+            <p:txBody>
+              <a:bodyPr wrap="none" rtlCol="0">
+                <a:spAutoFit/>
+              </a:bodyPr>
+              <a:lstStyle/>
+              <a:p>
+                <a:r>
+                  <a:rPr lang="es-ES" dirty="0"/>
+                  <a:t>R10x</a:t>
+                </a:r>
+              </a:p>
+            </p:txBody>
+          </p:sp>
+        </p:grpSp>
         <p:sp>
           <p:nvSpPr>
-            <p:cNvPr id="110" name="CuadroTexto 109">
+            <p:cNvPr id="31" name="CuadroTexto 30">
               <a:extLst>
                 <a:ext uri="{FF2B5EF4-FFF2-40B4-BE49-F238E27FC236}">
-                  <a16:creationId xmlns:a16="http://schemas.microsoft.com/office/drawing/2014/main" id="{5D490623-DE31-44E5-9657-7C679B19FE11}"/>
+                  <a16:creationId xmlns:a16="http://schemas.microsoft.com/office/drawing/2014/main" id="{88F74479-2386-4475-BAA1-B1155D8970C3}"/>
                 </a:ext>
               </a:extLst>
             </p:cNvPr>
@@ -6421,8 +5795,8 @@
           </p:nvSpPr>
           <p:spPr>
             <a:xfrm>
-              <a:off x="6208071" y="2343304"/>
-              <a:ext cx="568938" cy="369332"/>
+              <a:off x="8551690" y="4590695"/>
+              <a:ext cx="1098058" cy="461665"/>
             </a:xfrm>
             <a:prstGeom prst="rect">
               <a:avLst/>
@@ -6436,12 +5810,665 @@
             <a:lstStyle/>
             <a:p>
               <a:r>
-                <a:rPr lang="es-ES" dirty="0"/>
-                <a:t>CG1</a:t>
+                <a:rPr lang="es-ES" sz="2400" b="1" u="sng" dirty="0"/>
+                <a:t>Barra 1</a:t>
               </a:r>
             </a:p>
           </p:txBody>
         </p:sp>
+        <p:grpSp>
+          <p:nvGrpSpPr>
+            <p:cNvPr id="34" name="Grupo 33">
+              <a:extLst>
+                <a:ext uri="{FF2B5EF4-FFF2-40B4-BE49-F238E27FC236}">
+                  <a16:creationId xmlns:a16="http://schemas.microsoft.com/office/drawing/2014/main" id="{01117360-2A1E-4001-B75D-4892F343DA39}"/>
+                </a:ext>
+              </a:extLst>
+            </p:cNvPr>
+            <p:cNvGrpSpPr/>
+            <p:nvPr/>
+          </p:nvGrpSpPr>
+          <p:grpSpPr>
+            <a:xfrm>
+              <a:off x="7753705" y="2841194"/>
+              <a:ext cx="1113088" cy="1155724"/>
+              <a:chOff x="6915149" y="933450"/>
+              <a:chExt cx="1113088" cy="1155724"/>
+            </a:xfrm>
+          </p:grpSpPr>
+          <p:sp>
+            <p:nvSpPr>
+              <p:cNvPr id="35" name="Elipse 34">
+                <a:extLst>
+                  <a:ext uri="{FF2B5EF4-FFF2-40B4-BE49-F238E27FC236}">
+                    <a16:creationId xmlns:a16="http://schemas.microsoft.com/office/drawing/2014/main" id="{2A91AC6B-BE7A-4188-B10D-B312651571EB}"/>
+                  </a:ext>
+                </a:extLst>
+              </p:cNvPr>
+              <p:cNvSpPr/>
+              <p:nvPr/>
+            </p:nvSpPr>
+            <p:spPr>
+              <a:xfrm>
+                <a:off x="6915149" y="1614352"/>
+                <a:ext cx="160867" cy="160867"/>
+              </a:xfrm>
+              <a:prstGeom prst="ellipse">
+                <a:avLst/>
+              </a:prstGeom>
+              <a:solidFill>
+                <a:schemeClr val="accent2"/>
+              </a:solidFill>
+            </p:spPr>
+            <p:style>
+              <a:lnRef idx="2">
+                <a:schemeClr val="dk1">
+                  <a:shade val="50000"/>
+                </a:schemeClr>
+              </a:lnRef>
+              <a:fillRef idx="1">
+                <a:schemeClr val="dk1"/>
+              </a:fillRef>
+              <a:effectRef idx="0">
+                <a:schemeClr val="dk1"/>
+              </a:effectRef>
+              <a:fontRef idx="minor">
+                <a:schemeClr val="lt1"/>
+              </a:fontRef>
+            </p:style>
+            <p:txBody>
+              <a:bodyPr rtlCol="0" anchor="ctr"/>
+              <a:lstStyle/>
+              <a:p>
+                <a:pPr algn="ctr"/>
+                <a:endParaRPr lang="es-ES"/>
+              </a:p>
+            </p:txBody>
+          </p:sp>
+          <p:cxnSp>
+            <p:nvCxnSpPr>
+              <p:cNvPr id="36" name="Conector recto de flecha 35">
+                <a:extLst>
+                  <a:ext uri="{FF2B5EF4-FFF2-40B4-BE49-F238E27FC236}">
+                    <a16:creationId xmlns:a16="http://schemas.microsoft.com/office/drawing/2014/main" id="{D8F42074-8E83-45AC-83E6-3463AC3C3973}"/>
+                  </a:ext>
+                </a:extLst>
+              </p:cNvPr>
+              <p:cNvCxnSpPr>
+                <a:cxnSpLocks/>
+              </p:cNvCxnSpPr>
+              <p:nvPr/>
+            </p:nvCxnSpPr>
+            <p:spPr>
+              <a:xfrm flipV="1">
+                <a:off x="6968265" y="1681602"/>
+                <a:ext cx="833694" cy="13184"/>
+              </a:xfrm>
+              <a:prstGeom prst="straightConnector1">
+                <a:avLst/>
+              </a:prstGeom>
+              <a:ln w="76200">
+                <a:solidFill>
+                  <a:schemeClr val="tx1"/>
+                </a:solidFill>
+                <a:tailEnd type="triangle"/>
+              </a:ln>
+            </p:spPr>
+            <p:style>
+              <a:lnRef idx="1">
+                <a:schemeClr val="dk1"/>
+              </a:lnRef>
+              <a:fillRef idx="0">
+                <a:schemeClr val="dk1"/>
+              </a:fillRef>
+              <a:effectRef idx="0">
+                <a:schemeClr val="dk1"/>
+              </a:effectRef>
+              <a:fontRef idx="minor">
+                <a:schemeClr val="tx1"/>
+              </a:fontRef>
+            </p:style>
+          </p:cxnSp>
+          <p:cxnSp>
+            <p:nvCxnSpPr>
+              <p:cNvPr id="37" name="Conector recto de flecha 36">
+                <a:extLst>
+                  <a:ext uri="{FF2B5EF4-FFF2-40B4-BE49-F238E27FC236}">
+                    <a16:creationId xmlns:a16="http://schemas.microsoft.com/office/drawing/2014/main" id="{DF67A3E6-A977-4A73-8F18-EA0735210336}"/>
+                  </a:ext>
+                </a:extLst>
+              </p:cNvPr>
+              <p:cNvCxnSpPr>
+                <a:cxnSpLocks/>
+              </p:cNvCxnSpPr>
+              <p:nvPr/>
+            </p:nvCxnSpPr>
+            <p:spPr>
+              <a:xfrm flipH="1" flipV="1">
+                <a:off x="6995582" y="933450"/>
+                <a:ext cx="1" cy="801690"/>
+              </a:xfrm>
+              <a:prstGeom prst="straightConnector1">
+                <a:avLst/>
+              </a:prstGeom>
+              <a:ln w="76200">
+                <a:solidFill>
+                  <a:schemeClr val="tx1"/>
+                </a:solidFill>
+                <a:tailEnd type="triangle"/>
+              </a:ln>
+            </p:spPr>
+            <p:style>
+              <a:lnRef idx="1">
+                <a:schemeClr val="dk1"/>
+              </a:lnRef>
+              <a:fillRef idx="0">
+                <a:schemeClr val="dk1"/>
+              </a:fillRef>
+              <a:effectRef idx="0">
+                <a:schemeClr val="dk1"/>
+              </a:effectRef>
+              <a:fontRef idx="minor">
+                <a:schemeClr val="tx1"/>
+              </a:fontRef>
+            </p:style>
+          </p:cxnSp>
+          <p:sp>
+            <p:nvSpPr>
+              <p:cNvPr id="38" name="CuadroTexto 37">
+                <a:extLst>
+                  <a:ext uri="{FF2B5EF4-FFF2-40B4-BE49-F238E27FC236}">
+                    <a16:creationId xmlns:a16="http://schemas.microsoft.com/office/drawing/2014/main" id="{09961308-F5E6-460E-9425-70CB37B3E20A}"/>
+                  </a:ext>
+                </a:extLst>
+              </p:cNvPr>
+              <p:cNvSpPr txBox="1"/>
+              <p:nvPr/>
+            </p:nvSpPr>
+            <p:spPr>
+              <a:xfrm>
+                <a:off x="7122253" y="1048263"/>
+                <a:ext cx="647934" cy="369332"/>
+              </a:xfrm>
+              <a:prstGeom prst="rect">
+                <a:avLst/>
+              </a:prstGeom>
+              <a:noFill/>
+            </p:spPr>
+            <p:txBody>
+              <a:bodyPr wrap="none" rtlCol="0">
+                <a:spAutoFit/>
+              </a:bodyPr>
+              <a:lstStyle/>
+              <a:p>
+                <a:r>
+                  <a:rPr lang="es-ES" dirty="0"/>
+                  <a:t>R11y</a:t>
+                </a:r>
+              </a:p>
+            </p:txBody>
+          </p:sp>
+          <p:sp>
+            <p:nvSpPr>
+              <p:cNvPr id="39" name="CuadroTexto 38">
+                <a:extLst>
+                  <a:ext uri="{FF2B5EF4-FFF2-40B4-BE49-F238E27FC236}">
+                    <a16:creationId xmlns:a16="http://schemas.microsoft.com/office/drawing/2014/main" id="{82925A17-F71D-43FB-B916-BCA57E9AF72F}"/>
+                  </a:ext>
+                </a:extLst>
+              </p:cNvPr>
+              <p:cNvSpPr txBox="1"/>
+              <p:nvPr/>
+            </p:nvSpPr>
+            <p:spPr>
+              <a:xfrm>
+                <a:off x="7385112" y="1719842"/>
+                <a:ext cx="643125" cy="369332"/>
+              </a:xfrm>
+              <a:prstGeom prst="rect">
+                <a:avLst/>
+              </a:prstGeom>
+              <a:noFill/>
+            </p:spPr>
+            <p:txBody>
+              <a:bodyPr wrap="none" rtlCol="0">
+                <a:spAutoFit/>
+              </a:bodyPr>
+              <a:lstStyle/>
+              <a:p>
+                <a:r>
+                  <a:rPr lang="es-ES" dirty="0"/>
+                  <a:t>R11x</a:t>
+                </a:r>
+              </a:p>
+            </p:txBody>
+          </p:sp>
+        </p:grpSp>
+        <p:sp>
+          <p:nvSpPr>
+            <p:cNvPr id="84" name="Rectángulo: esquinas redondeadas 83">
+              <a:extLst>
+                <a:ext uri="{FF2B5EF4-FFF2-40B4-BE49-F238E27FC236}">
+                  <a16:creationId xmlns:a16="http://schemas.microsoft.com/office/drawing/2014/main" id="{3391A4CC-DFE7-4C9F-BD1E-6C3108FEDD10}"/>
+                </a:ext>
+              </a:extLst>
+            </p:cNvPr>
+            <p:cNvSpPr/>
+            <p:nvPr/>
+          </p:nvSpPr>
+          <p:spPr>
+            <a:xfrm rot="20707675">
+              <a:off x="7239334" y="4300042"/>
+              <a:ext cx="994333" cy="388450"/>
+            </a:xfrm>
+            <a:prstGeom prst="roundRect">
+              <a:avLst>
+                <a:gd name="adj" fmla="val 50000"/>
+              </a:avLst>
+            </a:prstGeom>
+          </p:spPr>
+          <p:style>
+            <a:lnRef idx="2">
+              <a:schemeClr val="accent1">
+                <a:shade val="50000"/>
+              </a:schemeClr>
+            </a:lnRef>
+            <a:fillRef idx="1">
+              <a:schemeClr val="accent1"/>
+            </a:fillRef>
+            <a:effectRef idx="0">
+              <a:schemeClr val="accent1"/>
+            </a:effectRef>
+            <a:fontRef idx="minor">
+              <a:schemeClr val="lt1"/>
+            </a:fontRef>
+          </p:style>
+          <p:txBody>
+            <a:bodyPr rtlCol="0" anchor="ctr"/>
+            <a:lstStyle/>
+            <a:p>
+              <a:pPr algn="ctr"/>
+              <a:endParaRPr lang="es-ES"/>
+            </a:p>
+          </p:txBody>
+        </p:sp>
+        <p:grpSp>
+          <p:nvGrpSpPr>
+            <p:cNvPr id="86" name="Grupo 85">
+              <a:extLst>
+                <a:ext uri="{FF2B5EF4-FFF2-40B4-BE49-F238E27FC236}">
+                  <a16:creationId xmlns:a16="http://schemas.microsoft.com/office/drawing/2014/main" id="{587526C4-5CA0-425E-A291-67CEA08B11AC}"/>
+                </a:ext>
+              </a:extLst>
+            </p:cNvPr>
+            <p:cNvGrpSpPr/>
+            <p:nvPr/>
+          </p:nvGrpSpPr>
+          <p:grpSpPr>
+            <a:xfrm>
+              <a:off x="7345721" y="3820328"/>
+              <a:ext cx="976833" cy="1155724"/>
+              <a:chOff x="6915149" y="933450"/>
+              <a:chExt cx="976833" cy="1155724"/>
+            </a:xfrm>
+          </p:grpSpPr>
+          <p:sp>
+            <p:nvSpPr>
+              <p:cNvPr id="87" name="Elipse 86">
+                <a:extLst>
+                  <a:ext uri="{FF2B5EF4-FFF2-40B4-BE49-F238E27FC236}">
+                    <a16:creationId xmlns:a16="http://schemas.microsoft.com/office/drawing/2014/main" id="{AD77299E-A95D-41C5-9558-BBAB007070F2}"/>
+                  </a:ext>
+                </a:extLst>
+              </p:cNvPr>
+              <p:cNvSpPr/>
+              <p:nvPr/>
+            </p:nvSpPr>
+            <p:spPr>
+              <a:xfrm>
+                <a:off x="6915149" y="1614352"/>
+                <a:ext cx="160867" cy="160867"/>
+              </a:xfrm>
+              <a:prstGeom prst="ellipse">
+                <a:avLst/>
+              </a:prstGeom>
+              <a:solidFill>
+                <a:schemeClr val="accent2"/>
+              </a:solidFill>
+            </p:spPr>
+            <p:style>
+              <a:lnRef idx="2">
+                <a:schemeClr val="dk1">
+                  <a:shade val="50000"/>
+                </a:schemeClr>
+              </a:lnRef>
+              <a:fillRef idx="1">
+                <a:schemeClr val="dk1"/>
+              </a:fillRef>
+              <a:effectRef idx="0">
+                <a:schemeClr val="dk1"/>
+              </a:effectRef>
+              <a:fontRef idx="minor">
+                <a:schemeClr val="lt1"/>
+              </a:fontRef>
+            </p:style>
+            <p:txBody>
+              <a:bodyPr rtlCol="0" anchor="ctr"/>
+              <a:lstStyle/>
+              <a:p>
+                <a:pPr algn="ctr"/>
+                <a:endParaRPr lang="es-ES"/>
+              </a:p>
+            </p:txBody>
+          </p:sp>
+          <p:cxnSp>
+            <p:nvCxnSpPr>
+              <p:cNvPr id="88" name="Conector recto de flecha 87">
+                <a:extLst>
+                  <a:ext uri="{FF2B5EF4-FFF2-40B4-BE49-F238E27FC236}">
+                    <a16:creationId xmlns:a16="http://schemas.microsoft.com/office/drawing/2014/main" id="{36C18132-BFE6-441D-B6EC-924BAD1BB7E1}"/>
+                  </a:ext>
+                </a:extLst>
+              </p:cNvPr>
+              <p:cNvCxnSpPr>
+                <a:cxnSpLocks/>
+              </p:cNvCxnSpPr>
+              <p:nvPr/>
+            </p:nvCxnSpPr>
+            <p:spPr>
+              <a:xfrm flipV="1">
+                <a:off x="6968265" y="1681602"/>
+                <a:ext cx="833694" cy="13184"/>
+              </a:xfrm>
+              <a:prstGeom prst="straightConnector1">
+                <a:avLst/>
+              </a:prstGeom>
+              <a:ln w="76200">
+                <a:solidFill>
+                  <a:schemeClr val="tx1"/>
+                </a:solidFill>
+                <a:tailEnd type="triangle"/>
+              </a:ln>
+            </p:spPr>
+            <p:style>
+              <a:lnRef idx="1">
+                <a:schemeClr val="dk1"/>
+              </a:lnRef>
+              <a:fillRef idx="0">
+                <a:schemeClr val="dk1"/>
+              </a:fillRef>
+              <a:effectRef idx="0">
+                <a:schemeClr val="dk1"/>
+              </a:effectRef>
+              <a:fontRef idx="minor">
+                <a:schemeClr val="tx1"/>
+              </a:fontRef>
+            </p:style>
+          </p:cxnSp>
+          <p:cxnSp>
+            <p:nvCxnSpPr>
+              <p:cNvPr id="89" name="Conector recto de flecha 88">
+                <a:extLst>
+                  <a:ext uri="{FF2B5EF4-FFF2-40B4-BE49-F238E27FC236}">
+                    <a16:creationId xmlns:a16="http://schemas.microsoft.com/office/drawing/2014/main" id="{1691C53F-DD7B-4EF5-8E86-C3FAB852D851}"/>
+                  </a:ext>
+                </a:extLst>
+              </p:cNvPr>
+              <p:cNvCxnSpPr>
+                <a:cxnSpLocks/>
+              </p:cNvCxnSpPr>
+              <p:nvPr/>
+            </p:nvCxnSpPr>
+            <p:spPr>
+              <a:xfrm flipH="1" flipV="1">
+                <a:off x="6995582" y="933450"/>
+                <a:ext cx="1" cy="801690"/>
+              </a:xfrm>
+              <a:prstGeom prst="straightConnector1">
+                <a:avLst/>
+              </a:prstGeom>
+              <a:ln w="76200">
+                <a:solidFill>
+                  <a:schemeClr val="tx1"/>
+                </a:solidFill>
+                <a:tailEnd type="triangle"/>
+              </a:ln>
+            </p:spPr>
+            <p:style>
+              <a:lnRef idx="1">
+                <a:schemeClr val="dk1"/>
+              </a:lnRef>
+              <a:fillRef idx="0">
+                <a:schemeClr val="dk1"/>
+              </a:fillRef>
+              <a:effectRef idx="0">
+                <a:schemeClr val="dk1"/>
+              </a:effectRef>
+              <a:fontRef idx="minor">
+                <a:schemeClr val="tx1"/>
+              </a:fontRef>
+            </p:style>
+          </p:cxnSp>
+          <p:sp>
+            <p:nvSpPr>
+              <p:cNvPr id="90" name="CuadroTexto 89">
+                <a:extLst>
+                  <a:ext uri="{FF2B5EF4-FFF2-40B4-BE49-F238E27FC236}">
+                    <a16:creationId xmlns:a16="http://schemas.microsoft.com/office/drawing/2014/main" id="{4F2F1B5C-21B1-4B52-A64C-611890BB4A27}"/>
+                  </a:ext>
+                </a:extLst>
+              </p:cNvPr>
+              <p:cNvSpPr txBox="1"/>
+              <p:nvPr/>
+            </p:nvSpPr>
+            <p:spPr>
+              <a:xfrm>
+                <a:off x="7122253" y="1048263"/>
+                <a:ext cx="511679" cy="369332"/>
+              </a:xfrm>
+              <a:prstGeom prst="rect">
+                <a:avLst/>
+              </a:prstGeom>
+              <a:noFill/>
+            </p:spPr>
+            <p:txBody>
+              <a:bodyPr wrap="none" rtlCol="0">
+                <a:spAutoFit/>
+              </a:bodyPr>
+              <a:lstStyle/>
+              <a:p>
+                <a:r>
+                  <a:rPr lang="es-ES" dirty="0"/>
+                  <a:t>F1y</a:t>
+                </a:r>
+              </a:p>
+            </p:txBody>
+          </p:sp>
+          <p:sp>
+            <p:nvSpPr>
+              <p:cNvPr id="91" name="CuadroTexto 90">
+                <a:extLst>
+                  <a:ext uri="{FF2B5EF4-FFF2-40B4-BE49-F238E27FC236}">
+                    <a16:creationId xmlns:a16="http://schemas.microsoft.com/office/drawing/2014/main" id="{B04DC775-DF3B-4756-9D8F-2468423BFE80}"/>
+                  </a:ext>
+                </a:extLst>
+              </p:cNvPr>
+              <p:cNvSpPr txBox="1"/>
+              <p:nvPr/>
+            </p:nvSpPr>
+            <p:spPr>
+              <a:xfrm>
+                <a:off x="7385112" y="1719842"/>
+                <a:ext cx="506870" cy="369332"/>
+              </a:xfrm>
+              <a:prstGeom prst="rect">
+                <a:avLst/>
+              </a:prstGeom>
+              <a:noFill/>
+            </p:spPr>
+            <p:txBody>
+              <a:bodyPr wrap="none" rtlCol="0">
+                <a:spAutoFit/>
+              </a:bodyPr>
+              <a:lstStyle/>
+              <a:p>
+                <a:r>
+                  <a:rPr lang="es-ES" dirty="0"/>
+                  <a:t>F1x</a:t>
+                </a:r>
+              </a:p>
+            </p:txBody>
+          </p:sp>
+        </p:grpSp>
+        <p:grpSp>
+          <p:nvGrpSpPr>
+            <p:cNvPr id="107" name="Grupo 106">
+              <a:extLst>
+                <a:ext uri="{FF2B5EF4-FFF2-40B4-BE49-F238E27FC236}">
+                  <a16:creationId xmlns:a16="http://schemas.microsoft.com/office/drawing/2014/main" id="{9D38088C-370B-452B-8C67-95E2E2D99AC6}"/>
+                </a:ext>
+              </a:extLst>
+            </p:cNvPr>
+            <p:cNvGrpSpPr/>
+            <p:nvPr/>
+          </p:nvGrpSpPr>
+          <p:grpSpPr>
+            <a:xfrm>
+              <a:off x="7720448" y="4903307"/>
+              <a:ext cx="613454" cy="841410"/>
+              <a:chOff x="6163555" y="2052479"/>
+              <a:chExt cx="613454" cy="841410"/>
+            </a:xfrm>
+          </p:grpSpPr>
+          <p:sp>
+            <p:nvSpPr>
+              <p:cNvPr id="108" name="Elipse 107">
+                <a:extLst>
+                  <a:ext uri="{FF2B5EF4-FFF2-40B4-BE49-F238E27FC236}">
+                    <a16:creationId xmlns:a16="http://schemas.microsoft.com/office/drawing/2014/main" id="{43AEFE30-15C5-4C1B-AC84-C934B1270BD3}"/>
+                  </a:ext>
+                </a:extLst>
+              </p:cNvPr>
+              <p:cNvSpPr/>
+              <p:nvPr/>
+            </p:nvSpPr>
+            <p:spPr>
+              <a:xfrm>
+                <a:off x="6163555" y="2052479"/>
+                <a:ext cx="160867" cy="160867"/>
+              </a:xfrm>
+              <a:prstGeom prst="ellipse">
+                <a:avLst/>
+              </a:prstGeom>
+              <a:solidFill>
+                <a:schemeClr val="accent2"/>
+              </a:solidFill>
+            </p:spPr>
+            <p:style>
+              <a:lnRef idx="2">
+                <a:schemeClr val="dk1">
+                  <a:shade val="50000"/>
+                </a:schemeClr>
+              </a:lnRef>
+              <a:fillRef idx="1">
+                <a:schemeClr val="dk1"/>
+              </a:fillRef>
+              <a:effectRef idx="0">
+                <a:schemeClr val="dk1"/>
+              </a:effectRef>
+              <a:fontRef idx="minor">
+                <a:schemeClr val="lt1"/>
+              </a:fontRef>
+            </p:style>
+            <p:txBody>
+              <a:bodyPr rtlCol="0" anchor="ctr"/>
+              <a:lstStyle/>
+              <a:p>
+                <a:pPr algn="ctr"/>
+                <a:endParaRPr lang="es-ES"/>
+              </a:p>
+            </p:txBody>
+          </p:sp>
+          <p:cxnSp>
+            <p:nvCxnSpPr>
+              <p:cNvPr id="109" name="Conector recto de flecha 108">
+                <a:extLst>
+                  <a:ext uri="{FF2B5EF4-FFF2-40B4-BE49-F238E27FC236}">
+                    <a16:creationId xmlns:a16="http://schemas.microsoft.com/office/drawing/2014/main" id="{EB202573-0C1B-4B87-BE5D-6FC0C1CDADC1}"/>
+                  </a:ext>
+                </a:extLst>
+              </p:cNvPr>
+              <p:cNvCxnSpPr>
+                <a:cxnSpLocks/>
+              </p:cNvCxnSpPr>
+              <p:nvPr/>
+            </p:nvCxnSpPr>
+            <p:spPr>
+              <a:xfrm>
+                <a:off x="6233227" y="2111937"/>
+                <a:ext cx="11290" cy="781952"/>
+              </a:xfrm>
+              <a:prstGeom prst="straightConnector1">
+                <a:avLst/>
+              </a:prstGeom>
+              <a:ln w="76200">
+                <a:solidFill>
+                  <a:schemeClr val="tx1"/>
+                </a:solidFill>
+                <a:tailEnd type="triangle"/>
+              </a:ln>
+            </p:spPr>
+            <p:style>
+              <a:lnRef idx="1">
+                <a:schemeClr val="dk1"/>
+              </a:lnRef>
+              <a:fillRef idx="0">
+                <a:schemeClr val="dk1"/>
+              </a:fillRef>
+              <a:effectRef idx="0">
+                <a:schemeClr val="dk1"/>
+              </a:effectRef>
+              <a:fontRef idx="minor">
+                <a:schemeClr val="tx1"/>
+              </a:fontRef>
+            </p:style>
+          </p:cxnSp>
+          <p:sp>
+            <p:nvSpPr>
+              <p:cNvPr id="110" name="CuadroTexto 109">
+                <a:extLst>
+                  <a:ext uri="{FF2B5EF4-FFF2-40B4-BE49-F238E27FC236}">
+                    <a16:creationId xmlns:a16="http://schemas.microsoft.com/office/drawing/2014/main" id="{5D490623-DE31-44E5-9657-7C679B19FE11}"/>
+                  </a:ext>
+                </a:extLst>
+              </p:cNvPr>
+              <p:cNvSpPr txBox="1"/>
+              <p:nvPr/>
+            </p:nvSpPr>
+            <p:spPr>
+              <a:xfrm>
+                <a:off x="6208071" y="2343304"/>
+                <a:ext cx="568938" cy="369332"/>
+              </a:xfrm>
+              <a:prstGeom prst="rect">
+                <a:avLst/>
+              </a:prstGeom>
+              <a:noFill/>
+            </p:spPr>
+            <p:txBody>
+              <a:bodyPr wrap="none" rtlCol="0">
+                <a:spAutoFit/>
+              </a:bodyPr>
+              <a:lstStyle/>
+              <a:p>
+                <a:r>
+                  <a:rPr lang="es-ES" dirty="0"/>
+                  <a:t>CG1</a:t>
+                </a:r>
+              </a:p>
+            </p:txBody>
+          </p:sp>
+        </p:grpSp>
       </p:grpSp>
       <p:cxnSp>
         <p:nvCxnSpPr>
@@ -6530,6 +6557,4934 @@
     <p:extLst>
       <p:ext uri="{BB962C8B-B14F-4D97-AF65-F5344CB8AC3E}">
         <p14:creationId xmlns:p14="http://schemas.microsoft.com/office/powerpoint/2010/main" val="1023055719"/>
+      </p:ext>
+    </p:extLst>
+  </p:cSld>
+  <p:clrMapOvr>
+    <a:masterClrMapping/>
+  </p:clrMapOvr>
+</p:sld>
+</file>
+
+<file path=ppt/slides/slide2.xml><?xml version="1.0" encoding="utf-8"?>
+<p:sld xmlns:a="http://schemas.openxmlformats.org/drawingml/2006/main" xmlns:r="http://schemas.openxmlformats.org/officeDocument/2006/relationships" xmlns:p="http://schemas.openxmlformats.org/presentationml/2006/main">
+  <p:cSld>
+    <p:spTree>
+      <p:nvGrpSpPr>
+        <p:cNvPr id="1" name=""/>
+        <p:cNvGrpSpPr/>
+        <p:nvPr/>
+      </p:nvGrpSpPr>
+      <p:grpSpPr>
+        <a:xfrm>
+          <a:off x="0" y="0"/>
+          <a:ext cx="0" cy="0"/>
+          <a:chOff x="0" y="0"/>
+          <a:chExt cx="0" cy="0"/>
+        </a:xfrm>
+      </p:grpSpPr>
+      <p:graphicFrame>
+        <p:nvGraphicFramePr>
+          <p:cNvPr id="33" name="Tabla 33">
+            <a:extLst>
+              <a:ext uri="{FF2B5EF4-FFF2-40B4-BE49-F238E27FC236}">
+                <a16:creationId xmlns:a16="http://schemas.microsoft.com/office/drawing/2014/main" id="{7C74F3AD-1D9B-4FC4-8303-EA2BEBEC1EA6}"/>
+              </a:ext>
+            </a:extLst>
+          </p:cNvPr>
+          <p:cNvGraphicFramePr>
+            <a:graphicFrameLocks noGrp="1"/>
+          </p:cNvGraphicFramePr>
+          <p:nvPr>
+            <p:extLst>
+              <p:ext uri="{D42A27DB-BD31-4B8C-83A1-F6EECF244321}">
+                <p14:modId xmlns:p14="http://schemas.microsoft.com/office/powerpoint/2010/main" val="451576612"/>
+              </p:ext>
+            </p:extLst>
+          </p:nvPr>
+        </p:nvGraphicFramePr>
+        <p:xfrm>
+          <a:off x="1445200" y="107433"/>
+          <a:ext cx="7924243" cy="548640"/>
+        </p:xfrm>
+        <a:graphic>
+          <a:graphicData uri="http://schemas.openxmlformats.org/drawingml/2006/table">
+            <a:tbl>
+              <a:tblPr firstRow="1" bandRow="1">
+                <a:tableStyleId>{5C22544A-7EE6-4342-B048-85BDC9FD1C3A}</a:tableStyleId>
+              </a:tblPr>
+              <a:tblGrid>
+                <a:gridCol w="596767">
+                  <a:extLst>
+                    <a:ext uri="{9D8B030D-6E8A-4147-A177-3AD203B41FA5}">
+                      <a16:colId xmlns:a16="http://schemas.microsoft.com/office/drawing/2014/main" val="3041799563"/>
+                    </a:ext>
+                  </a:extLst>
+                </a:gridCol>
+                <a:gridCol w="563652">
+                  <a:extLst>
+                    <a:ext uri="{9D8B030D-6E8A-4147-A177-3AD203B41FA5}">
+                      <a16:colId xmlns:a16="http://schemas.microsoft.com/office/drawing/2014/main" val="1181778242"/>
+                    </a:ext>
+                  </a:extLst>
+                </a:gridCol>
+                <a:gridCol w="563652">
+                  <a:extLst>
+                    <a:ext uri="{9D8B030D-6E8A-4147-A177-3AD203B41FA5}">
+                      <a16:colId xmlns:a16="http://schemas.microsoft.com/office/drawing/2014/main" val="1510705483"/>
+                    </a:ext>
+                  </a:extLst>
+                </a:gridCol>
+                <a:gridCol w="563652">
+                  <a:extLst>
+                    <a:ext uri="{9D8B030D-6E8A-4147-A177-3AD203B41FA5}">
+                      <a16:colId xmlns:a16="http://schemas.microsoft.com/office/drawing/2014/main" val="2732985733"/>
+                    </a:ext>
+                  </a:extLst>
+                </a:gridCol>
+                <a:gridCol w="563652">
+                  <a:extLst>
+                    <a:ext uri="{9D8B030D-6E8A-4147-A177-3AD203B41FA5}">
+                      <a16:colId xmlns:a16="http://schemas.microsoft.com/office/drawing/2014/main" val="4137550973"/>
+                    </a:ext>
+                  </a:extLst>
+                </a:gridCol>
+                <a:gridCol w="563652">
+                  <a:extLst>
+                    <a:ext uri="{9D8B030D-6E8A-4147-A177-3AD203B41FA5}">
+                      <a16:colId xmlns:a16="http://schemas.microsoft.com/office/drawing/2014/main" val="646362884"/>
+                    </a:ext>
+                  </a:extLst>
+                </a:gridCol>
+                <a:gridCol w="563652">
+                  <a:extLst>
+                    <a:ext uri="{9D8B030D-6E8A-4147-A177-3AD203B41FA5}">
+                      <a16:colId xmlns:a16="http://schemas.microsoft.com/office/drawing/2014/main" val="2169319886"/>
+                    </a:ext>
+                  </a:extLst>
+                </a:gridCol>
+                <a:gridCol w="563652">
+                  <a:extLst>
+                    <a:ext uri="{9D8B030D-6E8A-4147-A177-3AD203B41FA5}">
+                      <a16:colId xmlns:a16="http://schemas.microsoft.com/office/drawing/2014/main" val="383336454"/>
+                    </a:ext>
+                  </a:extLst>
+                </a:gridCol>
+                <a:gridCol w="563652">
+                  <a:extLst>
+                    <a:ext uri="{9D8B030D-6E8A-4147-A177-3AD203B41FA5}">
+                      <a16:colId xmlns:a16="http://schemas.microsoft.com/office/drawing/2014/main" val="429672730"/>
+                    </a:ext>
+                  </a:extLst>
+                </a:gridCol>
+                <a:gridCol w="563652">
+                  <a:extLst>
+                    <a:ext uri="{9D8B030D-6E8A-4147-A177-3AD203B41FA5}">
+                      <a16:colId xmlns:a16="http://schemas.microsoft.com/office/drawing/2014/main" val="2813112499"/>
+                    </a:ext>
+                  </a:extLst>
+                </a:gridCol>
+                <a:gridCol w="563652">
+                  <a:extLst>
+                    <a:ext uri="{9D8B030D-6E8A-4147-A177-3AD203B41FA5}">
+                      <a16:colId xmlns:a16="http://schemas.microsoft.com/office/drawing/2014/main" val="3997611701"/>
+                    </a:ext>
+                  </a:extLst>
+                </a:gridCol>
+                <a:gridCol w="563652">
+                  <a:extLst>
+                    <a:ext uri="{9D8B030D-6E8A-4147-A177-3AD203B41FA5}">
+                      <a16:colId xmlns:a16="http://schemas.microsoft.com/office/drawing/2014/main" val="280095447"/>
+                    </a:ext>
+                  </a:extLst>
+                </a:gridCol>
+                <a:gridCol w="563652">
+                  <a:extLst>
+                    <a:ext uri="{9D8B030D-6E8A-4147-A177-3AD203B41FA5}">
+                      <a16:colId xmlns:a16="http://schemas.microsoft.com/office/drawing/2014/main" val="3108934810"/>
+                    </a:ext>
+                  </a:extLst>
+                </a:gridCol>
+                <a:gridCol w="563652">
+                  <a:extLst>
+                    <a:ext uri="{9D8B030D-6E8A-4147-A177-3AD203B41FA5}">
+                      <a16:colId xmlns:a16="http://schemas.microsoft.com/office/drawing/2014/main" val="352980110"/>
+                    </a:ext>
+                  </a:extLst>
+                </a:gridCol>
+              </a:tblGrid>
+              <a:tr h="370840">
+                <a:tc>
+                  <a:txBody>
+                    <a:bodyPr/>
+                    <a:lstStyle/>
+                    <a:p>
+                      <a:r>
+                        <a:rPr lang="es-ES" sz="1500" dirty="0"/>
+                        <a:t>R10x</a:t>
+                      </a:r>
+                    </a:p>
+                  </a:txBody>
+                  <a:tcPr/>
+                </a:tc>
+                <a:tc>
+                  <a:txBody>
+                    <a:bodyPr/>
+                    <a:lstStyle/>
+                    <a:p>
+                      <a:r>
+                        <a:rPr lang="es-ES" sz="1500" dirty="0"/>
+                        <a:t>R10y</a:t>
+                      </a:r>
+                    </a:p>
+                  </a:txBody>
+                  <a:tcPr/>
+                </a:tc>
+                <a:tc>
+                  <a:txBody>
+                    <a:bodyPr/>
+                    <a:lstStyle/>
+                    <a:p>
+                      <a:r>
+                        <a:rPr lang="es-ES" sz="1500" dirty="0"/>
+                        <a:t>R11x</a:t>
+                      </a:r>
+                    </a:p>
+                  </a:txBody>
+                  <a:tcPr/>
+                </a:tc>
+                <a:tc>
+                  <a:txBody>
+                    <a:bodyPr/>
+                    <a:lstStyle/>
+                    <a:p>
+                      <a:r>
+                        <a:rPr lang="es-ES" sz="1500" dirty="0"/>
+                        <a:t>R11y</a:t>
+                      </a:r>
+                    </a:p>
+                  </a:txBody>
+                  <a:tcPr/>
+                </a:tc>
+                <a:tc>
+                  <a:txBody>
+                    <a:bodyPr/>
+                    <a:lstStyle/>
+                    <a:p>
+                      <a:r>
+                        <a:rPr lang="es-ES" sz="1500" dirty="0"/>
+                        <a:t>R20x</a:t>
+                      </a:r>
+                    </a:p>
+                  </a:txBody>
+                  <a:tcPr/>
+                </a:tc>
+                <a:tc>
+                  <a:txBody>
+                    <a:bodyPr/>
+                    <a:lstStyle/>
+                    <a:p>
+                      <a:r>
+                        <a:rPr lang="es-ES" sz="1500" dirty="0"/>
+                        <a:t>R20y</a:t>
+                      </a:r>
+                    </a:p>
+                  </a:txBody>
+                  <a:tcPr/>
+                </a:tc>
+                <a:tc>
+                  <a:txBody>
+                    <a:bodyPr/>
+                    <a:lstStyle/>
+                    <a:p>
+                      <a:r>
+                        <a:rPr lang="es-ES" sz="1500" dirty="0"/>
+                        <a:t>R21x</a:t>
+                      </a:r>
+                    </a:p>
+                  </a:txBody>
+                  <a:tcPr/>
+                </a:tc>
+                <a:tc>
+                  <a:txBody>
+                    <a:bodyPr/>
+                    <a:lstStyle/>
+                    <a:p>
+                      <a:r>
+                        <a:rPr lang="es-ES" sz="1500" dirty="0"/>
+                        <a:t>R21y</a:t>
+                      </a:r>
+                    </a:p>
+                  </a:txBody>
+                  <a:tcPr/>
+                </a:tc>
+                <a:tc>
+                  <a:txBody>
+                    <a:bodyPr/>
+                    <a:lstStyle/>
+                    <a:p>
+                      <a:r>
+                        <a:rPr lang="es-ES" sz="1500" dirty="0"/>
+                        <a:t>R30x</a:t>
+                      </a:r>
+                    </a:p>
+                  </a:txBody>
+                  <a:tcPr/>
+                </a:tc>
+                <a:tc>
+                  <a:txBody>
+                    <a:bodyPr/>
+                    <a:lstStyle/>
+                    <a:p>
+                      <a:r>
+                        <a:rPr lang="es-ES" sz="1500" dirty="0"/>
+                        <a:t>R30y</a:t>
+                      </a:r>
+                    </a:p>
+                  </a:txBody>
+                  <a:tcPr/>
+                </a:tc>
+                <a:tc>
+                  <a:txBody>
+                    <a:bodyPr/>
+                    <a:lstStyle/>
+                    <a:p>
+                      <a:r>
+                        <a:rPr lang="es-ES" sz="1500" dirty="0"/>
+                        <a:t>R31x</a:t>
+                      </a:r>
+                    </a:p>
+                  </a:txBody>
+                  <a:tcPr/>
+                </a:tc>
+                <a:tc>
+                  <a:txBody>
+                    <a:bodyPr/>
+                    <a:lstStyle/>
+                    <a:p>
+                      <a:r>
+                        <a:rPr lang="es-ES" sz="1500" dirty="0"/>
+                        <a:t>R31y</a:t>
+                      </a:r>
+                    </a:p>
+                  </a:txBody>
+                  <a:tcPr/>
+                </a:tc>
+                <a:tc>
+                  <a:txBody>
+                    <a:bodyPr/>
+                    <a:lstStyle/>
+                    <a:p>
+                      <a:r>
+                        <a:rPr lang="es-ES" sz="1500" dirty="0" err="1"/>
+                        <a:t>Fx</a:t>
+                      </a:r>
+                      <a:endParaRPr lang="es-ES" sz="1500" dirty="0"/>
+                    </a:p>
+                  </a:txBody>
+                  <a:tcPr/>
+                </a:tc>
+                <a:tc>
+                  <a:txBody>
+                    <a:bodyPr/>
+                    <a:lstStyle/>
+                    <a:p>
+                      <a:r>
+                        <a:rPr lang="es-ES" sz="1500" dirty="0" err="1"/>
+                        <a:t>Fy</a:t>
+                      </a:r>
+                      <a:endParaRPr lang="es-ES" sz="1500" dirty="0"/>
+                    </a:p>
+                  </a:txBody>
+                  <a:tcPr/>
+                </a:tc>
+                <a:extLst>
+                  <a:ext uri="{0D108BD9-81ED-4DB2-BD59-A6C34878D82A}">
+                    <a16:rowId xmlns:a16="http://schemas.microsoft.com/office/drawing/2014/main" val="2433679217"/>
+                  </a:ext>
+                </a:extLst>
+              </a:tr>
+            </a:tbl>
+          </a:graphicData>
+        </a:graphic>
+      </p:graphicFrame>
+      <p:graphicFrame>
+        <p:nvGraphicFramePr>
+          <p:cNvPr id="34" name="Tabla 34">
+            <a:extLst>
+              <a:ext uri="{FF2B5EF4-FFF2-40B4-BE49-F238E27FC236}">
+                <a16:creationId xmlns:a16="http://schemas.microsoft.com/office/drawing/2014/main" id="{983788C3-50A1-4107-9CBE-D84D89A6DA3B}"/>
+              </a:ext>
+            </a:extLst>
+          </p:cNvPr>
+          <p:cNvGraphicFramePr>
+            <a:graphicFrameLocks noGrp="1"/>
+          </p:cNvGraphicFramePr>
+          <p:nvPr>
+            <p:extLst>
+              <p:ext uri="{D42A27DB-BD31-4B8C-83A1-F6EECF244321}">
+                <p14:modId xmlns:p14="http://schemas.microsoft.com/office/powerpoint/2010/main" val="2512006994"/>
+              </p:ext>
+            </p:extLst>
+          </p:nvPr>
+        </p:nvGraphicFramePr>
+        <p:xfrm>
+          <a:off x="1445200" y="656073"/>
+          <a:ext cx="7918400" cy="4820920"/>
+        </p:xfrm>
+        <a:graphic>
+          <a:graphicData uri="http://schemas.openxmlformats.org/drawingml/2006/table">
+            <a:tbl>
+              <a:tblPr firstRow="1" bandRow="1">
+                <a:tableStyleId>{5C22544A-7EE6-4342-B048-85BDC9FD1C3A}</a:tableStyleId>
+              </a:tblPr>
+              <a:tblGrid>
+                <a:gridCol w="565600">
+                  <a:extLst>
+                    <a:ext uri="{9D8B030D-6E8A-4147-A177-3AD203B41FA5}">
+                      <a16:colId xmlns:a16="http://schemas.microsoft.com/office/drawing/2014/main" val="3690028346"/>
+                    </a:ext>
+                  </a:extLst>
+                </a:gridCol>
+                <a:gridCol w="565600">
+                  <a:extLst>
+                    <a:ext uri="{9D8B030D-6E8A-4147-A177-3AD203B41FA5}">
+                      <a16:colId xmlns:a16="http://schemas.microsoft.com/office/drawing/2014/main" val="2195556617"/>
+                    </a:ext>
+                  </a:extLst>
+                </a:gridCol>
+                <a:gridCol w="565600">
+                  <a:extLst>
+                    <a:ext uri="{9D8B030D-6E8A-4147-A177-3AD203B41FA5}">
+                      <a16:colId xmlns:a16="http://schemas.microsoft.com/office/drawing/2014/main" val="2411740770"/>
+                    </a:ext>
+                  </a:extLst>
+                </a:gridCol>
+                <a:gridCol w="565600">
+                  <a:extLst>
+                    <a:ext uri="{9D8B030D-6E8A-4147-A177-3AD203B41FA5}">
+                      <a16:colId xmlns:a16="http://schemas.microsoft.com/office/drawing/2014/main" val="3979601143"/>
+                    </a:ext>
+                  </a:extLst>
+                </a:gridCol>
+                <a:gridCol w="565600">
+                  <a:extLst>
+                    <a:ext uri="{9D8B030D-6E8A-4147-A177-3AD203B41FA5}">
+                      <a16:colId xmlns:a16="http://schemas.microsoft.com/office/drawing/2014/main" val="3772328824"/>
+                    </a:ext>
+                  </a:extLst>
+                </a:gridCol>
+                <a:gridCol w="565600">
+                  <a:extLst>
+                    <a:ext uri="{9D8B030D-6E8A-4147-A177-3AD203B41FA5}">
+                      <a16:colId xmlns:a16="http://schemas.microsoft.com/office/drawing/2014/main" val="1323442099"/>
+                    </a:ext>
+                  </a:extLst>
+                </a:gridCol>
+                <a:gridCol w="565600">
+                  <a:extLst>
+                    <a:ext uri="{9D8B030D-6E8A-4147-A177-3AD203B41FA5}">
+                      <a16:colId xmlns:a16="http://schemas.microsoft.com/office/drawing/2014/main" val="1877643046"/>
+                    </a:ext>
+                  </a:extLst>
+                </a:gridCol>
+                <a:gridCol w="565600">
+                  <a:extLst>
+                    <a:ext uri="{9D8B030D-6E8A-4147-A177-3AD203B41FA5}">
+                      <a16:colId xmlns:a16="http://schemas.microsoft.com/office/drawing/2014/main" val="280988100"/>
+                    </a:ext>
+                  </a:extLst>
+                </a:gridCol>
+                <a:gridCol w="565600">
+                  <a:extLst>
+                    <a:ext uri="{9D8B030D-6E8A-4147-A177-3AD203B41FA5}">
+                      <a16:colId xmlns:a16="http://schemas.microsoft.com/office/drawing/2014/main" val="3857308700"/>
+                    </a:ext>
+                  </a:extLst>
+                </a:gridCol>
+                <a:gridCol w="565600">
+                  <a:extLst>
+                    <a:ext uri="{9D8B030D-6E8A-4147-A177-3AD203B41FA5}">
+                      <a16:colId xmlns:a16="http://schemas.microsoft.com/office/drawing/2014/main" val="1578476082"/>
+                    </a:ext>
+                  </a:extLst>
+                </a:gridCol>
+                <a:gridCol w="565600">
+                  <a:extLst>
+                    <a:ext uri="{9D8B030D-6E8A-4147-A177-3AD203B41FA5}">
+                      <a16:colId xmlns:a16="http://schemas.microsoft.com/office/drawing/2014/main" val="1875345835"/>
+                    </a:ext>
+                  </a:extLst>
+                </a:gridCol>
+                <a:gridCol w="565600">
+                  <a:extLst>
+                    <a:ext uri="{9D8B030D-6E8A-4147-A177-3AD203B41FA5}">
+                      <a16:colId xmlns:a16="http://schemas.microsoft.com/office/drawing/2014/main" val="486564587"/>
+                    </a:ext>
+                  </a:extLst>
+                </a:gridCol>
+                <a:gridCol w="565600">
+                  <a:extLst>
+                    <a:ext uri="{9D8B030D-6E8A-4147-A177-3AD203B41FA5}">
+                      <a16:colId xmlns:a16="http://schemas.microsoft.com/office/drawing/2014/main" val="2996731241"/>
+                    </a:ext>
+                  </a:extLst>
+                </a:gridCol>
+                <a:gridCol w="565600">
+                  <a:extLst>
+                    <a:ext uri="{9D8B030D-6E8A-4147-A177-3AD203B41FA5}">
+                      <a16:colId xmlns:a16="http://schemas.microsoft.com/office/drawing/2014/main" val="3720609914"/>
+                    </a:ext>
+                  </a:extLst>
+                </a:gridCol>
+              </a:tblGrid>
+              <a:tr h="370840">
+                <a:tc>
+                  <a:txBody>
+                    <a:bodyPr/>
+                    <a:lstStyle/>
+                    <a:p>
+                      <a:endParaRPr lang="es-ES" sz="1400" dirty="0"/>
+                    </a:p>
+                  </a:txBody>
+                  <a:tcPr/>
+                </a:tc>
+                <a:tc>
+                  <a:txBody>
+                    <a:bodyPr/>
+                    <a:lstStyle/>
+                    <a:p>
+                      <a:endParaRPr lang="es-ES" sz="1400" dirty="0"/>
+                    </a:p>
+                  </a:txBody>
+                  <a:tcPr/>
+                </a:tc>
+                <a:tc>
+                  <a:txBody>
+                    <a:bodyPr/>
+                    <a:lstStyle/>
+                    <a:p>
+                      <a:r>
+                        <a:rPr lang="es-ES" sz="1400" dirty="0"/>
+                        <a:t>1</a:t>
+                      </a:r>
+                    </a:p>
+                  </a:txBody>
+                  <a:tcPr/>
+                </a:tc>
+                <a:tc>
+                  <a:txBody>
+                    <a:bodyPr/>
+                    <a:lstStyle/>
+                    <a:p>
+                      <a:endParaRPr lang="es-ES" sz="1400" dirty="0"/>
+                    </a:p>
+                  </a:txBody>
+                  <a:tcPr/>
+                </a:tc>
+                <a:tc>
+                  <a:txBody>
+                    <a:bodyPr/>
+                    <a:lstStyle/>
+                    <a:p>
+                      <a:endParaRPr lang="es-ES" sz="1400" dirty="0"/>
+                    </a:p>
+                  </a:txBody>
+                  <a:tcPr/>
+                </a:tc>
+                <a:tc>
+                  <a:txBody>
+                    <a:bodyPr/>
+                    <a:lstStyle/>
+                    <a:p>
+                      <a:endParaRPr lang="es-ES" sz="1400" dirty="0"/>
+                    </a:p>
+                  </a:txBody>
+                  <a:tcPr/>
+                </a:tc>
+                <a:tc>
+                  <a:txBody>
+                    <a:bodyPr/>
+                    <a:lstStyle/>
+                    <a:p>
+                      <a:endParaRPr lang="es-ES" sz="1400" dirty="0"/>
+                    </a:p>
+                  </a:txBody>
+                  <a:tcPr/>
+                </a:tc>
+                <a:tc>
+                  <a:txBody>
+                    <a:bodyPr/>
+                    <a:lstStyle/>
+                    <a:p>
+                      <a:endParaRPr lang="es-ES" sz="1400" dirty="0"/>
+                    </a:p>
+                  </a:txBody>
+                  <a:tcPr/>
+                </a:tc>
+                <a:tc>
+                  <a:txBody>
+                    <a:bodyPr/>
+                    <a:lstStyle/>
+                    <a:p>
+                      <a:r>
+                        <a:rPr lang="es-ES" sz="1400" dirty="0"/>
+                        <a:t>1</a:t>
+                      </a:r>
+                    </a:p>
+                  </a:txBody>
+                  <a:tcPr/>
+                </a:tc>
+                <a:tc>
+                  <a:txBody>
+                    <a:bodyPr/>
+                    <a:lstStyle/>
+                    <a:p>
+                      <a:endParaRPr lang="es-ES" sz="1400" dirty="0"/>
+                    </a:p>
+                  </a:txBody>
+                  <a:tcPr/>
+                </a:tc>
+                <a:tc>
+                  <a:txBody>
+                    <a:bodyPr/>
+                    <a:lstStyle/>
+                    <a:p>
+                      <a:endParaRPr lang="es-ES" sz="1400" dirty="0"/>
+                    </a:p>
+                  </a:txBody>
+                  <a:tcPr/>
+                </a:tc>
+                <a:tc>
+                  <a:txBody>
+                    <a:bodyPr/>
+                    <a:lstStyle/>
+                    <a:p>
+                      <a:endParaRPr lang="es-ES" sz="1400" dirty="0"/>
+                    </a:p>
+                  </a:txBody>
+                  <a:tcPr/>
+                </a:tc>
+                <a:tc>
+                  <a:txBody>
+                    <a:bodyPr/>
+                    <a:lstStyle/>
+                    <a:p>
+                      <a:endParaRPr lang="es-ES" sz="1400" dirty="0"/>
+                    </a:p>
+                  </a:txBody>
+                  <a:tcPr/>
+                </a:tc>
+                <a:tc>
+                  <a:txBody>
+                    <a:bodyPr/>
+                    <a:lstStyle/>
+                    <a:p>
+                      <a:endParaRPr lang="es-ES" sz="1400" dirty="0"/>
+                    </a:p>
+                  </a:txBody>
+                  <a:tcPr/>
+                </a:tc>
+                <a:extLst>
+                  <a:ext uri="{0D108BD9-81ED-4DB2-BD59-A6C34878D82A}">
+                    <a16:rowId xmlns:a16="http://schemas.microsoft.com/office/drawing/2014/main" val="3585353747"/>
+                  </a:ext>
+                </a:extLst>
+              </a:tr>
+              <a:tr h="370840">
+                <a:tc>
+                  <a:txBody>
+                    <a:bodyPr/>
+                    <a:lstStyle/>
+                    <a:p>
+                      <a:endParaRPr lang="es-ES" sz="1400" dirty="0"/>
+                    </a:p>
+                  </a:txBody>
+                  <a:tcPr/>
+                </a:tc>
+                <a:tc>
+                  <a:txBody>
+                    <a:bodyPr/>
+                    <a:lstStyle/>
+                    <a:p>
+                      <a:endParaRPr lang="es-ES" sz="1400" dirty="0"/>
+                    </a:p>
+                  </a:txBody>
+                  <a:tcPr/>
+                </a:tc>
+                <a:tc>
+                  <a:txBody>
+                    <a:bodyPr/>
+                    <a:lstStyle/>
+                    <a:p>
+                      <a:endParaRPr lang="es-ES" sz="1400" dirty="0"/>
+                    </a:p>
+                  </a:txBody>
+                  <a:tcPr/>
+                </a:tc>
+                <a:tc>
+                  <a:txBody>
+                    <a:bodyPr/>
+                    <a:lstStyle/>
+                    <a:p>
+                      <a:r>
+                        <a:rPr lang="es-ES" sz="1400" dirty="0"/>
+                        <a:t>1</a:t>
+                      </a:r>
+                    </a:p>
+                  </a:txBody>
+                  <a:tcPr/>
+                </a:tc>
+                <a:tc>
+                  <a:txBody>
+                    <a:bodyPr/>
+                    <a:lstStyle/>
+                    <a:p>
+                      <a:endParaRPr lang="es-ES" sz="1400" dirty="0"/>
+                    </a:p>
+                  </a:txBody>
+                  <a:tcPr/>
+                </a:tc>
+                <a:tc>
+                  <a:txBody>
+                    <a:bodyPr/>
+                    <a:lstStyle/>
+                    <a:p>
+                      <a:endParaRPr lang="es-ES" sz="1400" dirty="0"/>
+                    </a:p>
+                  </a:txBody>
+                  <a:tcPr/>
+                </a:tc>
+                <a:tc>
+                  <a:txBody>
+                    <a:bodyPr/>
+                    <a:lstStyle/>
+                    <a:p>
+                      <a:endParaRPr lang="es-ES" sz="1400" dirty="0"/>
+                    </a:p>
+                  </a:txBody>
+                  <a:tcPr/>
+                </a:tc>
+                <a:tc>
+                  <a:txBody>
+                    <a:bodyPr/>
+                    <a:lstStyle/>
+                    <a:p>
+                      <a:endParaRPr lang="es-ES" sz="1400" dirty="0"/>
+                    </a:p>
+                  </a:txBody>
+                  <a:tcPr/>
+                </a:tc>
+                <a:tc>
+                  <a:txBody>
+                    <a:bodyPr/>
+                    <a:lstStyle/>
+                    <a:p>
+                      <a:endParaRPr lang="es-ES" sz="1400" dirty="0"/>
+                    </a:p>
+                  </a:txBody>
+                  <a:tcPr/>
+                </a:tc>
+                <a:tc>
+                  <a:txBody>
+                    <a:bodyPr/>
+                    <a:lstStyle/>
+                    <a:p>
+                      <a:r>
+                        <a:rPr lang="es-ES" sz="1400" dirty="0"/>
+                        <a:t>1</a:t>
+                      </a:r>
+                    </a:p>
+                  </a:txBody>
+                  <a:tcPr/>
+                </a:tc>
+                <a:tc>
+                  <a:txBody>
+                    <a:bodyPr/>
+                    <a:lstStyle/>
+                    <a:p>
+                      <a:endParaRPr lang="es-ES" sz="1400"/>
+                    </a:p>
+                  </a:txBody>
+                  <a:tcPr/>
+                </a:tc>
+                <a:tc>
+                  <a:txBody>
+                    <a:bodyPr/>
+                    <a:lstStyle/>
+                    <a:p>
+                      <a:endParaRPr lang="es-ES" sz="1400" dirty="0"/>
+                    </a:p>
+                  </a:txBody>
+                  <a:tcPr/>
+                </a:tc>
+                <a:tc>
+                  <a:txBody>
+                    <a:bodyPr/>
+                    <a:lstStyle/>
+                    <a:p>
+                      <a:endParaRPr lang="es-ES" sz="1400"/>
+                    </a:p>
+                  </a:txBody>
+                  <a:tcPr/>
+                </a:tc>
+                <a:tc>
+                  <a:txBody>
+                    <a:bodyPr/>
+                    <a:lstStyle/>
+                    <a:p>
+                      <a:endParaRPr lang="es-ES" sz="1400" dirty="0"/>
+                    </a:p>
+                  </a:txBody>
+                  <a:tcPr/>
+                </a:tc>
+                <a:extLst>
+                  <a:ext uri="{0D108BD9-81ED-4DB2-BD59-A6C34878D82A}">
+                    <a16:rowId xmlns:a16="http://schemas.microsoft.com/office/drawing/2014/main" val="1390600314"/>
+                  </a:ext>
+                </a:extLst>
+              </a:tr>
+              <a:tr h="370840">
+                <a:tc>
+                  <a:txBody>
+                    <a:bodyPr/>
+                    <a:lstStyle/>
+                    <a:p>
+                      <a:endParaRPr lang="es-ES" sz="1400"/>
+                    </a:p>
+                  </a:txBody>
+                  <a:tcPr/>
+                </a:tc>
+                <a:tc>
+                  <a:txBody>
+                    <a:bodyPr/>
+                    <a:lstStyle/>
+                    <a:p>
+                      <a:endParaRPr lang="es-ES" sz="1400"/>
+                    </a:p>
+                  </a:txBody>
+                  <a:tcPr/>
+                </a:tc>
+                <a:tc>
+                  <a:txBody>
+                    <a:bodyPr/>
+                    <a:lstStyle/>
+                    <a:p>
+                      <a:endParaRPr lang="es-ES" sz="1400"/>
+                    </a:p>
+                  </a:txBody>
+                  <a:tcPr/>
+                </a:tc>
+                <a:tc>
+                  <a:txBody>
+                    <a:bodyPr/>
+                    <a:lstStyle/>
+                    <a:p>
+                      <a:endParaRPr lang="es-ES" sz="1400"/>
+                    </a:p>
+                  </a:txBody>
+                  <a:tcPr/>
+                </a:tc>
+                <a:tc>
+                  <a:txBody>
+                    <a:bodyPr/>
+                    <a:lstStyle/>
+                    <a:p>
+                      <a:endParaRPr lang="es-ES" sz="1400" dirty="0"/>
+                    </a:p>
+                  </a:txBody>
+                  <a:tcPr/>
+                </a:tc>
+                <a:tc>
+                  <a:txBody>
+                    <a:bodyPr/>
+                    <a:lstStyle/>
+                    <a:p>
+                      <a:endParaRPr lang="es-ES" sz="1400" dirty="0"/>
+                    </a:p>
+                  </a:txBody>
+                  <a:tcPr/>
+                </a:tc>
+                <a:tc>
+                  <a:txBody>
+                    <a:bodyPr/>
+                    <a:lstStyle/>
+                    <a:p>
+                      <a:r>
+                        <a:rPr lang="es-ES" sz="1400" dirty="0"/>
+                        <a:t>1</a:t>
+                      </a:r>
+                    </a:p>
+                  </a:txBody>
+                  <a:tcPr/>
+                </a:tc>
+                <a:tc>
+                  <a:txBody>
+                    <a:bodyPr/>
+                    <a:lstStyle/>
+                    <a:p>
+                      <a:endParaRPr lang="es-ES" sz="1400" dirty="0"/>
+                    </a:p>
+                  </a:txBody>
+                  <a:tcPr/>
+                </a:tc>
+                <a:tc>
+                  <a:txBody>
+                    <a:bodyPr/>
+                    <a:lstStyle/>
+                    <a:p>
+                      <a:endParaRPr lang="es-ES" sz="1400" dirty="0"/>
+                    </a:p>
+                  </a:txBody>
+                  <a:tcPr/>
+                </a:tc>
+                <a:tc>
+                  <a:txBody>
+                    <a:bodyPr/>
+                    <a:lstStyle/>
+                    <a:p>
+                      <a:endParaRPr lang="es-ES" sz="1400" dirty="0"/>
+                    </a:p>
+                  </a:txBody>
+                  <a:tcPr/>
+                </a:tc>
+                <a:tc>
+                  <a:txBody>
+                    <a:bodyPr/>
+                    <a:lstStyle/>
+                    <a:p>
+                      <a:r>
+                        <a:rPr lang="es-ES" sz="1400" dirty="0"/>
+                        <a:t>1</a:t>
+                      </a:r>
+                    </a:p>
+                  </a:txBody>
+                  <a:tcPr/>
+                </a:tc>
+                <a:tc>
+                  <a:txBody>
+                    <a:bodyPr/>
+                    <a:lstStyle/>
+                    <a:p>
+                      <a:endParaRPr lang="es-ES" sz="1400" dirty="0"/>
+                    </a:p>
+                  </a:txBody>
+                  <a:tcPr/>
+                </a:tc>
+                <a:tc>
+                  <a:txBody>
+                    <a:bodyPr/>
+                    <a:lstStyle/>
+                    <a:p>
+                      <a:endParaRPr lang="es-ES" sz="1400"/>
+                    </a:p>
+                  </a:txBody>
+                  <a:tcPr/>
+                </a:tc>
+                <a:tc>
+                  <a:txBody>
+                    <a:bodyPr/>
+                    <a:lstStyle/>
+                    <a:p>
+                      <a:endParaRPr lang="es-ES" sz="1400" dirty="0"/>
+                    </a:p>
+                  </a:txBody>
+                  <a:tcPr/>
+                </a:tc>
+                <a:extLst>
+                  <a:ext uri="{0D108BD9-81ED-4DB2-BD59-A6C34878D82A}">
+                    <a16:rowId xmlns:a16="http://schemas.microsoft.com/office/drawing/2014/main" val="3645692828"/>
+                  </a:ext>
+                </a:extLst>
+              </a:tr>
+              <a:tr h="370840">
+                <a:tc>
+                  <a:txBody>
+                    <a:bodyPr/>
+                    <a:lstStyle/>
+                    <a:p>
+                      <a:endParaRPr lang="es-ES" sz="1400"/>
+                    </a:p>
+                  </a:txBody>
+                  <a:tcPr/>
+                </a:tc>
+                <a:tc>
+                  <a:txBody>
+                    <a:bodyPr/>
+                    <a:lstStyle/>
+                    <a:p>
+                      <a:endParaRPr lang="es-ES" sz="1400"/>
+                    </a:p>
+                  </a:txBody>
+                  <a:tcPr/>
+                </a:tc>
+                <a:tc>
+                  <a:txBody>
+                    <a:bodyPr/>
+                    <a:lstStyle/>
+                    <a:p>
+                      <a:endParaRPr lang="es-ES" sz="1400"/>
+                    </a:p>
+                  </a:txBody>
+                  <a:tcPr/>
+                </a:tc>
+                <a:tc>
+                  <a:txBody>
+                    <a:bodyPr/>
+                    <a:lstStyle/>
+                    <a:p>
+                      <a:endParaRPr lang="es-ES" sz="1400" dirty="0"/>
+                    </a:p>
+                  </a:txBody>
+                  <a:tcPr/>
+                </a:tc>
+                <a:tc>
+                  <a:txBody>
+                    <a:bodyPr/>
+                    <a:lstStyle/>
+                    <a:p>
+                      <a:endParaRPr lang="es-ES" sz="1400"/>
+                    </a:p>
+                  </a:txBody>
+                  <a:tcPr/>
+                </a:tc>
+                <a:tc>
+                  <a:txBody>
+                    <a:bodyPr/>
+                    <a:lstStyle/>
+                    <a:p>
+                      <a:endParaRPr lang="es-ES" sz="1400"/>
+                    </a:p>
+                  </a:txBody>
+                  <a:tcPr/>
+                </a:tc>
+                <a:tc>
+                  <a:txBody>
+                    <a:bodyPr/>
+                    <a:lstStyle/>
+                    <a:p>
+                      <a:endParaRPr lang="es-ES" sz="1400" dirty="0"/>
+                    </a:p>
+                  </a:txBody>
+                  <a:tcPr/>
+                </a:tc>
+                <a:tc>
+                  <a:txBody>
+                    <a:bodyPr/>
+                    <a:lstStyle/>
+                    <a:p>
+                      <a:r>
+                        <a:rPr lang="es-ES" sz="1400" dirty="0"/>
+                        <a:t>1</a:t>
+                      </a:r>
+                    </a:p>
+                  </a:txBody>
+                  <a:tcPr/>
+                </a:tc>
+                <a:tc>
+                  <a:txBody>
+                    <a:bodyPr/>
+                    <a:lstStyle/>
+                    <a:p>
+                      <a:endParaRPr lang="es-ES" sz="1400" dirty="0"/>
+                    </a:p>
+                  </a:txBody>
+                  <a:tcPr/>
+                </a:tc>
+                <a:tc>
+                  <a:txBody>
+                    <a:bodyPr/>
+                    <a:lstStyle/>
+                    <a:p>
+                      <a:endParaRPr lang="es-ES" sz="1400" dirty="0"/>
+                    </a:p>
+                  </a:txBody>
+                  <a:tcPr/>
+                </a:tc>
+                <a:tc>
+                  <a:txBody>
+                    <a:bodyPr/>
+                    <a:lstStyle/>
+                    <a:p>
+                      <a:endParaRPr lang="es-ES" sz="1400" dirty="0"/>
+                    </a:p>
+                  </a:txBody>
+                  <a:tcPr/>
+                </a:tc>
+                <a:tc>
+                  <a:txBody>
+                    <a:bodyPr/>
+                    <a:lstStyle/>
+                    <a:p>
+                      <a:r>
+                        <a:rPr lang="es-ES" sz="1400" dirty="0"/>
+                        <a:t>1</a:t>
+                      </a:r>
+                    </a:p>
+                  </a:txBody>
+                  <a:tcPr/>
+                </a:tc>
+                <a:tc>
+                  <a:txBody>
+                    <a:bodyPr/>
+                    <a:lstStyle/>
+                    <a:p>
+                      <a:endParaRPr lang="es-ES" sz="1400" dirty="0"/>
+                    </a:p>
+                  </a:txBody>
+                  <a:tcPr/>
+                </a:tc>
+                <a:tc>
+                  <a:txBody>
+                    <a:bodyPr/>
+                    <a:lstStyle/>
+                    <a:p>
+                      <a:endParaRPr lang="es-ES" sz="1400" dirty="0"/>
+                    </a:p>
+                  </a:txBody>
+                  <a:tcPr/>
+                </a:tc>
+                <a:extLst>
+                  <a:ext uri="{0D108BD9-81ED-4DB2-BD59-A6C34878D82A}">
+                    <a16:rowId xmlns:a16="http://schemas.microsoft.com/office/drawing/2014/main" val="668654746"/>
+                  </a:ext>
+                </a:extLst>
+              </a:tr>
+              <a:tr h="370840">
+                <a:tc>
+                  <a:txBody>
+                    <a:bodyPr/>
+                    <a:lstStyle/>
+                    <a:p>
+                      <a:r>
+                        <a:rPr lang="es-ES" sz="1400" dirty="0"/>
+                        <a:t>1</a:t>
+                      </a:r>
+                    </a:p>
+                  </a:txBody>
+                  <a:tcPr/>
+                </a:tc>
+                <a:tc>
+                  <a:txBody>
+                    <a:bodyPr/>
+                    <a:lstStyle/>
+                    <a:p>
+                      <a:endParaRPr lang="es-ES" sz="1400" dirty="0"/>
+                    </a:p>
+                  </a:txBody>
+                  <a:tcPr/>
+                </a:tc>
+                <a:tc>
+                  <a:txBody>
+                    <a:bodyPr/>
+                    <a:lstStyle/>
+                    <a:p>
+                      <a:r>
+                        <a:rPr lang="es-ES" sz="1400" dirty="0"/>
+                        <a:t>1</a:t>
+                      </a:r>
+                    </a:p>
+                  </a:txBody>
+                  <a:tcPr/>
+                </a:tc>
+                <a:tc>
+                  <a:txBody>
+                    <a:bodyPr/>
+                    <a:lstStyle/>
+                    <a:p>
+                      <a:endParaRPr lang="es-ES" sz="1400" dirty="0"/>
+                    </a:p>
+                  </a:txBody>
+                  <a:tcPr/>
+                </a:tc>
+                <a:tc>
+                  <a:txBody>
+                    <a:bodyPr/>
+                    <a:lstStyle/>
+                    <a:p>
+                      <a:endParaRPr lang="es-ES" sz="1400" dirty="0"/>
+                    </a:p>
+                  </a:txBody>
+                  <a:tcPr/>
+                </a:tc>
+                <a:tc>
+                  <a:txBody>
+                    <a:bodyPr/>
+                    <a:lstStyle/>
+                    <a:p>
+                      <a:endParaRPr lang="es-ES" sz="1400" dirty="0"/>
+                    </a:p>
+                  </a:txBody>
+                  <a:tcPr/>
+                </a:tc>
+                <a:tc>
+                  <a:txBody>
+                    <a:bodyPr/>
+                    <a:lstStyle/>
+                    <a:p>
+                      <a:endParaRPr lang="es-ES" sz="1400" dirty="0"/>
+                    </a:p>
+                  </a:txBody>
+                  <a:tcPr/>
+                </a:tc>
+                <a:tc>
+                  <a:txBody>
+                    <a:bodyPr/>
+                    <a:lstStyle/>
+                    <a:p>
+                      <a:endParaRPr lang="es-ES" sz="1400"/>
+                    </a:p>
+                  </a:txBody>
+                  <a:tcPr/>
+                </a:tc>
+                <a:tc>
+                  <a:txBody>
+                    <a:bodyPr/>
+                    <a:lstStyle/>
+                    <a:p>
+                      <a:endParaRPr lang="es-ES" sz="1400"/>
+                    </a:p>
+                  </a:txBody>
+                  <a:tcPr/>
+                </a:tc>
+                <a:tc>
+                  <a:txBody>
+                    <a:bodyPr/>
+                    <a:lstStyle/>
+                    <a:p>
+                      <a:endParaRPr lang="es-ES" sz="1400"/>
+                    </a:p>
+                  </a:txBody>
+                  <a:tcPr/>
+                </a:tc>
+                <a:tc>
+                  <a:txBody>
+                    <a:bodyPr/>
+                    <a:lstStyle/>
+                    <a:p>
+                      <a:endParaRPr lang="es-ES" sz="1400"/>
+                    </a:p>
+                  </a:txBody>
+                  <a:tcPr/>
+                </a:tc>
+                <a:tc>
+                  <a:txBody>
+                    <a:bodyPr/>
+                    <a:lstStyle/>
+                    <a:p>
+                      <a:endParaRPr lang="es-ES" sz="1400"/>
+                    </a:p>
+                  </a:txBody>
+                  <a:tcPr/>
+                </a:tc>
+                <a:tc>
+                  <a:txBody>
+                    <a:bodyPr/>
+                    <a:lstStyle/>
+                    <a:p>
+                      <a:endParaRPr lang="es-ES" sz="1400"/>
+                    </a:p>
+                  </a:txBody>
+                  <a:tcPr/>
+                </a:tc>
+                <a:tc>
+                  <a:txBody>
+                    <a:bodyPr/>
+                    <a:lstStyle/>
+                    <a:p>
+                      <a:endParaRPr lang="es-ES" sz="1400" dirty="0"/>
+                    </a:p>
+                  </a:txBody>
+                  <a:tcPr/>
+                </a:tc>
+                <a:extLst>
+                  <a:ext uri="{0D108BD9-81ED-4DB2-BD59-A6C34878D82A}">
+                    <a16:rowId xmlns:a16="http://schemas.microsoft.com/office/drawing/2014/main" val="44414643"/>
+                  </a:ext>
+                </a:extLst>
+              </a:tr>
+              <a:tr h="370840">
+                <a:tc>
+                  <a:txBody>
+                    <a:bodyPr/>
+                    <a:lstStyle/>
+                    <a:p>
+                      <a:endParaRPr lang="es-ES" sz="1400" dirty="0"/>
+                    </a:p>
+                  </a:txBody>
+                  <a:tcPr/>
+                </a:tc>
+                <a:tc>
+                  <a:txBody>
+                    <a:bodyPr/>
+                    <a:lstStyle/>
+                    <a:p>
+                      <a:r>
+                        <a:rPr lang="es-ES" sz="1400" dirty="0"/>
+                        <a:t>1</a:t>
+                      </a:r>
+                    </a:p>
+                  </a:txBody>
+                  <a:tcPr/>
+                </a:tc>
+                <a:tc>
+                  <a:txBody>
+                    <a:bodyPr/>
+                    <a:lstStyle/>
+                    <a:p>
+                      <a:endParaRPr lang="es-ES" sz="1400" dirty="0"/>
+                    </a:p>
+                  </a:txBody>
+                  <a:tcPr/>
+                </a:tc>
+                <a:tc>
+                  <a:txBody>
+                    <a:bodyPr/>
+                    <a:lstStyle/>
+                    <a:p>
+                      <a:r>
+                        <a:rPr lang="es-ES" sz="1400" dirty="0"/>
+                        <a:t>1</a:t>
+                      </a:r>
+                    </a:p>
+                  </a:txBody>
+                  <a:tcPr/>
+                </a:tc>
+                <a:tc>
+                  <a:txBody>
+                    <a:bodyPr/>
+                    <a:lstStyle/>
+                    <a:p>
+                      <a:endParaRPr lang="es-ES" sz="1400" dirty="0"/>
+                    </a:p>
+                  </a:txBody>
+                  <a:tcPr/>
+                </a:tc>
+                <a:tc>
+                  <a:txBody>
+                    <a:bodyPr/>
+                    <a:lstStyle/>
+                    <a:p>
+                      <a:endParaRPr lang="es-ES" sz="1400" dirty="0"/>
+                    </a:p>
+                  </a:txBody>
+                  <a:tcPr/>
+                </a:tc>
+                <a:tc>
+                  <a:txBody>
+                    <a:bodyPr/>
+                    <a:lstStyle/>
+                    <a:p>
+                      <a:endParaRPr lang="es-ES" sz="1400"/>
+                    </a:p>
+                  </a:txBody>
+                  <a:tcPr/>
+                </a:tc>
+                <a:tc>
+                  <a:txBody>
+                    <a:bodyPr/>
+                    <a:lstStyle/>
+                    <a:p>
+                      <a:endParaRPr lang="es-ES" sz="1400"/>
+                    </a:p>
+                  </a:txBody>
+                  <a:tcPr/>
+                </a:tc>
+                <a:tc>
+                  <a:txBody>
+                    <a:bodyPr/>
+                    <a:lstStyle/>
+                    <a:p>
+                      <a:endParaRPr lang="es-ES" sz="1400"/>
+                    </a:p>
+                  </a:txBody>
+                  <a:tcPr/>
+                </a:tc>
+                <a:tc>
+                  <a:txBody>
+                    <a:bodyPr/>
+                    <a:lstStyle/>
+                    <a:p>
+                      <a:endParaRPr lang="es-ES" sz="1400"/>
+                    </a:p>
+                  </a:txBody>
+                  <a:tcPr/>
+                </a:tc>
+                <a:tc>
+                  <a:txBody>
+                    <a:bodyPr/>
+                    <a:lstStyle/>
+                    <a:p>
+                      <a:endParaRPr lang="es-ES" sz="1400"/>
+                    </a:p>
+                  </a:txBody>
+                  <a:tcPr/>
+                </a:tc>
+                <a:tc>
+                  <a:txBody>
+                    <a:bodyPr/>
+                    <a:lstStyle/>
+                    <a:p>
+                      <a:endParaRPr lang="es-ES" sz="1400"/>
+                    </a:p>
+                  </a:txBody>
+                  <a:tcPr/>
+                </a:tc>
+                <a:tc>
+                  <a:txBody>
+                    <a:bodyPr/>
+                    <a:lstStyle/>
+                    <a:p>
+                      <a:endParaRPr lang="es-ES" sz="1400"/>
+                    </a:p>
+                  </a:txBody>
+                  <a:tcPr/>
+                </a:tc>
+                <a:tc>
+                  <a:txBody>
+                    <a:bodyPr/>
+                    <a:lstStyle/>
+                    <a:p>
+                      <a:endParaRPr lang="es-ES" sz="1400"/>
+                    </a:p>
+                  </a:txBody>
+                  <a:tcPr/>
+                </a:tc>
+                <a:extLst>
+                  <a:ext uri="{0D108BD9-81ED-4DB2-BD59-A6C34878D82A}">
+                    <a16:rowId xmlns:a16="http://schemas.microsoft.com/office/drawing/2014/main" val="2747898742"/>
+                  </a:ext>
+                </a:extLst>
+              </a:tr>
+              <a:tr h="370840">
+                <a:tc>
+                  <a:txBody>
+                    <a:bodyPr/>
+                    <a:lstStyle/>
+                    <a:p>
+                      <a:r>
+                        <a:rPr lang="es-ES" sz="1400" dirty="0"/>
+                        <a:t>D10x</a:t>
+                      </a:r>
+                    </a:p>
+                  </a:txBody>
+                  <a:tcPr/>
+                </a:tc>
+                <a:tc>
+                  <a:txBody>
+                    <a:bodyPr/>
+                    <a:lstStyle/>
+                    <a:p>
+                      <a:r>
+                        <a:rPr lang="es-ES" sz="1400" dirty="0"/>
+                        <a:t>D10y</a:t>
+                      </a:r>
+                    </a:p>
+                  </a:txBody>
+                  <a:tcPr/>
+                </a:tc>
+                <a:tc>
+                  <a:txBody>
+                    <a:bodyPr/>
+                    <a:lstStyle/>
+                    <a:p>
+                      <a:r>
+                        <a:rPr lang="es-ES" sz="1400" dirty="0"/>
+                        <a:t>D11x</a:t>
+                      </a:r>
+                    </a:p>
+                  </a:txBody>
+                  <a:tcPr/>
+                </a:tc>
+                <a:tc>
+                  <a:txBody>
+                    <a:bodyPr/>
+                    <a:lstStyle/>
+                    <a:p>
+                      <a:r>
+                        <a:rPr lang="es-ES" sz="1400" dirty="0"/>
+                        <a:t>D11y</a:t>
+                      </a:r>
+                    </a:p>
+                  </a:txBody>
+                  <a:tcPr/>
+                </a:tc>
+                <a:tc>
+                  <a:txBody>
+                    <a:bodyPr/>
+                    <a:lstStyle/>
+                    <a:p>
+                      <a:endParaRPr lang="es-ES" sz="1400" dirty="0"/>
+                    </a:p>
+                  </a:txBody>
+                  <a:tcPr/>
+                </a:tc>
+                <a:tc>
+                  <a:txBody>
+                    <a:bodyPr/>
+                    <a:lstStyle/>
+                    <a:p>
+                      <a:endParaRPr lang="es-ES" sz="1400"/>
+                    </a:p>
+                  </a:txBody>
+                  <a:tcPr/>
+                </a:tc>
+                <a:tc>
+                  <a:txBody>
+                    <a:bodyPr/>
+                    <a:lstStyle/>
+                    <a:p>
+                      <a:endParaRPr lang="es-ES" sz="1400" dirty="0"/>
+                    </a:p>
+                  </a:txBody>
+                  <a:tcPr/>
+                </a:tc>
+                <a:tc>
+                  <a:txBody>
+                    <a:bodyPr/>
+                    <a:lstStyle/>
+                    <a:p>
+                      <a:endParaRPr lang="es-ES" sz="1400"/>
+                    </a:p>
+                  </a:txBody>
+                  <a:tcPr/>
+                </a:tc>
+                <a:tc>
+                  <a:txBody>
+                    <a:bodyPr/>
+                    <a:lstStyle/>
+                    <a:p>
+                      <a:endParaRPr lang="es-ES" sz="1400"/>
+                    </a:p>
+                  </a:txBody>
+                  <a:tcPr/>
+                </a:tc>
+                <a:tc>
+                  <a:txBody>
+                    <a:bodyPr/>
+                    <a:lstStyle/>
+                    <a:p>
+                      <a:endParaRPr lang="es-ES" sz="1400"/>
+                    </a:p>
+                  </a:txBody>
+                  <a:tcPr/>
+                </a:tc>
+                <a:tc>
+                  <a:txBody>
+                    <a:bodyPr/>
+                    <a:lstStyle/>
+                    <a:p>
+                      <a:endParaRPr lang="es-ES" sz="1400"/>
+                    </a:p>
+                  </a:txBody>
+                  <a:tcPr/>
+                </a:tc>
+                <a:tc>
+                  <a:txBody>
+                    <a:bodyPr/>
+                    <a:lstStyle/>
+                    <a:p>
+                      <a:endParaRPr lang="es-ES" sz="1400"/>
+                    </a:p>
+                  </a:txBody>
+                  <a:tcPr/>
+                </a:tc>
+                <a:tc>
+                  <a:txBody>
+                    <a:bodyPr/>
+                    <a:lstStyle/>
+                    <a:p>
+                      <a:endParaRPr lang="es-ES" sz="1400"/>
+                    </a:p>
+                  </a:txBody>
+                  <a:tcPr/>
+                </a:tc>
+                <a:tc>
+                  <a:txBody>
+                    <a:bodyPr/>
+                    <a:lstStyle/>
+                    <a:p>
+                      <a:endParaRPr lang="es-ES" sz="1400"/>
+                    </a:p>
+                  </a:txBody>
+                  <a:tcPr/>
+                </a:tc>
+                <a:extLst>
+                  <a:ext uri="{0D108BD9-81ED-4DB2-BD59-A6C34878D82A}">
+                    <a16:rowId xmlns:a16="http://schemas.microsoft.com/office/drawing/2014/main" val="3968832033"/>
+                  </a:ext>
+                </a:extLst>
+              </a:tr>
+              <a:tr h="370840">
+                <a:tc>
+                  <a:txBody>
+                    <a:bodyPr/>
+                    <a:lstStyle/>
+                    <a:p>
+                      <a:endParaRPr lang="es-ES" sz="1400" dirty="0"/>
+                    </a:p>
+                  </a:txBody>
+                  <a:tcPr/>
+                </a:tc>
+                <a:tc>
+                  <a:txBody>
+                    <a:bodyPr/>
+                    <a:lstStyle/>
+                    <a:p>
+                      <a:endParaRPr lang="es-ES" sz="1400" dirty="0"/>
+                    </a:p>
+                  </a:txBody>
+                  <a:tcPr/>
+                </a:tc>
+                <a:tc>
+                  <a:txBody>
+                    <a:bodyPr/>
+                    <a:lstStyle/>
+                    <a:p>
+                      <a:endParaRPr lang="es-ES" sz="1400" dirty="0"/>
+                    </a:p>
+                  </a:txBody>
+                  <a:tcPr/>
+                </a:tc>
+                <a:tc>
+                  <a:txBody>
+                    <a:bodyPr/>
+                    <a:lstStyle/>
+                    <a:p>
+                      <a:endParaRPr lang="es-ES" sz="1400"/>
+                    </a:p>
+                  </a:txBody>
+                  <a:tcPr/>
+                </a:tc>
+                <a:tc>
+                  <a:txBody>
+                    <a:bodyPr/>
+                    <a:lstStyle/>
+                    <a:p>
+                      <a:r>
+                        <a:rPr lang="es-ES" sz="1400" dirty="0"/>
+                        <a:t>1</a:t>
+                      </a:r>
+                    </a:p>
+                  </a:txBody>
+                  <a:tcPr/>
+                </a:tc>
+                <a:tc>
+                  <a:txBody>
+                    <a:bodyPr/>
+                    <a:lstStyle/>
+                    <a:p>
+                      <a:endParaRPr lang="es-ES" sz="1400" dirty="0"/>
+                    </a:p>
+                  </a:txBody>
+                  <a:tcPr/>
+                </a:tc>
+                <a:tc>
+                  <a:txBody>
+                    <a:bodyPr/>
+                    <a:lstStyle/>
+                    <a:p>
+                      <a:r>
+                        <a:rPr lang="es-ES" sz="1400" dirty="0"/>
+                        <a:t>1</a:t>
+                      </a:r>
+                    </a:p>
+                  </a:txBody>
+                  <a:tcPr/>
+                </a:tc>
+                <a:tc>
+                  <a:txBody>
+                    <a:bodyPr/>
+                    <a:lstStyle/>
+                    <a:p>
+                      <a:endParaRPr lang="es-ES" sz="1400"/>
+                    </a:p>
+                  </a:txBody>
+                  <a:tcPr/>
+                </a:tc>
+                <a:tc>
+                  <a:txBody>
+                    <a:bodyPr/>
+                    <a:lstStyle/>
+                    <a:p>
+                      <a:endParaRPr lang="es-ES" sz="1400"/>
+                    </a:p>
+                  </a:txBody>
+                  <a:tcPr/>
+                </a:tc>
+                <a:tc>
+                  <a:txBody>
+                    <a:bodyPr/>
+                    <a:lstStyle/>
+                    <a:p>
+                      <a:endParaRPr lang="es-ES" sz="1400"/>
+                    </a:p>
+                  </a:txBody>
+                  <a:tcPr/>
+                </a:tc>
+                <a:tc>
+                  <a:txBody>
+                    <a:bodyPr/>
+                    <a:lstStyle/>
+                    <a:p>
+                      <a:endParaRPr lang="es-ES" sz="1400"/>
+                    </a:p>
+                  </a:txBody>
+                  <a:tcPr/>
+                </a:tc>
+                <a:tc>
+                  <a:txBody>
+                    <a:bodyPr/>
+                    <a:lstStyle/>
+                    <a:p>
+                      <a:endParaRPr lang="es-ES" sz="1400"/>
+                    </a:p>
+                  </a:txBody>
+                  <a:tcPr/>
+                </a:tc>
+                <a:tc>
+                  <a:txBody>
+                    <a:bodyPr/>
+                    <a:lstStyle/>
+                    <a:p>
+                      <a:endParaRPr lang="es-ES" sz="1400"/>
+                    </a:p>
+                  </a:txBody>
+                  <a:tcPr/>
+                </a:tc>
+                <a:tc>
+                  <a:txBody>
+                    <a:bodyPr/>
+                    <a:lstStyle/>
+                    <a:p>
+                      <a:endParaRPr lang="es-ES" sz="1400"/>
+                    </a:p>
+                  </a:txBody>
+                  <a:tcPr/>
+                </a:tc>
+                <a:extLst>
+                  <a:ext uri="{0D108BD9-81ED-4DB2-BD59-A6C34878D82A}">
+                    <a16:rowId xmlns:a16="http://schemas.microsoft.com/office/drawing/2014/main" val="2190801058"/>
+                  </a:ext>
+                </a:extLst>
+              </a:tr>
+              <a:tr h="370840">
+                <a:tc>
+                  <a:txBody>
+                    <a:bodyPr/>
+                    <a:lstStyle/>
+                    <a:p>
+                      <a:endParaRPr lang="es-ES" sz="1400"/>
+                    </a:p>
+                  </a:txBody>
+                  <a:tcPr/>
+                </a:tc>
+                <a:tc>
+                  <a:txBody>
+                    <a:bodyPr/>
+                    <a:lstStyle/>
+                    <a:p>
+                      <a:endParaRPr lang="es-ES" sz="1400" dirty="0"/>
+                    </a:p>
+                  </a:txBody>
+                  <a:tcPr/>
+                </a:tc>
+                <a:tc>
+                  <a:txBody>
+                    <a:bodyPr/>
+                    <a:lstStyle/>
+                    <a:p>
+                      <a:endParaRPr lang="es-ES" sz="1400" dirty="0"/>
+                    </a:p>
+                  </a:txBody>
+                  <a:tcPr/>
+                </a:tc>
+                <a:tc>
+                  <a:txBody>
+                    <a:bodyPr/>
+                    <a:lstStyle/>
+                    <a:p>
+                      <a:endParaRPr lang="es-ES" sz="1400"/>
+                    </a:p>
+                  </a:txBody>
+                  <a:tcPr/>
+                </a:tc>
+                <a:tc>
+                  <a:txBody>
+                    <a:bodyPr/>
+                    <a:lstStyle/>
+                    <a:p>
+                      <a:endParaRPr lang="es-ES" sz="1400" dirty="0"/>
+                    </a:p>
+                  </a:txBody>
+                  <a:tcPr/>
+                </a:tc>
+                <a:tc>
+                  <a:txBody>
+                    <a:bodyPr/>
+                    <a:lstStyle/>
+                    <a:p>
+                      <a:r>
+                        <a:rPr lang="es-ES" sz="1400" dirty="0"/>
+                        <a:t>1</a:t>
+                      </a:r>
+                    </a:p>
+                  </a:txBody>
+                  <a:tcPr/>
+                </a:tc>
+                <a:tc>
+                  <a:txBody>
+                    <a:bodyPr/>
+                    <a:lstStyle/>
+                    <a:p>
+                      <a:endParaRPr lang="es-ES" sz="1400" dirty="0"/>
+                    </a:p>
+                  </a:txBody>
+                  <a:tcPr/>
+                </a:tc>
+                <a:tc>
+                  <a:txBody>
+                    <a:bodyPr/>
+                    <a:lstStyle/>
+                    <a:p>
+                      <a:r>
+                        <a:rPr lang="es-ES" sz="1400" dirty="0"/>
+                        <a:t>1</a:t>
+                      </a:r>
+                    </a:p>
+                  </a:txBody>
+                  <a:tcPr/>
+                </a:tc>
+                <a:tc>
+                  <a:txBody>
+                    <a:bodyPr/>
+                    <a:lstStyle/>
+                    <a:p>
+                      <a:endParaRPr lang="es-ES" sz="1400"/>
+                    </a:p>
+                  </a:txBody>
+                  <a:tcPr/>
+                </a:tc>
+                <a:tc>
+                  <a:txBody>
+                    <a:bodyPr/>
+                    <a:lstStyle/>
+                    <a:p>
+                      <a:endParaRPr lang="es-ES" sz="1400"/>
+                    </a:p>
+                  </a:txBody>
+                  <a:tcPr/>
+                </a:tc>
+                <a:tc>
+                  <a:txBody>
+                    <a:bodyPr/>
+                    <a:lstStyle/>
+                    <a:p>
+                      <a:endParaRPr lang="es-ES" sz="1400" dirty="0"/>
+                    </a:p>
+                  </a:txBody>
+                  <a:tcPr/>
+                </a:tc>
+                <a:tc>
+                  <a:txBody>
+                    <a:bodyPr/>
+                    <a:lstStyle/>
+                    <a:p>
+                      <a:endParaRPr lang="es-ES" sz="1400"/>
+                    </a:p>
+                  </a:txBody>
+                  <a:tcPr/>
+                </a:tc>
+                <a:tc>
+                  <a:txBody>
+                    <a:bodyPr/>
+                    <a:lstStyle/>
+                    <a:p>
+                      <a:endParaRPr lang="es-ES" sz="1400"/>
+                    </a:p>
+                  </a:txBody>
+                  <a:tcPr/>
+                </a:tc>
+                <a:tc>
+                  <a:txBody>
+                    <a:bodyPr/>
+                    <a:lstStyle/>
+                    <a:p>
+                      <a:endParaRPr lang="es-ES" sz="1400"/>
+                    </a:p>
+                  </a:txBody>
+                  <a:tcPr/>
+                </a:tc>
+                <a:extLst>
+                  <a:ext uri="{0D108BD9-81ED-4DB2-BD59-A6C34878D82A}">
+                    <a16:rowId xmlns:a16="http://schemas.microsoft.com/office/drawing/2014/main" val="1701332798"/>
+                  </a:ext>
+                </a:extLst>
+              </a:tr>
+              <a:tr h="370840">
+                <a:tc>
+                  <a:txBody>
+                    <a:bodyPr/>
+                    <a:lstStyle/>
+                    <a:p>
+                      <a:endParaRPr lang="es-ES" sz="1400" dirty="0"/>
+                    </a:p>
+                  </a:txBody>
+                  <a:tcPr/>
+                </a:tc>
+                <a:tc>
+                  <a:txBody>
+                    <a:bodyPr/>
+                    <a:lstStyle/>
+                    <a:p>
+                      <a:endParaRPr lang="es-ES" sz="1400" dirty="0"/>
+                    </a:p>
+                  </a:txBody>
+                  <a:tcPr/>
+                </a:tc>
+                <a:tc>
+                  <a:txBody>
+                    <a:bodyPr/>
+                    <a:lstStyle/>
+                    <a:p>
+                      <a:endParaRPr lang="es-ES" sz="1400" dirty="0"/>
+                    </a:p>
+                  </a:txBody>
+                  <a:tcPr/>
+                </a:tc>
+                <a:tc>
+                  <a:txBody>
+                    <a:bodyPr/>
+                    <a:lstStyle/>
+                    <a:p>
+                      <a:endParaRPr lang="es-ES" sz="1400" dirty="0"/>
+                    </a:p>
+                  </a:txBody>
+                  <a:tcPr/>
+                </a:tc>
+                <a:tc>
+                  <a:txBody>
+                    <a:bodyPr/>
+                    <a:lstStyle/>
+                    <a:p>
+                      <a:r>
+                        <a:rPr lang="es-ES" sz="1400" dirty="0"/>
+                        <a:t>D20x</a:t>
+                      </a:r>
+                    </a:p>
+                  </a:txBody>
+                  <a:tcPr/>
+                </a:tc>
+                <a:tc>
+                  <a:txBody>
+                    <a:bodyPr/>
+                    <a:lstStyle/>
+                    <a:p>
+                      <a:r>
+                        <a:rPr lang="es-ES" sz="1400" dirty="0"/>
+                        <a:t>D20y</a:t>
+                      </a:r>
+                    </a:p>
+                  </a:txBody>
+                  <a:tcPr/>
+                </a:tc>
+                <a:tc>
+                  <a:txBody>
+                    <a:bodyPr/>
+                    <a:lstStyle/>
+                    <a:p>
+                      <a:r>
+                        <a:rPr lang="es-ES" sz="1400" dirty="0"/>
+                        <a:t>D21x</a:t>
+                      </a:r>
+                    </a:p>
+                  </a:txBody>
+                  <a:tcPr/>
+                </a:tc>
+                <a:tc>
+                  <a:txBody>
+                    <a:bodyPr/>
+                    <a:lstStyle/>
+                    <a:p>
+                      <a:r>
+                        <a:rPr lang="es-ES" sz="1400" dirty="0"/>
+                        <a:t>D21y</a:t>
+                      </a:r>
+                    </a:p>
+                  </a:txBody>
+                  <a:tcPr/>
+                </a:tc>
+                <a:tc>
+                  <a:txBody>
+                    <a:bodyPr/>
+                    <a:lstStyle/>
+                    <a:p>
+                      <a:endParaRPr lang="es-ES" sz="1400" dirty="0"/>
+                    </a:p>
+                  </a:txBody>
+                  <a:tcPr/>
+                </a:tc>
+                <a:tc>
+                  <a:txBody>
+                    <a:bodyPr/>
+                    <a:lstStyle/>
+                    <a:p>
+                      <a:endParaRPr lang="es-ES" sz="1400" dirty="0"/>
+                    </a:p>
+                  </a:txBody>
+                  <a:tcPr/>
+                </a:tc>
+                <a:tc>
+                  <a:txBody>
+                    <a:bodyPr/>
+                    <a:lstStyle/>
+                    <a:p>
+                      <a:endParaRPr lang="es-ES" sz="1400" dirty="0"/>
+                    </a:p>
+                  </a:txBody>
+                  <a:tcPr/>
+                </a:tc>
+                <a:tc>
+                  <a:txBody>
+                    <a:bodyPr/>
+                    <a:lstStyle/>
+                    <a:p>
+                      <a:endParaRPr lang="es-ES" sz="1400" dirty="0"/>
+                    </a:p>
+                  </a:txBody>
+                  <a:tcPr/>
+                </a:tc>
+                <a:tc>
+                  <a:txBody>
+                    <a:bodyPr/>
+                    <a:lstStyle/>
+                    <a:p>
+                      <a:endParaRPr lang="es-ES" sz="1400" dirty="0"/>
+                    </a:p>
+                  </a:txBody>
+                  <a:tcPr/>
+                </a:tc>
+                <a:tc>
+                  <a:txBody>
+                    <a:bodyPr/>
+                    <a:lstStyle/>
+                    <a:p>
+                      <a:endParaRPr lang="es-ES" sz="1400" dirty="0"/>
+                    </a:p>
+                  </a:txBody>
+                  <a:tcPr/>
+                </a:tc>
+                <a:extLst>
+                  <a:ext uri="{0D108BD9-81ED-4DB2-BD59-A6C34878D82A}">
+                    <a16:rowId xmlns:a16="http://schemas.microsoft.com/office/drawing/2014/main" val="4097203178"/>
+                  </a:ext>
+                </a:extLst>
+              </a:tr>
+              <a:tr h="370840">
+                <a:tc>
+                  <a:txBody>
+                    <a:bodyPr/>
+                    <a:lstStyle/>
+                    <a:p>
+                      <a:endParaRPr lang="es-ES" sz="1400" dirty="0"/>
+                    </a:p>
+                  </a:txBody>
+                  <a:tcPr/>
+                </a:tc>
+                <a:tc>
+                  <a:txBody>
+                    <a:bodyPr/>
+                    <a:lstStyle/>
+                    <a:p>
+                      <a:endParaRPr lang="es-ES" sz="1400" dirty="0"/>
+                    </a:p>
+                  </a:txBody>
+                  <a:tcPr/>
+                </a:tc>
+                <a:tc>
+                  <a:txBody>
+                    <a:bodyPr/>
+                    <a:lstStyle/>
+                    <a:p>
+                      <a:endParaRPr lang="es-ES" sz="1400" dirty="0"/>
+                    </a:p>
+                  </a:txBody>
+                  <a:tcPr/>
+                </a:tc>
+                <a:tc>
+                  <a:txBody>
+                    <a:bodyPr/>
+                    <a:lstStyle/>
+                    <a:p>
+                      <a:endParaRPr lang="es-ES" sz="1400" dirty="0"/>
+                    </a:p>
+                  </a:txBody>
+                  <a:tcPr/>
+                </a:tc>
+                <a:tc>
+                  <a:txBody>
+                    <a:bodyPr/>
+                    <a:lstStyle/>
+                    <a:p>
+                      <a:endParaRPr lang="es-ES" sz="1400" dirty="0"/>
+                    </a:p>
+                  </a:txBody>
+                  <a:tcPr/>
+                </a:tc>
+                <a:tc>
+                  <a:txBody>
+                    <a:bodyPr/>
+                    <a:lstStyle/>
+                    <a:p>
+                      <a:endParaRPr lang="es-ES" sz="1400" dirty="0"/>
+                    </a:p>
+                  </a:txBody>
+                  <a:tcPr/>
+                </a:tc>
+                <a:tc>
+                  <a:txBody>
+                    <a:bodyPr/>
+                    <a:lstStyle/>
+                    <a:p>
+                      <a:endParaRPr lang="es-ES" sz="1400" dirty="0"/>
+                    </a:p>
+                  </a:txBody>
+                  <a:tcPr/>
+                </a:tc>
+                <a:tc>
+                  <a:txBody>
+                    <a:bodyPr/>
+                    <a:lstStyle/>
+                    <a:p>
+                      <a:endParaRPr lang="es-ES" sz="1400" dirty="0"/>
+                    </a:p>
+                  </a:txBody>
+                  <a:tcPr/>
+                </a:tc>
+                <a:tc>
+                  <a:txBody>
+                    <a:bodyPr/>
+                    <a:lstStyle/>
+                    <a:p>
+                      <a:r>
+                        <a:rPr lang="es-ES" sz="1400" dirty="0"/>
+                        <a:t>1</a:t>
+                      </a:r>
+                    </a:p>
+                  </a:txBody>
+                  <a:tcPr/>
+                </a:tc>
+                <a:tc>
+                  <a:txBody>
+                    <a:bodyPr/>
+                    <a:lstStyle/>
+                    <a:p>
+                      <a:endParaRPr lang="es-ES" sz="1400" dirty="0"/>
+                    </a:p>
+                  </a:txBody>
+                  <a:tcPr/>
+                </a:tc>
+                <a:tc>
+                  <a:txBody>
+                    <a:bodyPr/>
+                    <a:lstStyle/>
+                    <a:p>
+                      <a:r>
+                        <a:rPr lang="es-ES" sz="1400" dirty="0"/>
+                        <a:t>1</a:t>
+                      </a:r>
+                    </a:p>
+                  </a:txBody>
+                  <a:tcPr/>
+                </a:tc>
+                <a:tc>
+                  <a:txBody>
+                    <a:bodyPr/>
+                    <a:lstStyle/>
+                    <a:p>
+                      <a:endParaRPr lang="es-ES" sz="1400"/>
+                    </a:p>
+                  </a:txBody>
+                  <a:tcPr/>
+                </a:tc>
+                <a:tc>
+                  <a:txBody>
+                    <a:bodyPr/>
+                    <a:lstStyle/>
+                    <a:p>
+                      <a:r>
+                        <a:rPr lang="es-ES" sz="1400" dirty="0"/>
+                        <a:t>1</a:t>
+                      </a:r>
+                    </a:p>
+                  </a:txBody>
+                  <a:tcPr/>
+                </a:tc>
+                <a:tc>
+                  <a:txBody>
+                    <a:bodyPr/>
+                    <a:lstStyle/>
+                    <a:p>
+                      <a:endParaRPr lang="es-ES" sz="1400"/>
+                    </a:p>
+                  </a:txBody>
+                  <a:tcPr/>
+                </a:tc>
+                <a:extLst>
+                  <a:ext uri="{0D108BD9-81ED-4DB2-BD59-A6C34878D82A}">
+                    <a16:rowId xmlns:a16="http://schemas.microsoft.com/office/drawing/2014/main" val="4026735779"/>
+                  </a:ext>
+                </a:extLst>
+              </a:tr>
+              <a:tr h="370840">
+                <a:tc>
+                  <a:txBody>
+                    <a:bodyPr/>
+                    <a:lstStyle/>
+                    <a:p>
+                      <a:endParaRPr lang="es-ES" sz="1400"/>
+                    </a:p>
+                  </a:txBody>
+                  <a:tcPr/>
+                </a:tc>
+                <a:tc>
+                  <a:txBody>
+                    <a:bodyPr/>
+                    <a:lstStyle/>
+                    <a:p>
+                      <a:endParaRPr lang="es-ES" sz="1400"/>
+                    </a:p>
+                  </a:txBody>
+                  <a:tcPr/>
+                </a:tc>
+                <a:tc>
+                  <a:txBody>
+                    <a:bodyPr/>
+                    <a:lstStyle/>
+                    <a:p>
+                      <a:endParaRPr lang="es-ES" sz="1400"/>
+                    </a:p>
+                  </a:txBody>
+                  <a:tcPr/>
+                </a:tc>
+                <a:tc>
+                  <a:txBody>
+                    <a:bodyPr/>
+                    <a:lstStyle/>
+                    <a:p>
+                      <a:endParaRPr lang="es-ES" sz="1400"/>
+                    </a:p>
+                  </a:txBody>
+                  <a:tcPr/>
+                </a:tc>
+                <a:tc>
+                  <a:txBody>
+                    <a:bodyPr/>
+                    <a:lstStyle/>
+                    <a:p>
+                      <a:endParaRPr lang="es-ES" sz="1400"/>
+                    </a:p>
+                  </a:txBody>
+                  <a:tcPr/>
+                </a:tc>
+                <a:tc>
+                  <a:txBody>
+                    <a:bodyPr/>
+                    <a:lstStyle/>
+                    <a:p>
+                      <a:endParaRPr lang="es-ES" sz="1400"/>
+                    </a:p>
+                  </a:txBody>
+                  <a:tcPr/>
+                </a:tc>
+                <a:tc>
+                  <a:txBody>
+                    <a:bodyPr/>
+                    <a:lstStyle/>
+                    <a:p>
+                      <a:endParaRPr lang="es-ES" sz="1400"/>
+                    </a:p>
+                  </a:txBody>
+                  <a:tcPr/>
+                </a:tc>
+                <a:tc>
+                  <a:txBody>
+                    <a:bodyPr/>
+                    <a:lstStyle/>
+                    <a:p>
+                      <a:endParaRPr lang="es-ES" sz="1400"/>
+                    </a:p>
+                  </a:txBody>
+                  <a:tcPr/>
+                </a:tc>
+                <a:tc>
+                  <a:txBody>
+                    <a:bodyPr/>
+                    <a:lstStyle/>
+                    <a:p>
+                      <a:endParaRPr lang="es-ES" sz="1400"/>
+                    </a:p>
+                  </a:txBody>
+                  <a:tcPr/>
+                </a:tc>
+                <a:tc>
+                  <a:txBody>
+                    <a:bodyPr/>
+                    <a:lstStyle/>
+                    <a:p>
+                      <a:r>
+                        <a:rPr lang="es-ES" sz="1400" dirty="0"/>
+                        <a:t>1</a:t>
+                      </a:r>
+                    </a:p>
+                  </a:txBody>
+                  <a:tcPr/>
+                </a:tc>
+                <a:tc>
+                  <a:txBody>
+                    <a:bodyPr/>
+                    <a:lstStyle/>
+                    <a:p>
+                      <a:endParaRPr lang="es-ES" sz="1400" dirty="0"/>
+                    </a:p>
+                  </a:txBody>
+                  <a:tcPr/>
+                </a:tc>
+                <a:tc>
+                  <a:txBody>
+                    <a:bodyPr/>
+                    <a:lstStyle/>
+                    <a:p>
+                      <a:r>
+                        <a:rPr lang="es-ES" sz="1400" dirty="0"/>
+                        <a:t>1</a:t>
+                      </a:r>
+                    </a:p>
+                  </a:txBody>
+                  <a:tcPr/>
+                </a:tc>
+                <a:tc>
+                  <a:txBody>
+                    <a:bodyPr/>
+                    <a:lstStyle/>
+                    <a:p>
+                      <a:endParaRPr lang="es-ES" sz="1400"/>
+                    </a:p>
+                  </a:txBody>
+                  <a:tcPr/>
+                </a:tc>
+                <a:tc>
+                  <a:txBody>
+                    <a:bodyPr/>
+                    <a:lstStyle/>
+                    <a:p>
+                      <a:r>
+                        <a:rPr lang="es-ES" sz="1400" dirty="0"/>
+                        <a:t>1</a:t>
+                      </a:r>
+                    </a:p>
+                  </a:txBody>
+                  <a:tcPr/>
+                </a:tc>
+                <a:extLst>
+                  <a:ext uri="{0D108BD9-81ED-4DB2-BD59-A6C34878D82A}">
+                    <a16:rowId xmlns:a16="http://schemas.microsoft.com/office/drawing/2014/main" val="2297893506"/>
+                  </a:ext>
+                </a:extLst>
+              </a:tr>
+              <a:tr h="370840">
+                <a:tc>
+                  <a:txBody>
+                    <a:bodyPr/>
+                    <a:lstStyle/>
+                    <a:p>
+                      <a:endParaRPr lang="es-ES" sz="1400"/>
+                    </a:p>
+                  </a:txBody>
+                  <a:tcPr/>
+                </a:tc>
+                <a:tc>
+                  <a:txBody>
+                    <a:bodyPr/>
+                    <a:lstStyle/>
+                    <a:p>
+                      <a:endParaRPr lang="es-ES" sz="1400"/>
+                    </a:p>
+                  </a:txBody>
+                  <a:tcPr/>
+                </a:tc>
+                <a:tc>
+                  <a:txBody>
+                    <a:bodyPr/>
+                    <a:lstStyle/>
+                    <a:p>
+                      <a:endParaRPr lang="es-ES" sz="1400"/>
+                    </a:p>
+                  </a:txBody>
+                  <a:tcPr/>
+                </a:tc>
+                <a:tc>
+                  <a:txBody>
+                    <a:bodyPr/>
+                    <a:lstStyle/>
+                    <a:p>
+                      <a:endParaRPr lang="es-ES" sz="1400"/>
+                    </a:p>
+                  </a:txBody>
+                  <a:tcPr/>
+                </a:tc>
+                <a:tc>
+                  <a:txBody>
+                    <a:bodyPr/>
+                    <a:lstStyle/>
+                    <a:p>
+                      <a:endParaRPr lang="es-ES" sz="1400" dirty="0"/>
+                    </a:p>
+                  </a:txBody>
+                  <a:tcPr/>
+                </a:tc>
+                <a:tc>
+                  <a:txBody>
+                    <a:bodyPr/>
+                    <a:lstStyle/>
+                    <a:p>
+                      <a:endParaRPr lang="es-ES" sz="1400"/>
+                    </a:p>
+                  </a:txBody>
+                  <a:tcPr/>
+                </a:tc>
+                <a:tc>
+                  <a:txBody>
+                    <a:bodyPr/>
+                    <a:lstStyle/>
+                    <a:p>
+                      <a:endParaRPr lang="es-ES" sz="1400"/>
+                    </a:p>
+                  </a:txBody>
+                  <a:tcPr/>
+                </a:tc>
+                <a:tc>
+                  <a:txBody>
+                    <a:bodyPr/>
+                    <a:lstStyle/>
+                    <a:p>
+                      <a:endParaRPr lang="es-ES" sz="1400"/>
+                    </a:p>
+                  </a:txBody>
+                  <a:tcPr/>
+                </a:tc>
+                <a:tc>
+                  <a:txBody>
+                    <a:bodyPr/>
+                    <a:lstStyle/>
+                    <a:p>
+                      <a:r>
+                        <a:rPr lang="es-ES" sz="1400" dirty="0"/>
+                        <a:t>D30x</a:t>
+                      </a:r>
+                    </a:p>
+                  </a:txBody>
+                  <a:tcPr/>
+                </a:tc>
+                <a:tc>
+                  <a:txBody>
+                    <a:bodyPr/>
+                    <a:lstStyle/>
+                    <a:p>
+                      <a:r>
+                        <a:rPr lang="es-ES" sz="1400" dirty="0"/>
+                        <a:t>D30y</a:t>
+                      </a:r>
+                    </a:p>
+                  </a:txBody>
+                  <a:tcPr/>
+                </a:tc>
+                <a:tc>
+                  <a:txBody>
+                    <a:bodyPr/>
+                    <a:lstStyle/>
+                    <a:p>
+                      <a:r>
+                        <a:rPr lang="es-ES" sz="1400" dirty="0"/>
+                        <a:t>D31x</a:t>
+                      </a:r>
+                    </a:p>
+                  </a:txBody>
+                  <a:tcPr/>
+                </a:tc>
+                <a:tc>
+                  <a:txBody>
+                    <a:bodyPr/>
+                    <a:lstStyle/>
+                    <a:p>
+                      <a:r>
+                        <a:rPr lang="es-ES" sz="1400" dirty="0"/>
+                        <a:t>D31y</a:t>
+                      </a:r>
+                    </a:p>
+                  </a:txBody>
+                  <a:tcPr/>
+                </a:tc>
+                <a:tc>
+                  <a:txBody>
+                    <a:bodyPr/>
+                    <a:lstStyle/>
+                    <a:p>
+                      <a:r>
+                        <a:rPr lang="es-ES" sz="1400" dirty="0" err="1"/>
+                        <a:t>DFx</a:t>
+                      </a:r>
+                      <a:endParaRPr lang="es-ES" sz="1400" dirty="0"/>
+                    </a:p>
+                  </a:txBody>
+                  <a:tcPr/>
+                </a:tc>
+                <a:tc>
+                  <a:txBody>
+                    <a:bodyPr/>
+                    <a:lstStyle/>
+                    <a:p>
+                      <a:r>
+                        <a:rPr lang="es-ES" sz="1400" dirty="0" err="1"/>
+                        <a:t>DFy</a:t>
+                      </a:r>
+                      <a:endParaRPr lang="es-ES" sz="1400" dirty="0"/>
+                    </a:p>
+                  </a:txBody>
+                  <a:tcPr/>
+                </a:tc>
+                <a:extLst>
+                  <a:ext uri="{0D108BD9-81ED-4DB2-BD59-A6C34878D82A}">
+                    <a16:rowId xmlns:a16="http://schemas.microsoft.com/office/drawing/2014/main" val="2443185245"/>
+                  </a:ext>
+                </a:extLst>
+              </a:tr>
+            </a:tbl>
+          </a:graphicData>
+        </a:graphic>
+      </p:graphicFrame>
+      <p:graphicFrame>
+        <p:nvGraphicFramePr>
+          <p:cNvPr id="35" name="Tabla 35">
+            <a:extLst>
+              <a:ext uri="{FF2B5EF4-FFF2-40B4-BE49-F238E27FC236}">
+                <a16:creationId xmlns:a16="http://schemas.microsoft.com/office/drawing/2014/main" id="{54BE5B2E-0FC3-4E53-ACBF-1499E7399E79}"/>
+              </a:ext>
+            </a:extLst>
+          </p:cNvPr>
+          <p:cNvGraphicFramePr>
+            <a:graphicFrameLocks noGrp="1"/>
+          </p:cNvGraphicFramePr>
+          <p:nvPr>
+            <p:extLst>
+              <p:ext uri="{D42A27DB-BD31-4B8C-83A1-F6EECF244321}">
+                <p14:modId xmlns:p14="http://schemas.microsoft.com/office/powerpoint/2010/main" val="2005989826"/>
+              </p:ext>
+            </p:extLst>
+          </p:nvPr>
+        </p:nvGraphicFramePr>
+        <p:xfrm>
+          <a:off x="10383839" y="647302"/>
+          <a:ext cx="1324855" cy="4820920"/>
+        </p:xfrm>
+        <a:graphic>
+          <a:graphicData uri="http://schemas.openxmlformats.org/drawingml/2006/table">
+            <a:tbl>
+              <a:tblPr firstRow="1" bandRow="1">
+                <a:tableStyleId>{5C22544A-7EE6-4342-B048-85BDC9FD1C3A}</a:tableStyleId>
+              </a:tblPr>
+              <a:tblGrid>
+                <a:gridCol w="1324855">
+                  <a:extLst>
+                    <a:ext uri="{9D8B030D-6E8A-4147-A177-3AD203B41FA5}">
+                      <a16:colId xmlns:a16="http://schemas.microsoft.com/office/drawing/2014/main" val="4061508628"/>
+                    </a:ext>
+                  </a:extLst>
+                </a:gridCol>
+              </a:tblGrid>
+              <a:tr h="370840">
+                <a:tc>
+                  <a:txBody>
+                    <a:bodyPr/>
+                    <a:lstStyle/>
+                    <a:p>
+                      <a:pPr marL="0" marR="0" lvl="0" indent="0" algn="l" defTabSz="914400" rtl="0" eaLnBrk="1" fontAlgn="auto" latinLnBrk="0" hangingPunct="1">
+                        <a:lnSpc>
+                          <a:spcPct val="100000"/>
+                        </a:lnSpc>
+                        <a:spcBef>
+                          <a:spcPts val="0"/>
+                        </a:spcBef>
+                        <a:spcAft>
+                          <a:spcPts val="0"/>
+                        </a:spcAft>
+                        <a:buClrTx/>
+                        <a:buSzTx/>
+                        <a:buFontTx/>
+                        <a:buNone/>
+                        <a:tabLst/>
+                        <a:defRPr/>
+                      </a:pPr>
+                      <a:r>
+                        <a:rPr lang="es-ES" dirty="0">
+                          <a:latin typeface="+mn-lt"/>
+                        </a:rPr>
+                        <a:t>0</a:t>
+                      </a:r>
+                    </a:p>
+                  </a:txBody>
+                  <a:tcPr/>
+                </a:tc>
+                <a:extLst>
+                  <a:ext uri="{0D108BD9-81ED-4DB2-BD59-A6C34878D82A}">
+                    <a16:rowId xmlns:a16="http://schemas.microsoft.com/office/drawing/2014/main" val="1538733710"/>
+                  </a:ext>
+                </a:extLst>
+              </a:tr>
+              <a:tr h="370840">
+                <a:tc>
+                  <a:txBody>
+                    <a:bodyPr/>
+                    <a:lstStyle/>
+                    <a:p>
+                      <a:pPr marL="0" marR="0" lvl="0" indent="0" algn="l" defTabSz="914400" rtl="0" eaLnBrk="1" fontAlgn="auto" latinLnBrk="0" hangingPunct="1">
+                        <a:lnSpc>
+                          <a:spcPct val="100000"/>
+                        </a:lnSpc>
+                        <a:spcBef>
+                          <a:spcPts val="0"/>
+                        </a:spcBef>
+                        <a:spcAft>
+                          <a:spcPts val="0"/>
+                        </a:spcAft>
+                        <a:buClrTx/>
+                        <a:buSzTx/>
+                        <a:buFontTx/>
+                        <a:buNone/>
+                        <a:tabLst/>
+                        <a:defRPr/>
+                      </a:pPr>
+                      <a:r>
+                        <a:rPr lang="es-ES" dirty="0">
+                          <a:latin typeface="+mn-lt"/>
+                        </a:rPr>
+                        <a:t>0</a:t>
+                      </a:r>
+                    </a:p>
+                  </a:txBody>
+                  <a:tcPr/>
+                </a:tc>
+                <a:extLst>
+                  <a:ext uri="{0D108BD9-81ED-4DB2-BD59-A6C34878D82A}">
+                    <a16:rowId xmlns:a16="http://schemas.microsoft.com/office/drawing/2014/main" val="1613895894"/>
+                  </a:ext>
+                </a:extLst>
+              </a:tr>
+              <a:tr h="370840">
+                <a:tc>
+                  <a:txBody>
+                    <a:bodyPr/>
+                    <a:lstStyle/>
+                    <a:p>
+                      <a:pPr marL="0" marR="0" lvl="0" indent="0" algn="l" defTabSz="914400" rtl="0" eaLnBrk="1" fontAlgn="auto" latinLnBrk="0" hangingPunct="1">
+                        <a:lnSpc>
+                          <a:spcPct val="100000"/>
+                        </a:lnSpc>
+                        <a:spcBef>
+                          <a:spcPts val="0"/>
+                        </a:spcBef>
+                        <a:spcAft>
+                          <a:spcPts val="0"/>
+                        </a:spcAft>
+                        <a:buClrTx/>
+                        <a:buSzTx/>
+                        <a:buFontTx/>
+                        <a:buNone/>
+                        <a:tabLst/>
+                        <a:defRPr/>
+                      </a:pPr>
+                      <a:r>
+                        <a:rPr lang="es-ES" dirty="0">
+                          <a:latin typeface="+mn-lt"/>
+                        </a:rPr>
+                        <a:t>0</a:t>
+                      </a:r>
+                    </a:p>
+                  </a:txBody>
+                  <a:tcPr/>
+                </a:tc>
+                <a:extLst>
+                  <a:ext uri="{0D108BD9-81ED-4DB2-BD59-A6C34878D82A}">
+                    <a16:rowId xmlns:a16="http://schemas.microsoft.com/office/drawing/2014/main" val="2993283587"/>
+                  </a:ext>
+                </a:extLst>
+              </a:tr>
+              <a:tr h="370840">
+                <a:tc>
+                  <a:txBody>
+                    <a:bodyPr/>
+                    <a:lstStyle/>
+                    <a:p>
+                      <a:pPr marL="0" marR="0" lvl="0" indent="0" algn="l" defTabSz="914400" rtl="0" eaLnBrk="1" fontAlgn="auto" latinLnBrk="0" hangingPunct="1">
+                        <a:lnSpc>
+                          <a:spcPct val="100000"/>
+                        </a:lnSpc>
+                        <a:spcBef>
+                          <a:spcPts val="0"/>
+                        </a:spcBef>
+                        <a:spcAft>
+                          <a:spcPts val="0"/>
+                        </a:spcAft>
+                        <a:buClrTx/>
+                        <a:buSzTx/>
+                        <a:buFontTx/>
+                        <a:buNone/>
+                        <a:tabLst/>
+                        <a:defRPr/>
+                      </a:pPr>
+                      <a:r>
+                        <a:rPr lang="es-ES" dirty="0">
+                          <a:latin typeface="+mn-lt"/>
+                        </a:rPr>
+                        <a:t>0</a:t>
+                      </a:r>
+                    </a:p>
+                  </a:txBody>
+                  <a:tcPr/>
+                </a:tc>
+                <a:extLst>
+                  <a:ext uri="{0D108BD9-81ED-4DB2-BD59-A6C34878D82A}">
+                    <a16:rowId xmlns:a16="http://schemas.microsoft.com/office/drawing/2014/main" val="2717417063"/>
+                  </a:ext>
+                </a:extLst>
+              </a:tr>
+              <a:tr h="370840">
+                <a:tc>
+                  <a:txBody>
+                    <a:bodyPr/>
+                    <a:lstStyle/>
+                    <a:p>
+                      <a:pPr marL="0" marR="0" lvl="0" indent="0" algn="l" defTabSz="914400" rtl="0" eaLnBrk="1" fontAlgn="auto" latinLnBrk="0" hangingPunct="1">
+                        <a:lnSpc>
+                          <a:spcPct val="100000"/>
+                        </a:lnSpc>
+                        <a:spcBef>
+                          <a:spcPts val="0"/>
+                        </a:spcBef>
+                        <a:spcAft>
+                          <a:spcPts val="0"/>
+                        </a:spcAft>
+                        <a:buClrTx/>
+                        <a:buSzTx/>
+                        <a:buFontTx/>
+                        <a:buNone/>
+                        <a:tabLst/>
+                        <a:defRPr/>
+                      </a:pPr>
+                      <a:r>
+                        <a:rPr lang="es-ES" dirty="0">
+                          <a:latin typeface="Symbol" panose="05050102010706020507" pitchFamily="18" charset="2"/>
+                        </a:rPr>
+                        <a:t>S</a:t>
+                      </a:r>
+                      <a:r>
+                        <a:rPr lang="es-ES" dirty="0">
+                          <a:latin typeface="+mn-lt"/>
+                        </a:rPr>
+                        <a:t>F1x</a:t>
+                      </a:r>
+                    </a:p>
+                  </a:txBody>
+                  <a:tcPr/>
+                </a:tc>
+                <a:extLst>
+                  <a:ext uri="{0D108BD9-81ED-4DB2-BD59-A6C34878D82A}">
+                    <a16:rowId xmlns:a16="http://schemas.microsoft.com/office/drawing/2014/main" val="3003199954"/>
+                  </a:ext>
+                </a:extLst>
+              </a:tr>
+              <a:tr h="370840">
+                <a:tc>
+                  <a:txBody>
+                    <a:bodyPr/>
+                    <a:lstStyle/>
+                    <a:p>
+                      <a:pPr marL="0" marR="0" lvl="0" indent="0" algn="l" defTabSz="914400" rtl="0" eaLnBrk="1" fontAlgn="auto" latinLnBrk="0" hangingPunct="1">
+                        <a:lnSpc>
+                          <a:spcPct val="100000"/>
+                        </a:lnSpc>
+                        <a:spcBef>
+                          <a:spcPts val="0"/>
+                        </a:spcBef>
+                        <a:spcAft>
+                          <a:spcPts val="0"/>
+                        </a:spcAft>
+                        <a:buClrTx/>
+                        <a:buSzTx/>
+                        <a:buFontTx/>
+                        <a:buNone/>
+                        <a:tabLst/>
+                        <a:defRPr/>
+                      </a:pPr>
+                      <a:r>
+                        <a:rPr lang="es-ES" dirty="0">
+                          <a:latin typeface="Symbol" panose="05050102010706020507" pitchFamily="18" charset="2"/>
+                        </a:rPr>
+                        <a:t>S</a:t>
+                      </a:r>
+                      <a:r>
+                        <a:rPr lang="es-ES" dirty="0">
+                          <a:latin typeface="+mn-lt"/>
+                        </a:rPr>
+                        <a:t>F1y </a:t>
+                      </a:r>
+                    </a:p>
+                  </a:txBody>
+                  <a:tcPr/>
+                </a:tc>
+                <a:extLst>
+                  <a:ext uri="{0D108BD9-81ED-4DB2-BD59-A6C34878D82A}">
+                    <a16:rowId xmlns:a16="http://schemas.microsoft.com/office/drawing/2014/main" val="2974698283"/>
+                  </a:ext>
+                </a:extLst>
+              </a:tr>
+              <a:tr h="370840">
+                <a:tc>
+                  <a:txBody>
+                    <a:bodyPr/>
+                    <a:lstStyle/>
+                    <a:p>
+                      <a:pPr marL="0" marR="0" lvl="0" indent="0" algn="l" defTabSz="914400" rtl="0" eaLnBrk="1" fontAlgn="auto" latinLnBrk="0" hangingPunct="1">
+                        <a:lnSpc>
+                          <a:spcPct val="100000"/>
+                        </a:lnSpc>
+                        <a:spcBef>
+                          <a:spcPts val="0"/>
+                        </a:spcBef>
+                        <a:spcAft>
+                          <a:spcPts val="0"/>
+                        </a:spcAft>
+                        <a:buClrTx/>
+                        <a:buSzTx/>
+                        <a:buFontTx/>
+                        <a:buNone/>
+                        <a:tabLst/>
+                        <a:defRPr/>
+                      </a:pPr>
+                      <a:r>
+                        <a:rPr lang="es-ES" dirty="0">
+                          <a:latin typeface="Symbol" panose="05050102010706020507" pitchFamily="18" charset="2"/>
+                        </a:rPr>
+                        <a:t>S</a:t>
+                      </a:r>
+                      <a:r>
+                        <a:rPr lang="es-ES" dirty="0">
+                          <a:latin typeface="+mn-lt"/>
+                        </a:rPr>
+                        <a:t>M1</a:t>
+                      </a:r>
+                    </a:p>
+                  </a:txBody>
+                  <a:tcPr/>
+                </a:tc>
+                <a:extLst>
+                  <a:ext uri="{0D108BD9-81ED-4DB2-BD59-A6C34878D82A}">
+                    <a16:rowId xmlns:a16="http://schemas.microsoft.com/office/drawing/2014/main" val="943862094"/>
+                  </a:ext>
+                </a:extLst>
+              </a:tr>
+              <a:tr h="370840">
+                <a:tc>
+                  <a:txBody>
+                    <a:bodyPr/>
+                    <a:lstStyle/>
+                    <a:p>
+                      <a:pPr marL="0" marR="0" lvl="0" indent="0" algn="l" defTabSz="914400" rtl="0" eaLnBrk="1" fontAlgn="auto" latinLnBrk="0" hangingPunct="1">
+                        <a:lnSpc>
+                          <a:spcPct val="100000"/>
+                        </a:lnSpc>
+                        <a:spcBef>
+                          <a:spcPts val="0"/>
+                        </a:spcBef>
+                        <a:spcAft>
+                          <a:spcPts val="0"/>
+                        </a:spcAft>
+                        <a:buClrTx/>
+                        <a:buSzTx/>
+                        <a:buFontTx/>
+                        <a:buNone/>
+                        <a:tabLst/>
+                        <a:defRPr/>
+                      </a:pPr>
+                      <a:r>
+                        <a:rPr lang="es-ES" dirty="0">
+                          <a:latin typeface="Symbol" panose="05050102010706020507" pitchFamily="18" charset="2"/>
+                        </a:rPr>
+                        <a:t>S</a:t>
+                      </a:r>
+                      <a:r>
+                        <a:rPr lang="es-ES" dirty="0">
+                          <a:latin typeface="+mn-lt"/>
+                        </a:rPr>
+                        <a:t>F2x</a:t>
+                      </a:r>
+                    </a:p>
+                  </a:txBody>
+                  <a:tcPr/>
+                </a:tc>
+                <a:extLst>
+                  <a:ext uri="{0D108BD9-81ED-4DB2-BD59-A6C34878D82A}">
+                    <a16:rowId xmlns:a16="http://schemas.microsoft.com/office/drawing/2014/main" val="1694308282"/>
+                  </a:ext>
+                </a:extLst>
+              </a:tr>
+              <a:tr h="370840">
+                <a:tc>
+                  <a:txBody>
+                    <a:bodyPr/>
+                    <a:lstStyle/>
+                    <a:p>
+                      <a:pPr marL="0" marR="0" lvl="0" indent="0" algn="l" defTabSz="914400" rtl="0" eaLnBrk="1" fontAlgn="auto" latinLnBrk="0" hangingPunct="1">
+                        <a:lnSpc>
+                          <a:spcPct val="100000"/>
+                        </a:lnSpc>
+                        <a:spcBef>
+                          <a:spcPts val="0"/>
+                        </a:spcBef>
+                        <a:spcAft>
+                          <a:spcPts val="0"/>
+                        </a:spcAft>
+                        <a:buClrTx/>
+                        <a:buSzTx/>
+                        <a:buFontTx/>
+                        <a:buNone/>
+                        <a:tabLst/>
+                        <a:defRPr/>
+                      </a:pPr>
+                      <a:r>
+                        <a:rPr lang="es-ES" dirty="0">
+                          <a:latin typeface="Symbol" panose="05050102010706020507" pitchFamily="18" charset="2"/>
+                        </a:rPr>
+                        <a:t>S</a:t>
+                      </a:r>
+                      <a:r>
+                        <a:rPr lang="es-ES" dirty="0">
+                          <a:latin typeface="+mn-lt"/>
+                        </a:rPr>
+                        <a:t>F2y</a:t>
+                      </a:r>
+                    </a:p>
+                  </a:txBody>
+                  <a:tcPr/>
+                </a:tc>
+                <a:extLst>
+                  <a:ext uri="{0D108BD9-81ED-4DB2-BD59-A6C34878D82A}">
+                    <a16:rowId xmlns:a16="http://schemas.microsoft.com/office/drawing/2014/main" val="1486464064"/>
+                  </a:ext>
+                </a:extLst>
+              </a:tr>
+              <a:tr h="370840">
+                <a:tc>
+                  <a:txBody>
+                    <a:bodyPr/>
+                    <a:lstStyle/>
+                    <a:p>
+                      <a:pPr marL="0" marR="0" lvl="0" indent="0" algn="l" defTabSz="914400" rtl="0" eaLnBrk="1" fontAlgn="auto" latinLnBrk="0" hangingPunct="1">
+                        <a:lnSpc>
+                          <a:spcPct val="100000"/>
+                        </a:lnSpc>
+                        <a:spcBef>
+                          <a:spcPts val="0"/>
+                        </a:spcBef>
+                        <a:spcAft>
+                          <a:spcPts val="0"/>
+                        </a:spcAft>
+                        <a:buClrTx/>
+                        <a:buSzTx/>
+                        <a:buFontTx/>
+                        <a:buNone/>
+                        <a:tabLst/>
+                        <a:defRPr/>
+                      </a:pPr>
+                      <a:r>
+                        <a:rPr lang="es-ES" dirty="0">
+                          <a:latin typeface="Symbol" panose="05050102010706020507" pitchFamily="18" charset="2"/>
+                        </a:rPr>
+                        <a:t>S</a:t>
+                      </a:r>
+                      <a:r>
+                        <a:rPr lang="es-ES" dirty="0">
+                          <a:latin typeface="+mn-lt"/>
+                        </a:rPr>
+                        <a:t>M2</a:t>
+                      </a:r>
+                    </a:p>
+                  </a:txBody>
+                  <a:tcPr/>
+                </a:tc>
+                <a:extLst>
+                  <a:ext uri="{0D108BD9-81ED-4DB2-BD59-A6C34878D82A}">
+                    <a16:rowId xmlns:a16="http://schemas.microsoft.com/office/drawing/2014/main" val="630976605"/>
+                  </a:ext>
+                </a:extLst>
+              </a:tr>
+              <a:tr h="370840">
+                <a:tc>
+                  <a:txBody>
+                    <a:bodyPr/>
+                    <a:lstStyle/>
+                    <a:p>
+                      <a:pPr marL="0" marR="0" lvl="0" indent="0" algn="l" defTabSz="914400" rtl="0" eaLnBrk="1" fontAlgn="auto" latinLnBrk="0" hangingPunct="1">
+                        <a:lnSpc>
+                          <a:spcPct val="100000"/>
+                        </a:lnSpc>
+                        <a:spcBef>
+                          <a:spcPts val="0"/>
+                        </a:spcBef>
+                        <a:spcAft>
+                          <a:spcPts val="0"/>
+                        </a:spcAft>
+                        <a:buClrTx/>
+                        <a:buSzTx/>
+                        <a:buFontTx/>
+                        <a:buNone/>
+                        <a:tabLst/>
+                        <a:defRPr/>
+                      </a:pPr>
+                      <a:r>
+                        <a:rPr lang="es-ES" dirty="0">
+                          <a:latin typeface="Symbol" panose="05050102010706020507" pitchFamily="18" charset="2"/>
+                        </a:rPr>
+                        <a:t>S</a:t>
+                      </a:r>
+                      <a:r>
+                        <a:rPr lang="es-ES" dirty="0">
+                          <a:latin typeface="+mn-lt"/>
+                        </a:rPr>
+                        <a:t>F3x</a:t>
+                      </a:r>
+                    </a:p>
+                  </a:txBody>
+                  <a:tcPr/>
+                </a:tc>
+                <a:extLst>
+                  <a:ext uri="{0D108BD9-81ED-4DB2-BD59-A6C34878D82A}">
+                    <a16:rowId xmlns:a16="http://schemas.microsoft.com/office/drawing/2014/main" val="3510122983"/>
+                  </a:ext>
+                </a:extLst>
+              </a:tr>
+              <a:tr h="370840">
+                <a:tc>
+                  <a:txBody>
+                    <a:bodyPr/>
+                    <a:lstStyle/>
+                    <a:p>
+                      <a:pPr marL="0" marR="0" lvl="0" indent="0" algn="l" defTabSz="914400" rtl="0" eaLnBrk="1" fontAlgn="auto" latinLnBrk="0" hangingPunct="1">
+                        <a:lnSpc>
+                          <a:spcPct val="100000"/>
+                        </a:lnSpc>
+                        <a:spcBef>
+                          <a:spcPts val="0"/>
+                        </a:spcBef>
+                        <a:spcAft>
+                          <a:spcPts val="0"/>
+                        </a:spcAft>
+                        <a:buClrTx/>
+                        <a:buSzTx/>
+                        <a:buFontTx/>
+                        <a:buNone/>
+                        <a:tabLst/>
+                        <a:defRPr/>
+                      </a:pPr>
+                      <a:r>
+                        <a:rPr lang="es-ES" dirty="0">
+                          <a:latin typeface="Symbol" panose="05050102010706020507" pitchFamily="18" charset="2"/>
+                        </a:rPr>
+                        <a:t>S</a:t>
+                      </a:r>
+                      <a:r>
+                        <a:rPr lang="es-ES" dirty="0">
+                          <a:latin typeface="+mn-lt"/>
+                        </a:rPr>
+                        <a:t>F3y</a:t>
+                      </a:r>
+                    </a:p>
+                  </a:txBody>
+                  <a:tcPr/>
+                </a:tc>
+                <a:extLst>
+                  <a:ext uri="{0D108BD9-81ED-4DB2-BD59-A6C34878D82A}">
+                    <a16:rowId xmlns:a16="http://schemas.microsoft.com/office/drawing/2014/main" val="2227072566"/>
+                  </a:ext>
+                </a:extLst>
+              </a:tr>
+              <a:tr h="370840">
+                <a:tc>
+                  <a:txBody>
+                    <a:bodyPr/>
+                    <a:lstStyle/>
+                    <a:p>
+                      <a:pPr marL="0" marR="0" lvl="0" indent="0" algn="l" defTabSz="914400" rtl="0" eaLnBrk="1" fontAlgn="auto" latinLnBrk="0" hangingPunct="1">
+                        <a:lnSpc>
+                          <a:spcPct val="100000"/>
+                        </a:lnSpc>
+                        <a:spcBef>
+                          <a:spcPts val="0"/>
+                        </a:spcBef>
+                        <a:spcAft>
+                          <a:spcPts val="0"/>
+                        </a:spcAft>
+                        <a:buClrTx/>
+                        <a:buSzTx/>
+                        <a:buFontTx/>
+                        <a:buNone/>
+                        <a:tabLst/>
+                        <a:defRPr/>
+                      </a:pPr>
+                      <a:r>
+                        <a:rPr lang="es-ES" dirty="0">
+                          <a:latin typeface="Symbol" panose="05050102010706020507" pitchFamily="18" charset="2"/>
+                        </a:rPr>
+                        <a:t>S</a:t>
+                      </a:r>
+                      <a:r>
+                        <a:rPr lang="es-ES" dirty="0">
+                          <a:latin typeface="+mn-lt"/>
+                        </a:rPr>
+                        <a:t>M3</a:t>
+                      </a:r>
+                    </a:p>
+                  </a:txBody>
+                  <a:tcPr/>
+                </a:tc>
+                <a:extLst>
+                  <a:ext uri="{0D108BD9-81ED-4DB2-BD59-A6C34878D82A}">
+                    <a16:rowId xmlns:a16="http://schemas.microsoft.com/office/drawing/2014/main" val="533945160"/>
+                  </a:ext>
+                </a:extLst>
+              </a:tr>
+            </a:tbl>
+          </a:graphicData>
+        </a:graphic>
+      </p:graphicFrame>
+      <p:graphicFrame>
+        <p:nvGraphicFramePr>
+          <p:cNvPr id="36" name="Tabla 36">
+            <a:extLst>
+              <a:ext uri="{FF2B5EF4-FFF2-40B4-BE49-F238E27FC236}">
+                <a16:creationId xmlns:a16="http://schemas.microsoft.com/office/drawing/2014/main" id="{5241B867-04D3-4437-99BC-AD8201E33003}"/>
+              </a:ext>
+            </a:extLst>
+          </p:cNvPr>
+          <p:cNvGraphicFramePr>
+            <a:graphicFrameLocks noGrp="1"/>
+          </p:cNvGraphicFramePr>
+          <p:nvPr>
+            <p:extLst>
+              <p:ext uri="{D42A27DB-BD31-4B8C-83A1-F6EECF244321}">
+                <p14:modId xmlns:p14="http://schemas.microsoft.com/office/powerpoint/2010/main" val="2438515650"/>
+              </p:ext>
+            </p:extLst>
+          </p:nvPr>
+        </p:nvGraphicFramePr>
+        <p:xfrm>
+          <a:off x="10160" y="621149"/>
+          <a:ext cx="1275876" cy="4820920"/>
+        </p:xfrm>
+        <a:graphic>
+          <a:graphicData uri="http://schemas.openxmlformats.org/drawingml/2006/table">
+            <a:tbl>
+              <a:tblPr firstRow="1" bandRow="1">
+                <a:tableStyleId>{5C22544A-7EE6-4342-B048-85BDC9FD1C3A}</a:tableStyleId>
+              </a:tblPr>
+              <a:tblGrid>
+                <a:gridCol w="1275876">
+                  <a:extLst>
+                    <a:ext uri="{9D8B030D-6E8A-4147-A177-3AD203B41FA5}">
+                      <a16:colId xmlns:a16="http://schemas.microsoft.com/office/drawing/2014/main" val="3952950136"/>
+                    </a:ext>
+                  </a:extLst>
+                </a:gridCol>
+              </a:tblGrid>
+              <a:tr h="370840">
+                <a:tc>
+                  <a:txBody>
+                    <a:bodyPr/>
+                    <a:lstStyle/>
+                    <a:p>
+                      <a:pPr marL="0" marR="0" lvl="0" indent="0" algn="l" defTabSz="914400" rtl="0" eaLnBrk="1" fontAlgn="auto" latinLnBrk="0" hangingPunct="1">
+                        <a:lnSpc>
+                          <a:spcPct val="100000"/>
+                        </a:lnSpc>
+                        <a:spcBef>
+                          <a:spcPts val="0"/>
+                        </a:spcBef>
+                        <a:spcAft>
+                          <a:spcPts val="0"/>
+                        </a:spcAft>
+                        <a:buClrTx/>
+                        <a:buSzTx/>
+                        <a:buFontTx/>
+                        <a:buNone/>
+                        <a:tabLst/>
+                        <a:defRPr/>
+                      </a:pPr>
+                      <a:r>
+                        <a:rPr lang="es-ES" sz="1800" dirty="0"/>
+                        <a:t>R30x=R11x</a:t>
+                      </a:r>
+                      <a:endParaRPr lang="es-ES" dirty="0"/>
+                    </a:p>
+                  </a:txBody>
+                  <a:tcPr/>
+                </a:tc>
+                <a:extLst>
+                  <a:ext uri="{0D108BD9-81ED-4DB2-BD59-A6C34878D82A}">
+                    <a16:rowId xmlns:a16="http://schemas.microsoft.com/office/drawing/2014/main" val="3109995344"/>
+                  </a:ext>
+                </a:extLst>
+              </a:tr>
+              <a:tr h="370840">
+                <a:tc>
+                  <a:txBody>
+                    <a:bodyPr/>
+                    <a:lstStyle/>
+                    <a:p>
+                      <a:pPr marL="0" marR="0" lvl="0" indent="0" algn="l" defTabSz="914400" rtl="0" eaLnBrk="1" fontAlgn="auto" latinLnBrk="0" hangingPunct="1">
+                        <a:lnSpc>
+                          <a:spcPct val="100000"/>
+                        </a:lnSpc>
+                        <a:spcBef>
+                          <a:spcPts val="0"/>
+                        </a:spcBef>
+                        <a:spcAft>
+                          <a:spcPts val="0"/>
+                        </a:spcAft>
+                        <a:buClrTx/>
+                        <a:buSzTx/>
+                        <a:buFontTx/>
+                        <a:buNone/>
+                        <a:tabLst/>
+                        <a:defRPr/>
+                      </a:pPr>
+                      <a:r>
+                        <a:rPr lang="es-ES" sz="1800" dirty="0"/>
+                        <a:t>R30y=R11y</a:t>
+                      </a:r>
+                      <a:endParaRPr lang="es-ES" dirty="0"/>
+                    </a:p>
+                  </a:txBody>
+                  <a:tcPr/>
+                </a:tc>
+                <a:extLst>
+                  <a:ext uri="{0D108BD9-81ED-4DB2-BD59-A6C34878D82A}">
+                    <a16:rowId xmlns:a16="http://schemas.microsoft.com/office/drawing/2014/main" val="2595269073"/>
+                  </a:ext>
+                </a:extLst>
+              </a:tr>
+              <a:tr h="370840">
+                <a:tc>
+                  <a:txBody>
+                    <a:bodyPr/>
+                    <a:lstStyle/>
+                    <a:p>
+                      <a:pPr marL="0" marR="0" lvl="0" indent="0" algn="l" defTabSz="914400" rtl="0" eaLnBrk="1" fontAlgn="auto" latinLnBrk="0" hangingPunct="1">
+                        <a:lnSpc>
+                          <a:spcPct val="100000"/>
+                        </a:lnSpc>
+                        <a:spcBef>
+                          <a:spcPts val="0"/>
+                        </a:spcBef>
+                        <a:spcAft>
+                          <a:spcPts val="0"/>
+                        </a:spcAft>
+                        <a:buClrTx/>
+                        <a:buSzTx/>
+                        <a:buFontTx/>
+                        <a:buNone/>
+                        <a:tabLst/>
+                        <a:defRPr/>
+                      </a:pPr>
+                      <a:r>
+                        <a:rPr lang="es-ES" sz="1800" dirty="0"/>
+                        <a:t>R31x=R21x</a:t>
+                      </a:r>
+                      <a:endParaRPr lang="es-ES" dirty="0"/>
+                    </a:p>
+                  </a:txBody>
+                  <a:tcPr/>
+                </a:tc>
+                <a:extLst>
+                  <a:ext uri="{0D108BD9-81ED-4DB2-BD59-A6C34878D82A}">
+                    <a16:rowId xmlns:a16="http://schemas.microsoft.com/office/drawing/2014/main" val="1438446514"/>
+                  </a:ext>
+                </a:extLst>
+              </a:tr>
+              <a:tr h="370840">
+                <a:tc>
+                  <a:txBody>
+                    <a:bodyPr/>
+                    <a:lstStyle/>
+                    <a:p>
+                      <a:pPr marL="0" marR="0" lvl="0" indent="0" algn="l" defTabSz="914400" rtl="0" eaLnBrk="1" fontAlgn="auto" latinLnBrk="0" hangingPunct="1">
+                        <a:lnSpc>
+                          <a:spcPct val="100000"/>
+                        </a:lnSpc>
+                        <a:spcBef>
+                          <a:spcPts val="0"/>
+                        </a:spcBef>
+                        <a:spcAft>
+                          <a:spcPts val="0"/>
+                        </a:spcAft>
+                        <a:buClrTx/>
+                        <a:buSzTx/>
+                        <a:buFontTx/>
+                        <a:buNone/>
+                        <a:tabLst/>
+                        <a:defRPr/>
+                      </a:pPr>
+                      <a:r>
+                        <a:rPr lang="es-ES" sz="1800" dirty="0"/>
+                        <a:t>R31y=R21y</a:t>
+                      </a:r>
+                      <a:endParaRPr lang="es-ES" dirty="0"/>
+                    </a:p>
+                  </a:txBody>
+                  <a:tcPr/>
+                </a:tc>
+                <a:extLst>
+                  <a:ext uri="{0D108BD9-81ED-4DB2-BD59-A6C34878D82A}">
+                    <a16:rowId xmlns:a16="http://schemas.microsoft.com/office/drawing/2014/main" val="2305488492"/>
+                  </a:ext>
+                </a:extLst>
+              </a:tr>
+              <a:tr h="370840">
+                <a:tc>
+                  <a:txBody>
+                    <a:bodyPr/>
+                    <a:lstStyle/>
+                    <a:p>
+                      <a:pPr marL="0" marR="0" lvl="0" indent="0" algn="l" defTabSz="914400" rtl="0" eaLnBrk="1" fontAlgn="auto" latinLnBrk="0" hangingPunct="1">
+                        <a:lnSpc>
+                          <a:spcPct val="100000"/>
+                        </a:lnSpc>
+                        <a:spcBef>
+                          <a:spcPts val="0"/>
+                        </a:spcBef>
+                        <a:spcAft>
+                          <a:spcPts val="0"/>
+                        </a:spcAft>
+                        <a:buClrTx/>
+                        <a:buSzTx/>
+                        <a:buFontTx/>
+                        <a:buNone/>
+                        <a:tabLst/>
+                        <a:defRPr/>
+                      </a:pPr>
+                      <a:r>
+                        <a:rPr lang="es-ES" dirty="0">
+                          <a:latin typeface="Symbol" panose="05050102010706020507" pitchFamily="18" charset="2"/>
+                        </a:rPr>
+                        <a:t>S</a:t>
+                      </a:r>
+                      <a:r>
+                        <a:rPr lang="es-ES" sz="1800" dirty="0">
+                          <a:latin typeface="+mn-lt"/>
+                        </a:rPr>
+                        <a:t>F1x</a:t>
+                      </a:r>
+                    </a:p>
+                  </a:txBody>
+                  <a:tcPr/>
+                </a:tc>
+                <a:extLst>
+                  <a:ext uri="{0D108BD9-81ED-4DB2-BD59-A6C34878D82A}">
+                    <a16:rowId xmlns:a16="http://schemas.microsoft.com/office/drawing/2014/main" val="1653781353"/>
+                  </a:ext>
+                </a:extLst>
+              </a:tr>
+              <a:tr h="370840">
+                <a:tc>
+                  <a:txBody>
+                    <a:bodyPr/>
+                    <a:lstStyle/>
+                    <a:p>
+                      <a:pPr marL="0" marR="0" lvl="0" indent="0" algn="l" defTabSz="914400" rtl="0" eaLnBrk="1" fontAlgn="auto" latinLnBrk="0" hangingPunct="1">
+                        <a:lnSpc>
+                          <a:spcPct val="100000"/>
+                        </a:lnSpc>
+                        <a:spcBef>
+                          <a:spcPts val="0"/>
+                        </a:spcBef>
+                        <a:spcAft>
+                          <a:spcPts val="0"/>
+                        </a:spcAft>
+                        <a:buClrTx/>
+                        <a:buSzTx/>
+                        <a:buFontTx/>
+                        <a:buNone/>
+                        <a:tabLst/>
+                        <a:defRPr/>
+                      </a:pPr>
+                      <a:r>
+                        <a:rPr lang="es-ES" dirty="0">
+                          <a:latin typeface="Symbol" panose="05050102010706020507" pitchFamily="18" charset="2"/>
+                        </a:rPr>
+                        <a:t>S</a:t>
+                      </a:r>
+                      <a:r>
+                        <a:rPr lang="es-ES" sz="1800" dirty="0">
+                          <a:latin typeface="+mn-lt"/>
+                        </a:rPr>
+                        <a:t>F1y</a:t>
+                      </a:r>
+                    </a:p>
+                  </a:txBody>
+                  <a:tcPr/>
+                </a:tc>
+                <a:extLst>
+                  <a:ext uri="{0D108BD9-81ED-4DB2-BD59-A6C34878D82A}">
+                    <a16:rowId xmlns:a16="http://schemas.microsoft.com/office/drawing/2014/main" val="4025785091"/>
+                  </a:ext>
+                </a:extLst>
+              </a:tr>
+              <a:tr h="370840">
+                <a:tc>
+                  <a:txBody>
+                    <a:bodyPr/>
+                    <a:lstStyle/>
+                    <a:p>
+                      <a:r>
+                        <a:rPr lang="es-ES" dirty="0">
+                          <a:latin typeface="Symbol" panose="05050102010706020507" pitchFamily="18" charset="2"/>
+                        </a:rPr>
+                        <a:t>S</a:t>
+                      </a:r>
+                      <a:r>
+                        <a:rPr lang="es-ES" sz="1800" dirty="0">
+                          <a:latin typeface="+mn-lt"/>
+                        </a:rPr>
+                        <a:t>M1</a:t>
+                      </a:r>
+                      <a:endParaRPr lang="es-ES" dirty="0"/>
+                    </a:p>
+                  </a:txBody>
+                  <a:tcPr/>
+                </a:tc>
+                <a:extLst>
+                  <a:ext uri="{0D108BD9-81ED-4DB2-BD59-A6C34878D82A}">
+                    <a16:rowId xmlns:a16="http://schemas.microsoft.com/office/drawing/2014/main" val="3914978911"/>
+                  </a:ext>
+                </a:extLst>
+              </a:tr>
+              <a:tr h="370840">
+                <a:tc>
+                  <a:txBody>
+                    <a:bodyPr/>
+                    <a:lstStyle/>
+                    <a:p>
+                      <a:r>
+                        <a:rPr lang="es-ES" dirty="0">
+                          <a:latin typeface="Symbol" panose="05050102010706020507" pitchFamily="18" charset="2"/>
+                        </a:rPr>
+                        <a:t>S</a:t>
+                      </a:r>
+                      <a:r>
+                        <a:rPr lang="es-ES" sz="1800" dirty="0">
+                          <a:latin typeface="+mn-lt"/>
+                        </a:rPr>
+                        <a:t>F2x</a:t>
+                      </a:r>
+                      <a:endParaRPr lang="es-ES" dirty="0"/>
+                    </a:p>
+                  </a:txBody>
+                  <a:tcPr/>
+                </a:tc>
+                <a:extLst>
+                  <a:ext uri="{0D108BD9-81ED-4DB2-BD59-A6C34878D82A}">
+                    <a16:rowId xmlns:a16="http://schemas.microsoft.com/office/drawing/2014/main" val="1625123179"/>
+                  </a:ext>
+                </a:extLst>
+              </a:tr>
+              <a:tr h="370840">
+                <a:tc>
+                  <a:txBody>
+                    <a:bodyPr/>
+                    <a:lstStyle/>
+                    <a:p>
+                      <a:r>
+                        <a:rPr lang="es-ES" dirty="0">
+                          <a:latin typeface="Symbol" panose="05050102010706020507" pitchFamily="18" charset="2"/>
+                        </a:rPr>
+                        <a:t>S</a:t>
+                      </a:r>
+                      <a:r>
+                        <a:rPr lang="es-ES" sz="1800" dirty="0">
+                          <a:latin typeface="+mn-lt"/>
+                        </a:rPr>
+                        <a:t>F2y</a:t>
+                      </a:r>
+                      <a:endParaRPr lang="es-ES" dirty="0"/>
+                    </a:p>
+                  </a:txBody>
+                  <a:tcPr/>
+                </a:tc>
+                <a:extLst>
+                  <a:ext uri="{0D108BD9-81ED-4DB2-BD59-A6C34878D82A}">
+                    <a16:rowId xmlns:a16="http://schemas.microsoft.com/office/drawing/2014/main" val="3535899122"/>
+                  </a:ext>
+                </a:extLst>
+              </a:tr>
+              <a:tr h="370840">
+                <a:tc>
+                  <a:txBody>
+                    <a:bodyPr/>
+                    <a:lstStyle/>
+                    <a:p>
+                      <a:r>
+                        <a:rPr lang="es-ES" dirty="0">
+                          <a:latin typeface="Symbol" panose="05050102010706020507" pitchFamily="18" charset="2"/>
+                        </a:rPr>
+                        <a:t>S</a:t>
+                      </a:r>
+                      <a:r>
+                        <a:rPr lang="es-ES" sz="1800" dirty="0"/>
+                        <a:t>M2</a:t>
+                      </a:r>
+                      <a:endParaRPr lang="es-ES" dirty="0"/>
+                    </a:p>
+                  </a:txBody>
+                  <a:tcPr/>
+                </a:tc>
+                <a:extLst>
+                  <a:ext uri="{0D108BD9-81ED-4DB2-BD59-A6C34878D82A}">
+                    <a16:rowId xmlns:a16="http://schemas.microsoft.com/office/drawing/2014/main" val="1421684825"/>
+                  </a:ext>
+                </a:extLst>
+              </a:tr>
+              <a:tr h="370840">
+                <a:tc>
+                  <a:txBody>
+                    <a:bodyPr/>
+                    <a:lstStyle/>
+                    <a:p>
+                      <a:r>
+                        <a:rPr lang="es-ES" dirty="0">
+                          <a:latin typeface="Symbol" panose="05050102010706020507" pitchFamily="18" charset="2"/>
+                        </a:rPr>
+                        <a:t>S</a:t>
+                      </a:r>
+                      <a:r>
+                        <a:rPr lang="es-ES" sz="1800" dirty="0"/>
+                        <a:t>F3x</a:t>
+                      </a:r>
+                      <a:endParaRPr lang="es-ES" dirty="0"/>
+                    </a:p>
+                  </a:txBody>
+                  <a:tcPr/>
+                </a:tc>
+                <a:extLst>
+                  <a:ext uri="{0D108BD9-81ED-4DB2-BD59-A6C34878D82A}">
+                    <a16:rowId xmlns:a16="http://schemas.microsoft.com/office/drawing/2014/main" val="1343607808"/>
+                  </a:ext>
+                </a:extLst>
+              </a:tr>
+              <a:tr h="370840">
+                <a:tc>
+                  <a:txBody>
+                    <a:bodyPr/>
+                    <a:lstStyle/>
+                    <a:p>
+                      <a:r>
+                        <a:rPr lang="es-ES" dirty="0">
+                          <a:latin typeface="Symbol" panose="05050102010706020507" pitchFamily="18" charset="2"/>
+                        </a:rPr>
+                        <a:t>S</a:t>
+                      </a:r>
+                      <a:r>
+                        <a:rPr lang="es-ES" sz="1800" dirty="0"/>
+                        <a:t>F3y</a:t>
+                      </a:r>
+                      <a:endParaRPr lang="es-ES" dirty="0"/>
+                    </a:p>
+                  </a:txBody>
+                  <a:tcPr/>
+                </a:tc>
+                <a:extLst>
+                  <a:ext uri="{0D108BD9-81ED-4DB2-BD59-A6C34878D82A}">
+                    <a16:rowId xmlns:a16="http://schemas.microsoft.com/office/drawing/2014/main" val="3687407724"/>
+                  </a:ext>
+                </a:extLst>
+              </a:tr>
+              <a:tr h="370840">
+                <a:tc>
+                  <a:txBody>
+                    <a:bodyPr/>
+                    <a:lstStyle/>
+                    <a:p>
+                      <a:r>
+                        <a:rPr lang="es-ES" dirty="0">
+                          <a:latin typeface="Symbol" panose="05050102010706020507" pitchFamily="18" charset="2"/>
+                        </a:rPr>
+                        <a:t>SM3</a:t>
+                      </a:r>
+                      <a:endParaRPr lang="es-ES" dirty="0"/>
+                    </a:p>
+                  </a:txBody>
+                  <a:tcPr/>
+                </a:tc>
+                <a:extLst>
+                  <a:ext uri="{0D108BD9-81ED-4DB2-BD59-A6C34878D82A}">
+                    <a16:rowId xmlns:a16="http://schemas.microsoft.com/office/drawing/2014/main" val="2833319598"/>
+                  </a:ext>
+                </a:extLst>
+              </a:tr>
+            </a:tbl>
+          </a:graphicData>
+        </a:graphic>
+      </p:graphicFrame>
+      <p:grpSp>
+        <p:nvGrpSpPr>
+          <p:cNvPr id="5" name="Grupo 4">
+            <a:extLst>
+              <a:ext uri="{FF2B5EF4-FFF2-40B4-BE49-F238E27FC236}">
+                <a16:creationId xmlns:a16="http://schemas.microsoft.com/office/drawing/2014/main" id="{80CA271E-F749-4D5B-885B-40C3E1E7D3D9}"/>
+              </a:ext>
+            </a:extLst>
+          </p:cNvPr>
+          <p:cNvGrpSpPr/>
+          <p:nvPr/>
+        </p:nvGrpSpPr>
+        <p:grpSpPr>
+          <a:xfrm>
+            <a:off x="12297588" y="2647134"/>
+            <a:ext cx="2410414" cy="3432873"/>
+            <a:chOff x="7239334" y="2841194"/>
+            <a:chExt cx="2410414" cy="3432873"/>
+          </a:xfrm>
+        </p:grpSpPr>
+        <p:sp>
+          <p:nvSpPr>
+            <p:cNvPr id="6" name="Rectángulo: esquinas redondeadas 5">
+              <a:extLst>
+                <a:ext uri="{FF2B5EF4-FFF2-40B4-BE49-F238E27FC236}">
+                  <a16:creationId xmlns:a16="http://schemas.microsoft.com/office/drawing/2014/main" id="{3A673C69-CDFD-4EDB-875E-186C9DC46F29}"/>
+                </a:ext>
+              </a:extLst>
+            </p:cNvPr>
+            <p:cNvSpPr/>
+            <p:nvPr/>
+          </p:nvSpPr>
+          <p:spPr>
+            <a:xfrm rot="4403732">
+              <a:off x="6831657" y="4584390"/>
+              <a:ext cx="2650921" cy="293615"/>
+            </a:xfrm>
+            <a:prstGeom prst="roundRect">
+              <a:avLst>
+                <a:gd name="adj" fmla="val 50000"/>
+              </a:avLst>
+            </a:prstGeom>
+          </p:spPr>
+          <p:style>
+            <a:lnRef idx="2">
+              <a:schemeClr val="accent1">
+                <a:shade val="50000"/>
+              </a:schemeClr>
+            </a:lnRef>
+            <a:fillRef idx="1">
+              <a:schemeClr val="accent1"/>
+            </a:fillRef>
+            <a:effectRef idx="0">
+              <a:schemeClr val="accent1"/>
+            </a:effectRef>
+            <a:fontRef idx="minor">
+              <a:schemeClr val="lt1"/>
+            </a:fontRef>
+          </p:style>
+          <p:txBody>
+            <a:bodyPr rtlCol="0" anchor="ctr"/>
+            <a:lstStyle/>
+            <a:p>
+              <a:pPr algn="ctr"/>
+              <a:endParaRPr lang="es-ES"/>
+            </a:p>
+          </p:txBody>
+        </p:sp>
+        <p:grpSp>
+          <p:nvGrpSpPr>
+            <p:cNvPr id="7" name="Grupo 6">
+              <a:extLst>
+                <a:ext uri="{FF2B5EF4-FFF2-40B4-BE49-F238E27FC236}">
+                  <a16:creationId xmlns:a16="http://schemas.microsoft.com/office/drawing/2014/main" id="{6EC73BC9-6C7C-4035-88FB-0F8183FC7845}"/>
+                </a:ext>
+              </a:extLst>
+            </p:cNvPr>
+            <p:cNvGrpSpPr/>
+            <p:nvPr/>
+          </p:nvGrpSpPr>
+          <p:grpSpPr>
+            <a:xfrm>
+              <a:off x="8423340" y="5118343"/>
+              <a:ext cx="1113088" cy="1155724"/>
+              <a:chOff x="6915149" y="933450"/>
+              <a:chExt cx="1113088" cy="1155724"/>
+            </a:xfrm>
+          </p:grpSpPr>
+          <p:sp>
+            <p:nvSpPr>
+              <p:cNvPr id="26" name="Elipse 25">
+                <a:extLst>
+                  <a:ext uri="{FF2B5EF4-FFF2-40B4-BE49-F238E27FC236}">
+                    <a16:creationId xmlns:a16="http://schemas.microsoft.com/office/drawing/2014/main" id="{5800E1DB-3677-4A3E-8120-6C65373CE850}"/>
+                  </a:ext>
+                </a:extLst>
+              </p:cNvPr>
+              <p:cNvSpPr/>
+              <p:nvPr/>
+            </p:nvSpPr>
+            <p:spPr>
+              <a:xfrm>
+                <a:off x="6915149" y="1614352"/>
+                <a:ext cx="160867" cy="160867"/>
+              </a:xfrm>
+              <a:prstGeom prst="ellipse">
+                <a:avLst/>
+              </a:prstGeom>
+              <a:solidFill>
+                <a:schemeClr val="accent2"/>
+              </a:solidFill>
+            </p:spPr>
+            <p:style>
+              <a:lnRef idx="2">
+                <a:schemeClr val="dk1">
+                  <a:shade val="50000"/>
+                </a:schemeClr>
+              </a:lnRef>
+              <a:fillRef idx="1">
+                <a:schemeClr val="dk1"/>
+              </a:fillRef>
+              <a:effectRef idx="0">
+                <a:schemeClr val="dk1"/>
+              </a:effectRef>
+              <a:fontRef idx="minor">
+                <a:schemeClr val="lt1"/>
+              </a:fontRef>
+            </p:style>
+            <p:txBody>
+              <a:bodyPr rtlCol="0" anchor="ctr"/>
+              <a:lstStyle/>
+              <a:p>
+                <a:pPr algn="ctr"/>
+                <a:endParaRPr lang="es-ES"/>
+              </a:p>
+            </p:txBody>
+          </p:sp>
+          <p:cxnSp>
+            <p:nvCxnSpPr>
+              <p:cNvPr id="27" name="Conector recto de flecha 26">
+                <a:extLst>
+                  <a:ext uri="{FF2B5EF4-FFF2-40B4-BE49-F238E27FC236}">
+                    <a16:creationId xmlns:a16="http://schemas.microsoft.com/office/drawing/2014/main" id="{596A1FC3-253B-446B-8BC9-019B172272AA}"/>
+                  </a:ext>
+                </a:extLst>
+              </p:cNvPr>
+              <p:cNvCxnSpPr>
+                <a:cxnSpLocks/>
+              </p:cNvCxnSpPr>
+              <p:nvPr/>
+            </p:nvCxnSpPr>
+            <p:spPr>
+              <a:xfrm flipV="1">
+                <a:off x="6968265" y="1681602"/>
+                <a:ext cx="833694" cy="13184"/>
+              </a:xfrm>
+              <a:prstGeom prst="straightConnector1">
+                <a:avLst/>
+              </a:prstGeom>
+              <a:ln w="76200">
+                <a:solidFill>
+                  <a:schemeClr val="tx1"/>
+                </a:solidFill>
+                <a:tailEnd type="triangle"/>
+              </a:ln>
+            </p:spPr>
+            <p:style>
+              <a:lnRef idx="1">
+                <a:schemeClr val="dk1"/>
+              </a:lnRef>
+              <a:fillRef idx="0">
+                <a:schemeClr val="dk1"/>
+              </a:fillRef>
+              <a:effectRef idx="0">
+                <a:schemeClr val="dk1"/>
+              </a:effectRef>
+              <a:fontRef idx="minor">
+                <a:schemeClr val="tx1"/>
+              </a:fontRef>
+            </p:style>
+          </p:cxnSp>
+          <p:cxnSp>
+            <p:nvCxnSpPr>
+              <p:cNvPr id="28" name="Conector recto de flecha 27">
+                <a:extLst>
+                  <a:ext uri="{FF2B5EF4-FFF2-40B4-BE49-F238E27FC236}">
+                    <a16:creationId xmlns:a16="http://schemas.microsoft.com/office/drawing/2014/main" id="{49BE3783-1610-43EA-A9DB-906DAE90E6F5}"/>
+                  </a:ext>
+                </a:extLst>
+              </p:cNvPr>
+              <p:cNvCxnSpPr>
+                <a:cxnSpLocks/>
+              </p:cNvCxnSpPr>
+              <p:nvPr/>
+            </p:nvCxnSpPr>
+            <p:spPr>
+              <a:xfrm flipH="1" flipV="1">
+                <a:off x="6995582" y="933450"/>
+                <a:ext cx="1" cy="801690"/>
+              </a:xfrm>
+              <a:prstGeom prst="straightConnector1">
+                <a:avLst/>
+              </a:prstGeom>
+              <a:ln w="76200">
+                <a:solidFill>
+                  <a:schemeClr val="tx1"/>
+                </a:solidFill>
+                <a:tailEnd type="triangle"/>
+              </a:ln>
+            </p:spPr>
+            <p:style>
+              <a:lnRef idx="1">
+                <a:schemeClr val="dk1"/>
+              </a:lnRef>
+              <a:fillRef idx="0">
+                <a:schemeClr val="dk1"/>
+              </a:fillRef>
+              <a:effectRef idx="0">
+                <a:schemeClr val="dk1"/>
+              </a:effectRef>
+              <a:fontRef idx="minor">
+                <a:schemeClr val="tx1"/>
+              </a:fontRef>
+            </p:style>
+          </p:cxnSp>
+          <p:sp>
+            <p:nvSpPr>
+              <p:cNvPr id="29" name="CuadroTexto 28">
+                <a:extLst>
+                  <a:ext uri="{FF2B5EF4-FFF2-40B4-BE49-F238E27FC236}">
+                    <a16:creationId xmlns:a16="http://schemas.microsoft.com/office/drawing/2014/main" id="{A345B120-10E8-4F72-9AFB-94CDFA18BF3F}"/>
+                  </a:ext>
+                </a:extLst>
+              </p:cNvPr>
+              <p:cNvSpPr txBox="1"/>
+              <p:nvPr/>
+            </p:nvSpPr>
+            <p:spPr>
+              <a:xfrm>
+                <a:off x="7122253" y="1048263"/>
+                <a:ext cx="647934" cy="369332"/>
+              </a:xfrm>
+              <a:prstGeom prst="rect">
+                <a:avLst/>
+              </a:prstGeom>
+              <a:noFill/>
+            </p:spPr>
+            <p:txBody>
+              <a:bodyPr wrap="none" rtlCol="0">
+                <a:spAutoFit/>
+              </a:bodyPr>
+              <a:lstStyle/>
+              <a:p>
+                <a:r>
+                  <a:rPr lang="es-ES" dirty="0"/>
+                  <a:t>R10y</a:t>
+                </a:r>
+              </a:p>
+            </p:txBody>
+          </p:sp>
+          <p:sp>
+            <p:nvSpPr>
+              <p:cNvPr id="30" name="CuadroTexto 29">
+                <a:extLst>
+                  <a:ext uri="{FF2B5EF4-FFF2-40B4-BE49-F238E27FC236}">
+                    <a16:creationId xmlns:a16="http://schemas.microsoft.com/office/drawing/2014/main" id="{DB559ADA-93EF-4723-A265-22D90AD439B6}"/>
+                  </a:ext>
+                </a:extLst>
+              </p:cNvPr>
+              <p:cNvSpPr txBox="1"/>
+              <p:nvPr/>
+            </p:nvSpPr>
+            <p:spPr>
+              <a:xfrm>
+                <a:off x="7385112" y="1719842"/>
+                <a:ext cx="643125" cy="369332"/>
+              </a:xfrm>
+              <a:prstGeom prst="rect">
+                <a:avLst/>
+              </a:prstGeom>
+              <a:noFill/>
+            </p:spPr>
+            <p:txBody>
+              <a:bodyPr wrap="none" rtlCol="0">
+                <a:spAutoFit/>
+              </a:bodyPr>
+              <a:lstStyle/>
+              <a:p>
+                <a:r>
+                  <a:rPr lang="es-ES" dirty="0"/>
+                  <a:t>R10x</a:t>
+                </a:r>
+              </a:p>
+            </p:txBody>
+          </p:sp>
+        </p:grpSp>
+        <p:sp>
+          <p:nvSpPr>
+            <p:cNvPr id="8" name="CuadroTexto 7">
+              <a:extLst>
+                <a:ext uri="{FF2B5EF4-FFF2-40B4-BE49-F238E27FC236}">
+                  <a16:creationId xmlns:a16="http://schemas.microsoft.com/office/drawing/2014/main" id="{19614C3C-B032-44D8-B0DF-A8759E392FDD}"/>
+                </a:ext>
+              </a:extLst>
+            </p:cNvPr>
+            <p:cNvSpPr txBox="1"/>
+            <p:nvPr/>
+          </p:nvSpPr>
+          <p:spPr>
+            <a:xfrm>
+              <a:off x="8551690" y="4590695"/>
+              <a:ext cx="1098058" cy="461665"/>
+            </a:xfrm>
+            <a:prstGeom prst="rect">
+              <a:avLst/>
+            </a:prstGeom>
+            <a:noFill/>
+          </p:spPr>
+          <p:txBody>
+            <a:bodyPr wrap="none" rtlCol="0">
+              <a:spAutoFit/>
+            </a:bodyPr>
+            <a:lstStyle/>
+            <a:p>
+              <a:r>
+                <a:rPr lang="es-ES" sz="2400" b="1" u="sng" dirty="0"/>
+                <a:t>Barra 1</a:t>
+              </a:r>
+            </a:p>
+          </p:txBody>
+        </p:sp>
+        <p:grpSp>
+          <p:nvGrpSpPr>
+            <p:cNvPr id="9" name="Grupo 8">
+              <a:extLst>
+                <a:ext uri="{FF2B5EF4-FFF2-40B4-BE49-F238E27FC236}">
+                  <a16:creationId xmlns:a16="http://schemas.microsoft.com/office/drawing/2014/main" id="{0AD26655-56DD-4523-9770-C4C4E0B6BB44}"/>
+                </a:ext>
+              </a:extLst>
+            </p:cNvPr>
+            <p:cNvGrpSpPr/>
+            <p:nvPr/>
+          </p:nvGrpSpPr>
+          <p:grpSpPr>
+            <a:xfrm>
+              <a:off x="7753705" y="2841194"/>
+              <a:ext cx="1113088" cy="1155724"/>
+              <a:chOff x="6915149" y="933450"/>
+              <a:chExt cx="1113088" cy="1155724"/>
+            </a:xfrm>
+          </p:grpSpPr>
+          <p:sp>
+            <p:nvSpPr>
+              <p:cNvPr id="21" name="Elipse 20">
+                <a:extLst>
+                  <a:ext uri="{FF2B5EF4-FFF2-40B4-BE49-F238E27FC236}">
+                    <a16:creationId xmlns:a16="http://schemas.microsoft.com/office/drawing/2014/main" id="{E3A13757-9EE3-48F7-B585-D8008E167654}"/>
+                  </a:ext>
+                </a:extLst>
+              </p:cNvPr>
+              <p:cNvSpPr/>
+              <p:nvPr/>
+            </p:nvSpPr>
+            <p:spPr>
+              <a:xfrm>
+                <a:off x="6915149" y="1614352"/>
+                <a:ext cx="160867" cy="160867"/>
+              </a:xfrm>
+              <a:prstGeom prst="ellipse">
+                <a:avLst/>
+              </a:prstGeom>
+              <a:solidFill>
+                <a:schemeClr val="accent2"/>
+              </a:solidFill>
+            </p:spPr>
+            <p:style>
+              <a:lnRef idx="2">
+                <a:schemeClr val="dk1">
+                  <a:shade val="50000"/>
+                </a:schemeClr>
+              </a:lnRef>
+              <a:fillRef idx="1">
+                <a:schemeClr val="dk1"/>
+              </a:fillRef>
+              <a:effectRef idx="0">
+                <a:schemeClr val="dk1"/>
+              </a:effectRef>
+              <a:fontRef idx="minor">
+                <a:schemeClr val="lt1"/>
+              </a:fontRef>
+            </p:style>
+            <p:txBody>
+              <a:bodyPr rtlCol="0" anchor="ctr"/>
+              <a:lstStyle/>
+              <a:p>
+                <a:pPr algn="ctr"/>
+                <a:endParaRPr lang="es-ES"/>
+              </a:p>
+            </p:txBody>
+          </p:sp>
+          <p:cxnSp>
+            <p:nvCxnSpPr>
+              <p:cNvPr id="22" name="Conector recto de flecha 21">
+                <a:extLst>
+                  <a:ext uri="{FF2B5EF4-FFF2-40B4-BE49-F238E27FC236}">
+                    <a16:creationId xmlns:a16="http://schemas.microsoft.com/office/drawing/2014/main" id="{4F8DFB44-D898-481F-B2EC-95C19F29664A}"/>
+                  </a:ext>
+                </a:extLst>
+              </p:cNvPr>
+              <p:cNvCxnSpPr>
+                <a:cxnSpLocks/>
+              </p:cNvCxnSpPr>
+              <p:nvPr/>
+            </p:nvCxnSpPr>
+            <p:spPr>
+              <a:xfrm flipV="1">
+                <a:off x="6968265" y="1681602"/>
+                <a:ext cx="833694" cy="13184"/>
+              </a:xfrm>
+              <a:prstGeom prst="straightConnector1">
+                <a:avLst/>
+              </a:prstGeom>
+              <a:ln w="76200">
+                <a:solidFill>
+                  <a:schemeClr val="tx1"/>
+                </a:solidFill>
+                <a:tailEnd type="triangle"/>
+              </a:ln>
+            </p:spPr>
+            <p:style>
+              <a:lnRef idx="1">
+                <a:schemeClr val="dk1"/>
+              </a:lnRef>
+              <a:fillRef idx="0">
+                <a:schemeClr val="dk1"/>
+              </a:fillRef>
+              <a:effectRef idx="0">
+                <a:schemeClr val="dk1"/>
+              </a:effectRef>
+              <a:fontRef idx="minor">
+                <a:schemeClr val="tx1"/>
+              </a:fontRef>
+            </p:style>
+          </p:cxnSp>
+          <p:cxnSp>
+            <p:nvCxnSpPr>
+              <p:cNvPr id="23" name="Conector recto de flecha 22">
+                <a:extLst>
+                  <a:ext uri="{FF2B5EF4-FFF2-40B4-BE49-F238E27FC236}">
+                    <a16:creationId xmlns:a16="http://schemas.microsoft.com/office/drawing/2014/main" id="{D7F9F77A-D7C3-4B6F-9301-400688A246EE}"/>
+                  </a:ext>
+                </a:extLst>
+              </p:cNvPr>
+              <p:cNvCxnSpPr>
+                <a:cxnSpLocks/>
+              </p:cNvCxnSpPr>
+              <p:nvPr/>
+            </p:nvCxnSpPr>
+            <p:spPr>
+              <a:xfrm flipH="1" flipV="1">
+                <a:off x="6995582" y="933450"/>
+                <a:ext cx="1" cy="801690"/>
+              </a:xfrm>
+              <a:prstGeom prst="straightConnector1">
+                <a:avLst/>
+              </a:prstGeom>
+              <a:ln w="76200">
+                <a:solidFill>
+                  <a:schemeClr val="tx1"/>
+                </a:solidFill>
+                <a:tailEnd type="triangle"/>
+              </a:ln>
+            </p:spPr>
+            <p:style>
+              <a:lnRef idx="1">
+                <a:schemeClr val="dk1"/>
+              </a:lnRef>
+              <a:fillRef idx="0">
+                <a:schemeClr val="dk1"/>
+              </a:fillRef>
+              <a:effectRef idx="0">
+                <a:schemeClr val="dk1"/>
+              </a:effectRef>
+              <a:fontRef idx="minor">
+                <a:schemeClr val="tx1"/>
+              </a:fontRef>
+            </p:style>
+          </p:cxnSp>
+          <p:sp>
+            <p:nvSpPr>
+              <p:cNvPr id="24" name="CuadroTexto 23">
+                <a:extLst>
+                  <a:ext uri="{FF2B5EF4-FFF2-40B4-BE49-F238E27FC236}">
+                    <a16:creationId xmlns:a16="http://schemas.microsoft.com/office/drawing/2014/main" id="{B4EEF2CC-CC8D-4865-94D3-0274D935B062}"/>
+                  </a:ext>
+                </a:extLst>
+              </p:cNvPr>
+              <p:cNvSpPr txBox="1"/>
+              <p:nvPr/>
+            </p:nvSpPr>
+            <p:spPr>
+              <a:xfrm>
+                <a:off x="7122253" y="1048263"/>
+                <a:ext cx="647934" cy="369332"/>
+              </a:xfrm>
+              <a:prstGeom prst="rect">
+                <a:avLst/>
+              </a:prstGeom>
+              <a:noFill/>
+            </p:spPr>
+            <p:txBody>
+              <a:bodyPr wrap="none" rtlCol="0">
+                <a:spAutoFit/>
+              </a:bodyPr>
+              <a:lstStyle/>
+              <a:p>
+                <a:r>
+                  <a:rPr lang="es-ES" dirty="0"/>
+                  <a:t>R11y</a:t>
+                </a:r>
+              </a:p>
+            </p:txBody>
+          </p:sp>
+          <p:sp>
+            <p:nvSpPr>
+              <p:cNvPr id="25" name="CuadroTexto 24">
+                <a:extLst>
+                  <a:ext uri="{FF2B5EF4-FFF2-40B4-BE49-F238E27FC236}">
+                    <a16:creationId xmlns:a16="http://schemas.microsoft.com/office/drawing/2014/main" id="{6929489C-080F-406A-8A49-B4A03B24287B}"/>
+                  </a:ext>
+                </a:extLst>
+              </p:cNvPr>
+              <p:cNvSpPr txBox="1"/>
+              <p:nvPr/>
+            </p:nvSpPr>
+            <p:spPr>
+              <a:xfrm>
+                <a:off x="7385112" y="1719842"/>
+                <a:ext cx="643125" cy="369332"/>
+              </a:xfrm>
+              <a:prstGeom prst="rect">
+                <a:avLst/>
+              </a:prstGeom>
+              <a:noFill/>
+            </p:spPr>
+            <p:txBody>
+              <a:bodyPr wrap="none" rtlCol="0">
+                <a:spAutoFit/>
+              </a:bodyPr>
+              <a:lstStyle/>
+              <a:p>
+                <a:r>
+                  <a:rPr lang="es-ES" dirty="0"/>
+                  <a:t>R11x</a:t>
+                </a:r>
+              </a:p>
+            </p:txBody>
+          </p:sp>
+        </p:grpSp>
+        <p:sp>
+          <p:nvSpPr>
+            <p:cNvPr id="10" name="Rectángulo: esquinas redondeadas 9">
+              <a:extLst>
+                <a:ext uri="{FF2B5EF4-FFF2-40B4-BE49-F238E27FC236}">
+                  <a16:creationId xmlns:a16="http://schemas.microsoft.com/office/drawing/2014/main" id="{61A9C82D-E37B-4CA7-BDD7-5A074962CDE0}"/>
+                </a:ext>
+              </a:extLst>
+            </p:cNvPr>
+            <p:cNvSpPr/>
+            <p:nvPr/>
+          </p:nvSpPr>
+          <p:spPr>
+            <a:xfrm rot="20707675">
+              <a:off x="7239334" y="4300042"/>
+              <a:ext cx="994333" cy="388450"/>
+            </a:xfrm>
+            <a:prstGeom prst="roundRect">
+              <a:avLst>
+                <a:gd name="adj" fmla="val 50000"/>
+              </a:avLst>
+            </a:prstGeom>
+          </p:spPr>
+          <p:style>
+            <a:lnRef idx="2">
+              <a:schemeClr val="accent1">
+                <a:shade val="50000"/>
+              </a:schemeClr>
+            </a:lnRef>
+            <a:fillRef idx="1">
+              <a:schemeClr val="accent1"/>
+            </a:fillRef>
+            <a:effectRef idx="0">
+              <a:schemeClr val="accent1"/>
+            </a:effectRef>
+            <a:fontRef idx="minor">
+              <a:schemeClr val="lt1"/>
+            </a:fontRef>
+          </p:style>
+          <p:txBody>
+            <a:bodyPr rtlCol="0" anchor="ctr"/>
+            <a:lstStyle/>
+            <a:p>
+              <a:pPr algn="ctr"/>
+              <a:endParaRPr lang="es-ES"/>
+            </a:p>
+          </p:txBody>
+        </p:sp>
+        <p:grpSp>
+          <p:nvGrpSpPr>
+            <p:cNvPr id="11" name="Grupo 10">
+              <a:extLst>
+                <a:ext uri="{FF2B5EF4-FFF2-40B4-BE49-F238E27FC236}">
+                  <a16:creationId xmlns:a16="http://schemas.microsoft.com/office/drawing/2014/main" id="{BD1AEC20-5EA2-47B1-B976-F0B8D8B50072}"/>
+                </a:ext>
+              </a:extLst>
+            </p:cNvPr>
+            <p:cNvGrpSpPr/>
+            <p:nvPr/>
+          </p:nvGrpSpPr>
+          <p:grpSpPr>
+            <a:xfrm>
+              <a:off x="7345721" y="3820328"/>
+              <a:ext cx="976833" cy="1155724"/>
+              <a:chOff x="6915149" y="933450"/>
+              <a:chExt cx="976833" cy="1155724"/>
+            </a:xfrm>
+          </p:grpSpPr>
+          <p:sp>
+            <p:nvSpPr>
+              <p:cNvPr id="16" name="Elipse 15">
+                <a:extLst>
+                  <a:ext uri="{FF2B5EF4-FFF2-40B4-BE49-F238E27FC236}">
+                    <a16:creationId xmlns:a16="http://schemas.microsoft.com/office/drawing/2014/main" id="{56253DA8-6AD2-49AD-9CFA-66089C859558}"/>
+                  </a:ext>
+                </a:extLst>
+              </p:cNvPr>
+              <p:cNvSpPr/>
+              <p:nvPr/>
+            </p:nvSpPr>
+            <p:spPr>
+              <a:xfrm>
+                <a:off x="6915149" y="1614352"/>
+                <a:ext cx="160867" cy="160867"/>
+              </a:xfrm>
+              <a:prstGeom prst="ellipse">
+                <a:avLst/>
+              </a:prstGeom>
+              <a:solidFill>
+                <a:schemeClr val="accent2"/>
+              </a:solidFill>
+            </p:spPr>
+            <p:style>
+              <a:lnRef idx="2">
+                <a:schemeClr val="dk1">
+                  <a:shade val="50000"/>
+                </a:schemeClr>
+              </a:lnRef>
+              <a:fillRef idx="1">
+                <a:schemeClr val="dk1"/>
+              </a:fillRef>
+              <a:effectRef idx="0">
+                <a:schemeClr val="dk1"/>
+              </a:effectRef>
+              <a:fontRef idx="minor">
+                <a:schemeClr val="lt1"/>
+              </a:fontRef>
+            </p:style>
+            <p:txBody>
+              <a:bodyPr rtlCol="0" anchor="ctr"/>
+              <a:lstStyle/>
+              <a:p>
+                <a:pPr algn="ctr"/>
+                <a:endParaRPr lang="es-ES"/>
+              </a:p>
+            </p:txBody>
+          </p:sp>
+          <p:cxnSp>
+            <p:nvCxnSpPr>
+              <p:cNvPr id="17" name="Conector recto de flecha 16">
+                <a:extLst>
+                  <a:ext uri="{FF2B5EF4-FFF2-40B4-BE49-F238E27FC236}">
+                    <a16:creationId xmlns:a16="http://schemas.microsoft.com/office/drawing/2014/main" id="{0C119F28-1DF7-4497-9687-ED7B75EF7E6A}"/>
+                  </a:ext>
+                </a:extLst>
+              </p:cNvPr>
+              <p:cNvCxnSpPr>
+                <a:cxnSpLocks/>
+              </p:cNvCxnSpPr>
+              <p:nvPr/>
+            </p:nvCxnSpPr>
+            <p:spPr>
+              <a:xfrm flipV="1">
+                <a:off x="6968265" y="1681602"/>
+                <a:ext cx="833694" cy="13184"/>
+              </a:xfrm>
+              <a:prstGeom prst="straightConnector1">
+                <a:avLst/>
+              </a:prstGeom>
+              <a:ln w="76200">
+                <a:solidFill>
+                  <a:schemeClr val="tx1"/>
+                </a:solidFill>
+                <a:tailEnd type="triangle"/>
+              </a:ln>
+            </p:spPr>
+            <p:style>
+              <a:lnRef idx="1">
+                <a:schemeClr val="dk1"/>
+              </a:lnRef>
+              <a:fillRef idx="0">
+                <a:schemeClr val="dk1"/>
+              </a:fillRef>
+              <a:effectRef idx="0">
+                <a:schemeClr val="dk1"/>
+              </a:effectRef>
+              <a:fontRef idx="minor">
+                <a:schemeClr val="tx1"/>
+              </a:fontRef>
+            </p:style>
+          </p:cxnSp>
+          <p:cxnSp>
+            <p:nvCxnSpPr>
+              <p:cNvPr id="18" name="Conector recto de flecha 17">
+                <a:extLst>
+                  <a:ext uri="{FF2B5EF4-FFF2-40B4-BE49-F238E27FC236}">
+                    <a16:creationId xmlns:a16="http://schemas.microsoft.com/office/drawing/2014/main" id="{CE851E2B-CAF6-49CE-A783-8A392B3F60D9}"/>
+                  </a:ext>
+                </a:extLst>
+              </p:cNvPr>
+              <p:cNvCxnSpPr>
+                <a:cxnSpLocks/>
+              </p:cNvCxnSpPr>
+              <p:nvPr/>
+            </p:nvCxnSpPr>
+            <p:spPr>
+              <a:xfrm flipH="1" flipV="1">
+                <a:off x="6995582" y="933450"/>
+                <a:ext cx="1" cy="801690"/>
+              </a:xfrm>
+              <a:prstGeom prst="straightConnector1">
+                <a:avLst/>
+              </a:prstGeom>
+              <a:ln w="76200">
+                <a:solidFill>
+                  <a:schemeClr val="tx1"/>
+                </a:solidFill>
+                <a:tailEnd type="triangle"/>
+              </a:ln>
+            </p:spPr>
+            <p:style>
+              <a:lnRef idx="1">
+                <a:schemeClr val="dk1"/>
+              </a:lnRef>
+              <a:fillRef idx="0">
+                <a:schemeClr val="dk1"/>
+              </a:fillRef>
+              <a:effectRef idx="0">
+                <a:schemeClr val="dk1"/>
+              </a:effectRef>
+              <a:fontRef idx="minor">
+                <a:schemeClr val="tx1"/>
+              </a:fontRef>
+            </p:style>
+          </p:cxnSp>
+          <p:sp>
+            <p:nvSpPr>
+              <p:cNvPr id="19" name="CuadroTexto 18">
+                <a:extLst>
+                  <a:ext uri="{FF2B5EF4-FFF2-40B4-BE49-F238E27FC236}">
+                    <a16:creationId xmlns:a16="http://schemas.microsoft.com/office/drawing/2014/main" id="{C1D820C8-40D1-4D12-B54D-9DFC3EF7FDCA}"/>
+                  </a:ext>
+                </a:extLst>
+              </p:cNvPr>
+              <p:cNvSpPr txBox="1"/>
+              <p:nvPr/>
+            </p:nvSpPr>
+            <p:spPr>
+              <a:xfrm>
+                <a:off x="7122253" y="1048263"/>
+                <a:ext cx="511679" cy="369332"/>
+              </a:xfrm>
+              <a:prstGeom prst="rect">
+                <a:avLst/>
+              </a:prstGeom>
+              <a:noFill/>
+            </p:spPr>
+            <p:txBody>
+              <a:bodyPr wrap="none" rtlCol="0">
+                <a:spAutoFit/>
+              </a:bodyPr>
+              <a:lstStyle/>
+              <a:p>
+                <a:r>
+                  <a:rPr lang="es-ES" dirty="0"/>
+                  <a:t>F1y</a:t>
+                </a:r>
+              </a:p>
+            </p:txBody>
+          </p:sp>
+          <p:sp>
+            <p:nvSpPr>
+              <p:cNvPr id="20" name="CuadroTexto 19">
+                <a:extLst>
+                  <a:ext uri="{FF2B5EF4-FFF2-40B4-BE49-F238E27FC236}">
+                    <a16:creationId xmlns:a16="http://schemas.microsoft.com/office/drawing/2014/main" id="{855429F6-EA2E-4F8F-8BE9-782D22C2889E}"/>
+                  </a:ext>
+                </a:extLst>
+              </p:cNvPr>
+              <p:cNvSpPr txBox="1"/>
+              <p:nvPr/>
+            </p:nvSpPr>
+            <p:spPr>
+              <a:xfrm>
+                <a:off x="7385112" y="1719842"/>
+                <a:ext cx="506870" cy="369332"/>
+              </a:xfrm>
+              <a:prstGeom prst="rect">
+                <a:avLst/>
+              </a:prstGeom>
+              <a:noFill/>
+            </p:spPr>
+            <p:txBody>
+              <a:bodyPr wrap="none" rtlCol="0">
+                <a:spAutoFit/>
+              </a:bodyPr>
+              <a:lstStyle/>
+              <a:p>
+                <a:r>
+                  <a:rPr lang="es-ES" dirty="0"/>
+                  <a:t>F1x</a:t>
+                </a:r>
+              </a:p>
+            </p:txBody>
+          </p:sp>
+        </p:grpSp>
+        <p:grpSp>
+          <p:nvGrpSpPr>
+            <p:cNvPr id="12" name="Grupo 11">
+              <a:extLst>
+                <a:ext uri="{FF2B5EF4-FFF2-40B4-BE49-F238E27FC236}">
+                  <a16:creationId xmlns:a16="http://schemas.microsoft.com/office/drawing/2014/main" id="{03DE3E8E-5592-4B03-9E5A-282737A8298D}"/>
+                </a:ext>
+              </a:extLst>
+            </p:cNvPr>
+            <p:cNvGrpSpPr/>
+            <p:nvPr/>
+          </p:nvGrpSpPr>
+          <p:grpSpPr>
+            <a:xfrm>
+              <a:off x="7720448" y="4903307"/>
+              <a:ext cx="613454" cy="841410"/>
+              <a:chOff x="6163555" y="2052479"/>
+              <a:chExt cx="613454" cy="841410"/>
+            </a:xfrm>
+          </p:grpSpPr>
+          <p:sp>
+            <p:nvSpPr>
+              <p:cNvPr id="13" name="Elipse 12">
+                <a:extLst>
+                  <a:ext uri="{FF2B5EF4-FFF2-40B4-BE49-F238E27FC236}">
+                    <a16:creationId xmlns:a16="http://schemas.microsoft.com/office/drawing/2014/main" id="{2F6D059F-68E7-4C1E-BF93-8D691B0DB971}"/>
+                  </a:ext>
+                </a:extLst>
+              </p:cNvPr>
+              <p:cNvSpPr/>
+              <p:nvPr/>
+            </p:nvSpPr>
+            <p:spPr>
+              <a:xfrm>
+                <a:off x="6163555" y="2052479"/>
+                <a:ext cx="160867" cy="160867"/>
+              </a:xfrm>
+              <a:prstGeom prst="ellipse">
+                <a:avLst/>
+              </a:prstGeom>
+              <a:solidFill>
+                <a:schemeClr val="accent2"/>
+              </a:solidFill>
+            </p:spPr>
+            <p:style>
+              <a:lnRef idx="2">
+                <a:schemeClr val="dk1">
+                  <a:shade val="50000"/>
+                </a:schemeClr>
+              </a:lnRef>
+              <a:fillRef idx="1">
+                <a:schemeClr val="dk1"/>
+              </a:fillRef>
+              <a:effectRef idx="0">
+                <a:schemeClr val="dk1"/>
+              </a:effectRef>
+              <a:fontRef idx="minor">
+                <a:schemeClr val="lt1"/>
+              </a:fontRef>
+            </p:style>
+            <p:txBody>
+              <a:bodyPr rtlCol="0" anchor="ctr"/>
+              <a:lstStyle/>
+              <a:p>
+                <a:pPr algn="ctr"/>
+                <a:endParaRPr lang="es-ES"/>
+              </a:p>
+            </p:txBody>
+          </p:sp>
+          <p:cxnSp>
+            <p:nvCxnSpPr>
+              <p:cNvPr id="14" name="Conector recto de flecha 13">
+                <a:extLst>
+                  <a:ext uri="{FF2B5EF4-FFF2-40B4-BE49-F238E27FC236}">
+                    <a16:creationId xmlns:a16="http://schemas.microsoft.com/office/drawing/2014/main" id="{25FC51BD-08F8-424D-89F3-A5125C8CFD6C}"/>
+                  </a:ext>
+                </a:extLst>
+              </p:cNvPr>
+              <p:cNvCxnSpPr>
+                <a:cxnSpLocks/>
+              </p:cNvCxnSpPr>
+              <p:nvPr/>
+            </p:nvCxnSpPr>
+            <p:spPr>
+              <a:xfrm>
+                <a:off x="6233227" y="2111937"/>
+                <a:ext cx="11290" cy="781952"/>
+              </a:xfrm>
+              <a:prstGeom prst="straightConnector1">
+                <a:avLst/>
+              </a:prstGeom>
+              <a:ln w="76200">
+                <a:solidFill>
+                  <a:schemeClr val="tx1"/>
+                </a:solidFill>
+                <a:tailEnd type="triangle"/>
+              </a:ln>
+            </p:spPr>
+            <p:style>
+              <a:lnRef idx="1">
+                <a:schemeClr val="dk1"/>
+              </a:lnRef>
+              <a:fillRef idx="0">
+                <a:schemeClr val="dk1"/>
+              </a:fillRef>
+              <a:effectRef idx="0">
+                <a:schemeClr val="dk1"/>
+              </a:effectRef>
+              <a:fontRef idx="minor">
+                <a:schemeClr val="tx1"/>
+              </a:fontRef>
+            </p:style>
+          </p:cxnSp>
+          <p:sp>
+            <p:nvSpPr>
+              <p:cNvPr id="15" name="CuadroTexto 14">
+                <a:extLst>
+                  <a:ext uri="{FF2B5EF4-FFF2-40B4-BE49-F238E27FC236}">
+                    <a16:creationId xmlns:a16="http://schemas.microsoft.com/office/drawing/2014/main" id="{109E8006-CFE0-4171-BDBC-6EFF3DF15B99}"/>
+                  </a:ext>
+                </a:extLst>
+              </p:cNvPr>
+              <p:cNvSpPr txBox="1"/>
+              <p:nvPr/>
+            </p:nvSpPr>
+            <p:spPr>
+              <a:xfrm>
+                <a:off x="6208071" y="2343304"/>
+                <a:ext cx="568938" cy="369332"/>
+              </a:xfrm>
+              <a:prstGeom prst="rect">
+                <a:avLst/>
+              </a:prstGeom>
+              <a:noFill/>
+            </p:spPr>
+            <p:txBody>
+              <a:bodyPr wrap="none" rtlCol="0">
+                <a:spAutoFit/>
+              </a:bodyPr>
+              <a:lstStyle/>
+              <a:p>
+                <a:r>
+                  <a:rPr lang="es-ES" dirty="0"/>
+                  <a:t>CG1</a:t>
+                </a:r>
+              </a:p>
+            </p:txBody>
+          </p:sp>
+        </p:grpSp>
+      </p:grpSp>
+      <p:graphicFrame>
+        <p:nvGraphicFramePr>
+          <p:cNvPr id="39" name="Tabla 36">
+            <a:extLst>
+              <a:ext uri="{FF2B5EF4-FFF2-40B4-BE49-F238E27FC236}">
+                <a16:creationId xmlns:a16="http://schemas.microsoft.com/office/drawing/2014/main" id="{D3FF529E-DE45-417F-B729-7AA14814543D}"/>
+              </a:ext>
+            </a:extLst>
+          </p:cNvPr>
+          <p:cNvGraphicFramePr>
+            <a:graphicFrameLocks noGrp="1"/>
+          </p:cNvGraphicFramePr>
+          <p:nvPr>
+            <p:extLst>
+              <p:ext uri="{D42A27DB-BD31-4B8C-83A1-F6EECF244321}">
+                <p14:modId xmlns:p14="http://schemas.microsoft.com/office/powerpoint/2010/main" val="31451651"/>
+              </p:ext>
+            </p:extLst>
+          </p:nvPr>
+        </p:nvGraphicFramePr>
+        <p:xfrm>
+          <a:off x="9418468" y="656073"/>
+          <a:ext cx="916346" cy="5209938"/>
+        </p:xfrm>
+        <a:graphic>
+          <a:graphicData uri="http://schemas.openxmlformats.org/drawingml/2006/table">
+            <a:tbl>
+              <a:tblPr firstRow="1" bandRow="1">
+                <a:tableStyleId>{5C22544A-7EE6-4342-B048-85BDC9FD1C3A}</a:tableStyleId>
+              </a:tblPr>
+              <a:tblGrid>
+                <a:gridCol w="916346">
+                  <a:extLst>
+                    <a:ext uri="{9D8B030D-6E8A-4147-A177-3AD203B41FA5}">
+                      <a16:colId xmlns:a16="http://schemas.microsoft.com/office/drawing/2014/main" val="3952950136"/>
+                    </a:ext>
+                  </a:extLst>
+                </a:gridCol>
+              </a:tblGrid>
+              <a:tr h="370840">
+                <a:tc>
+                  <a:txBody>
+                    <a:bodyPr/>
+                    <a:lstStyle/>
+                    <a:p>
+                      <a:pPr marL="0" marR="0" lvl="0" indent="0" algn="l" defTabSz="914400" rtl="0" eaLnBrk="1" fontAlgn="auto" latinLnBrk="0" hangingPunct="1">
+                        <a:lnSpc>
+                          <a:spcPct val="100000"/>
+                        </a:lnSpc>
+                        <a:spcBef>
+                          <a:spcPts val="0"/>
+                        </a:spcBef>
+                        <a:spcAft>
+                          <a:spcPts val="0"/>
+                        </a:spcAft>
+                        <a:buClrTx/>
+                        <a:buSzTx/>
+                        <a:buFontTx/>
+                        <a:buNone/>
+                        <a:tabLst/>
+                        <a:defRPr/>
+                      </a:pPr>
+                      <a:r>
+                        <a:rPr lang="es-ES" sz="1800" dirty="0"/>
+                        <a:t>R10x</a:t>
+                      </a:r>
+                    </a:p>
+                  </a:txBody>
+                  <a:tcPr/>
+                </a:tc>
+                <a:extLst>
+                  <a:ext uri="{0D108BD9-81ED-4DB2-BD59-A6C34878D82A}">
+                    <a16:rowId xmlns:a16="http://schemas.microsoft.com/office/drawing/2014/main" val="1653781353"/>
+                  </a:ext>
+                </a:extLst>
+              </a:tr>
+              <a:tr h="370840">
+                <a:tc>
+                  <a:txBody>
+                    <a:bodyPr/>
+                    <a:lstStyle/>
+                    <a:p>
+                      <a:r>
+                        <a:rPr lang="es-ES" sz="1800" dirty="0"/>
+                        <a:t>R10y</a:t>
+                      </a:r>
+                      <a:endParaRPr lang="es-ES" dirty="0"/>
+                    </a:p>
+                  </a:txBody>
+                  <a:tcPr/>
+                </a:tc>
+                <a:extLst>
+                  <a:ext uri="{0D108BD9-81ED-4DB2-BD59-A6C34878D82A}">
+                    <a16:rowId xmlns:a16="http://schemas.microsoft.com/office/drawing/2014/main" val="4025785091"/>
+                  </a:ext>
+                </a:extLst>
+              </a:tr>
+              <a:tr h="370840">
+                <a:tc>
+                  <a:txBody>
+                    <a:bodyPr/>
+                    <a:lstStyle/>
+                    <a:p>
+                      <a:r>
+                        <a:rPr lang="es-ES" sz="1800" dirty="0"/>
+                        <a:t>R11x</a:t>
+                      </a:r>
+                      <a:endParaRPr lang="es-ES" dirty="0"/>
+                    </a:p>
+                  </a:txBody>
+                  <a:tcPr/>
+                </a:tc>
+                <a:extLst>
+                  <a:ext uri="{0D108BD9-81ED-4DB2-BD59-A6C34878D82A}">
+                    <a16:rowId xmlns:a16="http://schemas.microsoft.com/office/drawing/2014/main" val="3914978911"/>
+                  </a:ext>
+                </a:extLst>
+              </a:tr>
+              <a:tr h="370840">
+                <a:tc>
+                  <a:txBody>
+                    <a:bodyPr/>
+                    <a:lstStyle/>
+                    <a:p>
+                      <a:r>
+                        <a:rPr lang="es-ES" sz="1800" dirty="0"/>
+                        <a:t>R11y</a:t>
+                      </a:r>
+                      <a:endParaRPr lang="es-ES" dirty="0"/>
+                    </a:p>
+                  </a:txBody>
+                  <a:tcPr/>
+                </a:tc>
+                <a:extLst>
+                  <a:ext uri="{0D108BD9-81ED-4DB2-BD59-A6C34878D82A}">
+                    <a16:rowId xmlns:a16="http://schemas.microsoft.com/office/drawing/2014/main" val="1625123179"/>
+                  </a:ext>
+                </a:extLst>
+              </a:tr>
+              <a:tr h="370840">
+                <a:tc>
+                  <a:txBody>
+                    <a:bodyPr/>
+                    <a:lstStyle/>
+                    <a:p>
+                      <a:r>
+                        <a:rPr lang="es-ES" sz="1800" dirty="0"/>
+                        <a:t>R20x</a:t>
+                      </a:r>
+                      <a:endParaRPr lang="es-ES" dirty="0"/>
+                    </a:p>
+                  </a:txBody>
+                  <a:tcPr/>
+                </a:tc>
+                <a:extLst>
+                  <a:ext uri="{0D108BD9-81ED-4DB2-BD59-A6C34878D82A}">
+                    <a16:rowId xmlns:a16="http://schemas.microsoft.com/office/drawing/2014/main" val="1421684825"/>
+                  </a:ext>
+                </a:extLst>
+              </a:tr>
+              <a:tr h="370840">
+                <a:tc>
+                  <a:txBody>
+                    <a:bodyPr/>
+                    <a:lstStyle/>
+                    <a:p>
+                      <a:r>
+                        <a:rPr lang="es-ES" sz="1800" dirty="0"/>
+                        <a:t>R20y</a:t>
+                      </a:r>
+                      <a:endParaRPr lang="es-ES" dirty="0"/>
+                    </a:p>
+                  </a:txBody>
+                  <a:tcPr/>
+                </a:tc>
+                <a:extLst>
+                  <a:ext uri="{0D108BD9-81ED-4DB2-BD59-A6C34878D82A}">
+                    <a16:rowId xmlns:a16="http://schemas.microsoft.com/office/drawing/2014/main" val="1343607808"/>
+                  </a:ext>
+                </a:extLst>
+              </a:tr>
+              <a:tr h="370840">
+                <a:tc>
+                  <a:txBody>
+                    <a:bodyPr/>
+                    <a:lstStyle/>
+                    <a:p>
+                      <a:r>
+                        <a:rPr lang="es-ES" sz="1800" dirty="0"/>
+                        <a:t>R21y</a:t>
+                      </a:r>
+                      <a:endParaRPr lang="es-ES" dirty="0"/>
+                    </a:p>
+                  </a:txBody>
+                  <a:tcPr/>
+                </a:tc>
+                <a:extLst>
+                  <a:ext uri="{0D108BD9-81ED-4DB2-BD59-A6C34878D82A}">
+                    <a16:rowId xmlns:a16="http://schemas.microsoft.com/office/drawing/2014/main" val="3687407724"/>
+                  </a:ext>
+                </a:extLst>
+              </a:tr>
+              <a:tr h="370840">
+                <a:tc>
+                  <a:txBody>
+                    <a:bodyPr/>
+                    <a:lstStyle/>
+                    <a:p>
+                      <a:r>
+                        <a:rPr lang="es-ES" sz="1800" dirty="0"/>
+                        <a:t>R21y</a:t>
+                      </a:r>
+                      <a:endParaRPr lang="es-ES" dirty="0"/>
+                    </a:p>
+                  </a:txBody>
+                  <a:tcPr/>
+                </a:tc>
+                <a:extLst>
+                  <a:ext uri="{0D108BD9-81ED-4DB2-BD59-A6C34878D82A}">
+                    <a16:rowId xmlns:a16="http://schemas.microsoft.com/office/drawing/2014/main" val="2833319598"/>
+                  </a:ext>
+                </a:extLst>
+              </a:tr>
+              <a:tr h="370840">
+                <a:tc>
+                  <a:txBody>
+                    <a:bodyPr/>
+                    <a:lstStyle/>
+                    <a:p>
+                      <a:r>
+                        <a:rPr lang="es-ES" sz="1800" dirty="0"/>
+                        <a:t>R30x</a:t>
+                      </a:r>
+                      <a:endParaRPr lang="es-ES" dirty="0"/>
+                    </a:p>
+                  </a:txBody>
+                  <a:tcPr/>
+                </a:tc>
+                <a:extLst>
+                  <a:ext uri="{0D108BD9-81ED-4DB2-BD59-A6C34878D82A}">
+                    <a16:rowId xmlns:a16="http://schemas.microsoft.com/office/drawing/2014/main" val="2901084613"/>
+                  </a:ext>
+                </a:extLst>
+              </a:tr>
+              <a:tr h="389018">
+                <a:tc>
+                  <a:txBody>
+                    <a:bodyPr/>
+                    <a:lstStyle/>
+                    <a:p>
+                      <a:r>
+                        <a:rPr lang="es-ES" sz="1800" dirty="0"/>
+                        <a:t>R30y</a:t>
+                      </a:r>
+                      <a:endParaRPr lang="es-ES" dirty="0"/>
+                    </a:p>
+                  </a:txBody>
+                  <a:tcPr/>
+                </a:tc>
+                <a:extLst>
+                  <a:ext uri="{0D108BD9-81ED-4DB2-BD59-A6C34878D82A}">
+                    <a16:rowId xmlns:a16="http://schemas.microsoft.com/office/drawing/2014/main" val="3966289584"/>
+                  </a:ext>
+                </a:extLst>
+              </a:tr>
+              <a:tr h="370840">
+                <a:tc>
+                  <a:txBody>
+                    <a:bodyPr/>
+                    <a:lstStyle/>
+                    <a:p>
+                      <a:r>
+                        <a:rPr lang="es-ES" sz="1800" dirty="0"/>
+                        <a:t>R31x</a:t>
+                      </a:r>
+                      <a:endParaRPr lang="es-ES" dirty="0"/>
+                    </a:p>
+                  </a:txBody>
+                  <a:tcPr/>
+                </a:tc>
+                <a:extLst>
+                  <a:ext uri="{0D108BD9-81ED-4DB2-BD59-A6C34878D82A}">
+                    <a16:rowId xmlns:a16="http://schemas.microsoft.com/office/drawing/2014/main" val="976532337"/>
+                  </a:ext>
+                </a:extLst>
+              </a:tr>
+              <a:tr h="370840">
+                <a:tc>
+                  <a:txBody>
+                    <a:bodyPr/>
+                    <a:lstStyle/>
+                    <a:p>
+                      <a:r>
+                        <a:rPr lang="es-ES" sz="1800" dirty="0"/>
+                        <a:t>R31y</a:t>
+                      </a:r>
+                      <a:endParaRPr lang="es-ES" dirty="0"/>
+                    </a:p>
+                  </a:txBody>
+                  <a:tcPr/>
+                </a:tc>
+                <a:extLst>
+                  <a:ext uri="{0D108BD9-81ED-4DB2-BD59-A6C34878D82A}">
+                    <a16:rowId xmlns:a16="http://schemas.microsoft.com/office/drawing/2014/main" val="1031216866"/>
+                  </a:ext>
+                </a:extLst>
+              </a:tr>
+              <a:tr h="370840">
+                <a:tc>
+                  <a:txBody>
+                    <a:bodyPr/>
+                    <a:lstStyle/>
+                    <a:p>
+                      <a:r>
+                        <a:rPr lang="es-ES" sz="1800" dirty="0" err="1"/>
+                        <a:t>Fx</a:t>
+                      </a:r>
+                      <a:endParaRPr lang="es-ES" dirty="0"/>
+                    </a:p>
+                  </a:txBody>
+                  <a:tcPr/>
+                </a:tc>
+                <a:extLst>
+                  <a:ext uri="{0D108BD9-81ED-4DB2-BD59-A6C34878D82A}">
+                    <a16:rowId xmlns:a16="http://schemas.microsoft.com/office/drawing/2014/main" val="379132364"/>
+                  </a:ext>
+                </a:extLst>
+              </a:tr>
+              <a:tr h="370840">
+                <a:tc>
+                  <a:txBody>
+                    <a:bodyPr/>
+                    <a:lstStyle/>
+                    <a:p>
+                      <a:r>
+                        <a:rPr lang="es-ES" sz="1800" dirty="0" err="1"/>
+                        <a:t>Fy</a:t>
+                      </a:r>
+                      <a:endParaRPr lang="es-ES" dirty="0"/>
+                    </a:p>
+                  </a:txBody>
+                  <a:tcPr/>
+                </a:tc>
+                <a:extLst>
+                  <a:ext uri="{0D108BD9-81ED-4DB2-BD59-A6C34878D82A}">
+                    <a16:rowId xmlns:a16="http://schemas.microsoft.com/office/drawing/2014/main" val="4143454417"/>
+                  </a:ext>
+                </a:extLst>
+              </a:tr>
+            </a:tbl>
+          </a:graphicData>
+        </a:graphic>
+      </p:graphicFrame>
+    </p:spTree>
+    <p:extLst>
+      <p:ext uri="{BB962C8B-B14F-4D97-AF65-F5344CB8AC3E}">
+        <p14:creationId xmlns:p14="http://schemas.microsoft.com/office/powerpoint/2010/main" val="1710327042"/>
       </p:ext>
     </p:extLst>
   </p:cSld>
